--- a/docs/deck_team_189360/Team_189360.pptx
+++ b/docs/deck_team_189360/Team_189360.pptx
@@ -716,7 +716,7 @@
           <a:p/>
           <a:p>
             <a:r>
-              <a:t>IF ASKED 'NOT SURE goes to a senior officer to eyeball it?': No. The supervisor cannot change a NOT SURE into POSITIVE. On the Review page they can only order a retest or confirm NOT SURE. The sample goes to FSL as it does today.</a:t>
+              <a:t>IF ASKED 'Who decides a NOT SURE?': Nobody turns it into POSITIVE. The supervisor can only order a retest or confirm NOT SURE on the Review page, and the sample goes to FSL as it does today.</a:t>
             </a:r>
           </a:p>
           <a:p>
@@ -801,7 +801,7 @@
           </a:p>
           <a:p>
             <a:r>
-              <a:t>Results: 25 real phone scans, 14 right, 11 NOT SURE, 0 wrong. 7 of the NOT SUREs were trick cards made to test this, 3 were blurry photos (records 13, 14, 20, reason 'Photo is blurry'), 1 was a card-fit reject on 28 Sep.</a:t>
+              <a:t>Results: 25 real phone scans (6 on 28 Sep, 19 on 29 Sep), 14 right, 11 NOT SURE, 0 wrong. 7 NOT SUREs were trick cards made to test this, 3 were blurry photos (records 13, 14, 20), 1 was a card-fit reject on 28 Sep.</a:t>
             </a:r>
           </a:p>
           <a:p>
@@ -812,7 +812,7 @@
           <a:p/>
           <a:p>
             <a:r>
-              <a:t>IF ASKED 'What does 76% sure mean?': It is a match score. 99 x lead part x closeness part. Lead part = gap to the next colour / 12, capped at 1. Closeness part = 1 - half of (distance / 14). Not a probability. We will rename it 'match score' in the app.</a:t>
+              <a:t>IF ASKED 'What does 76% sure mean?': It is a match score, not a probability. 99 x lead part x closeness part. Lead part = gap to the next colour / 12, capped at 1. Closeness part = 1 - half of (distance / 14). We will rename it 'match score' in the app.</a:t>
             </a:r>
           </a:p>
           <a:p>
@@ -822,7 +822,7 @@
           </a:p>
           <a:p>
             <a:r>
-              <a:t>IF ASKED 'Residual error after correction?': That is our card fit number, the average Delta E of the 24 known colours after correction. 5.9 to 8.7 on real photos of a screen (limit 9), under 1 on computer-made photos. Screens glow, a paper card test is next.</a:t>
+              <a:t>IF ASKED 'Residual error after correction?': That is our card fit number, the average Delta E of the 24 known colours after correction. 5.9 to 8.7 on real photos of a screen (limit 9), under 1 on computer-made photos. A paper card test is next.</a:t>
             </a:r>
           </a:p>
           <a:p>
@@ -902,7 +902,7 @@
           </a:p>
           <a:p>
             <a:r>
-              <a:t>Every risk in the table has a status. Built means it is in the code now. Planned means it is not built yet.</a:t>
+              <a:t>Every challenge in the table has a status. Built means it is in the code now. Planned means not yet.</a:t>
             </a:r>
           </a:p>
           <a:p/>
@@ -923,7 +923,7 @@
           </a:p>
           <a:p>
             <a:r>
-              <a:t>IF ASKED 'Photo of a screen?': Honest answer, this is open. Our own tests used a screen, which proves the risk. Plan: screen-photo (moire) check plus Play Integrity. Until then a supervisor can see the photo on the Review page and the FSL report is still the final word.</a:t>
+              <a:t>IF ASKED 'Photo of a screen?': Honest answer, this is open. Our own tests used a screen, which proves the risk. Plan: screen-photo (moire) check plus Play Integrity. Until then the supervisor sees the photo and the FSL report is still the final word.</a:t>
             </a:r>
           </a:p>
         </p:txBody>
@@ -4860,8 +4860,8 @@
         </p:nvSpPr>
         <p:spPr>
           <a:xfrm>
-            <a:off x="8378223" y="2377440"/>
-            <a:ext cx="9228727" cy="830419"/>
+            <a:off x="914400" y="7296912"/>
+            <a:ext cx="7406640" cy="667866"/>
           </a:xfrm>
           <a:custGeom>
             <a:avLst/>
@@ -4913,8 +4913,8 @@
         </p:nvSpPr>
         <p:spPr>
           <a:xfrm flipV="1">
-            <a:off x="1066800" y="3858768"/>
-            <a:ext cx="7159819" cy="0"/>
+            <a:off x="1069848" y="4261104"/>
+            <a:ext cx="7159752" cy="0"/>
           </a:xfrm>
           <a:prstGeom prst="line">
             <a:avLst/>
@@ -5061,58 +5061,14 @@
       </p:sp>
       <p:sp>
         <p:nvSpPr>
-          <p:cNvPr id="24" name="TextBox 24"/>
-          <p:cNvSpPr txBox="1"/>
-          <p:nvPr/>
-        </p:nvSpPr>
-        <p:spPr>
-          <a:xfrm>
-            <a:off x="11965447" y="1874519"/>
-            <a:ext cx="1851963" cy="438150"/>
-          </a:xfrm>
-          <a:prstGeom prst="rect">
-            <a:avLst/>
-          </a:prstGeom>
-        </p:spPr>
-        <p:txBody>
-          <a:bodyPr lIns="0" tIns="0" rIns="0" bIns="0" rtlCol="0" anchor="t">
-            <a:spAutoFit/>
-          </a:bodyPr>
-          <a:lstStyle/>
-          <a:p>
-            <a:pPr algn="ctr">
-              <a:lnSpc>
-                <a:spcPts val="3000"/>
-              </a:lnSpc>
-              <a:spcBef>
-                <a:spcPct val="0"/>
-              </a:spcBef>
-            </a:pPr>
-            <a:r>
-              <a:rPr lang="en-US" sz="2500" b="1" spc="-27">
-                <a:solidFill>
-                  <a:srgbClr val="974826"/>
-                </a:solidFill>
-                <a:latin typeface="Calibri"/>
-                <a:ea typeface="Calibri"/>
-                <a:cs typeface="Calibri"/>
-                <a:sym typeface="Calibri"/>
-              </a:rPr>
-              <a:t>Our Approach</a:t>
-            </a:r>
-          </a:p>
-        </p:txBody>
-      </p:sp>
-      <p:sp>
-        <p:nvSpPr>
           <p:cNvPr id="25" name="Freeform 25"/>
           <p:cNvSpPr/>
           <p:nvPr/>
         </p:nvSpPr>
         <p:spPr>
           <a:xfrm>
-            <a:off x="6967728" y="8247888"/>
-            <a:ext cx="1115568" cy="1115568"/>
+            <a:off x="6583680" y="8302752"/>
+            <a:ext cx="1060704" cy="1060704"/>
           </a:xfrm>
           <a:custGeom>
             <a:avLst/>
@@ -5164,7 +5120,7 @@
         </p:nvSpPr>
         <p:spPr>
           <a:xfrm>
-            <a:off x="987552" y="8558784"/>
+            <a:off x="1097280" y="8641080"/>
             <a:ext cx="3063240" cy="393192"/>
           </a:xfrm>
           <a:prstGeom prst="rect">
@@ -5208,7 +5164,7 @@
         </p:nvSpPr>
         <p:spPr>
           <a:xfrm>
-            <a:off x="4114800" y="8577072"/>
+            <a:off x="4224528" y="8659368"/>
             <a:ext cx="2103120" cy="365760"/>
           </a:xfrm>
           <a:prstGeom prst="rect">
@@ -5252,7 +5208,7 @@
         </p:nvSpPr>
         <p:spPr>
           <a:xfrm>
-            <a:off x="4114800" y="8531352"/>
+            <a:off x="4224528" y="8613648"/>
             <a:ext cx="2103120" cy="457200"/>
           </a:xfrm>
           <a:prstGeom prst="rect">
@@ -5300,8 +5256,8 @@
         </p:nvSpPr>
         <p:spPr>
           <a:xfrm>
-            <a:off x="6967728" y="8247888"/>
-            <a:ext cx="1115568" cy="1115568"/>
+            <a:off x="6583680" y="8302752"/>
+            <a:ext cx="1060704" cy="1060704"/>
           </a:xfrm>
           <a:prstGeom prst="rect">
             <a:avLst/>
@@ -5346,8 +5302,8 @@
         </p:nvSpPr>
         <p:spPr>
           <a:xfrm>
-            <a:off x="8595360" y="3383280"/>
-            <a:ext cx="9006840" cy="381000"/>
+            <a:off x="8577072" y="5989320"/>
+            <a:ext cx="9052560" cy="381000"/>
           </a:xfrm>
           <a:prstGeom prst="rect">
             <a:avLst/>
@@ -5393,172 +5349,13 @@
       </p:sp>
       <p:sp>
         <p:nvSpPr>
-          <p:cNvPr id="31" name="Freeform 8"/>
-          <p:cNvSpPr/>
-          <p:nvPr/>
-        </p:nvSpPr>
-        <p:spPr>
-          <a:xfrm>
-            <a:off x="8595360" y="3858768"/>
-            <a:ext cx="1420051" cy="1783080"/>
-          </a:xfrm>
-          <a:custGeom>
-            <a:avLst/>
-            <a:gdLst/>
-            <a:ahLst/>
-            <a:cxnLst/>
-            <a:rect l="l" t="t" r="r" b="b"/>
-            <a:pathLst>
-              <a:path w="2720876" h="3416454">
-                <a:moveTo>
-                  <a:pt x="0" y="0"/>
-                </a:moveTo>
-                <a:lnTo>
-                  <a:pt x="2720876" y="0"/>
-                </a:lnTo>
-                <a:lnTo>
-                  <a:pt x="2720876" y="3416454"/>
-                </a:lnTo>
-                <a:lnTo>
-                  <a:pt x="0" y="3416454"/>
-                </a:lnTo>
-                <a:lnTo>
-                  <a:pt x="0" y="0"/>
-                </a:lnTo>
-                <a:close/>
-              </a:path>
-            </a:pathLst>
-          </a:custGeom>
-          <a:blipFill>
-            <a:blip r:embed="rId8"/>
-            <a:stretch>
-              <a:fillRect t="-6699" b="-70279"/>
-            </a:stretch>
-          </a:blipFill>
-        </p:spPr>
-        <p:txBody>
-          <a:bodyPr/>
-          <a:lstStyle/>
-          <a:p>
-            <a:endParaRPr/>
-          </a:p>
-        </p:txBody>
-      </p:sp>
-      <p:sp>
-        <p:nvSpPr>
-          <p:cNvPr id="32" name="Freeform 10"/>
-          <p:cNvSpPr/>
-          <p:nvPr/>
-        </p:nvSpPr>
-        <p:spPr>
-          <a:xfrm>
-            <a:off x="10498282" y="3858768"/>
-            <a:ext cx="861759" cy="1783080"/>
-          </a:xfrm>
-          <a:custGeom>
-            <a:avLst/>
-            <a:gdLst/>
-            <a:ahLst/>
-            <a:cxnLst/>
-            <a:rect l="l" t="t" r="r" b="b"/>
-            <a:pathLst>
-              <a:path w="1553035" h="3213409">
-                <a:moveTo>
-                  <a:pt x="0" y="0"/>
-                </a:moveTo>
-                <a:lnTo>
-                  <a:pt x="1553035" y="0"/>
-                </a:lnTo>
-                <a:lnTo>
-                  <a:pt x="1553035" y="3213409"/>
-                </a:lnTo>
-                <a:lnTo>
-                  <a:pt x="0" y="3213409"/>
-                </a:lnTo>
-                <a:lnTo>
-                  <a:pt x="0" y="0"/>
-                </a:lnTo>
-                <a:close/>
-              </a:path>
-            </a:pathLst>
-          </a:custGeom>
-          <a:blipFill>
-            <a:blip r:embed="rId9"/>
-            <a:stretch>
-              <a:fillRect t="-4065" b="-3334"/>
-            </a:stretch>
-          </a:blipFill>
-        </p:spPr>
-        <p:txBody>
-          <a:bodyPr/>
-          <a:lstStyle/>
-          <a:p>
-            <a:endParaRPr/>
-          </a:p>
-        </p:txBody>
-      </p:sp>
-      <p:sp>
-        <p:nvSpPr>
-          <p:cNvPr id="34" name="Freeform 9"/>
-          <p:cNvSpPr/>
-          <p:nvPr/>
-        </p:nvSpPr>
-        <p:spPr>
-          <a:xfrm>
-            <a:off x="13389239" y="3858768"/>
-            <a:ext cx="4212960" cy="1783080"/>
-          </a:xfrm>
-          <a:custGeom>
-            <a:avLst/>
-            <a:gdLst/>
-            <a:ahLst/>
-            <a:cxnLst/>
-            <a:rect l="l" t="t" r="r" b="b"/>
-            <a:pathLst>
-              <a:path w="6414433" h="2714824">
-                <a:moveTo>
-                  <a:pt x="0" y="0"/>
-                </a:moveTo>
-                <a:lnTo>
-                  <a:pt x="6414433" y="0"/>
-                </a:lnTo>
-                <a:lnTo>
-                  <a:pt x="6414433" y="2714824"/>
-                </a:lnTo>
-                <a:lnTo>
-                  <a:pt x="0" y="2714824"/>
-                </a:lnTo>
-                <a:lnTo>
-                  <a:pt x="0" y="0"/>
-                </a:lnTo>
-                <a:close/>
-              </a:path>
-            </a:pathLst>
-          </a:custGeom>
-          <a:blipFill>
-            <a:blip r:embed="rId11"/>
-            <a:stretch>
-              <a:fillRect t="-2643" r="-1398" b="-29274"/>
-            </a:stretch>
-          </a:blipFill>
-        </p:spPr>
-        <p:txBody>
-          <a:bodyPr/>
-          <a:lstStyle/>
-          <a:p>
-            <a:endParaRPr/>
-          </a:p>
-        </p:txBody>
-      </p:sp>
-      <p:sp>
-        <p:nvSpPr>
           <p:cNvPr id="35" name="Freeform 12"/>
           <p:cNvSpPr/>
           <p:nvPr/>
         </p:nvSpPr>
         <p:spPr>
           <a:xfrm>
-            <a:off x="10096826" y="4645151"/>
+            <a:off x="10574620" y="7795260"/>
             <a:ext cx="320040" cy="210312"/>
           </a:xfrm>
           <a:custGeom>
@@ -5617,7 +5414,7 @@
         </p:nvSpPr>
         <p:spPr>
           <a:xfrm>
-            <a:off x="11441457" y="4645151"/>
+            <a:off x="12213682" y="7795260"/>
             <a:ext cx="320040" cy="210312"/>
           </a:xfrm>
           <a:custGeom>
@@ -5676,7 +5473,7 @@
         </p:nvSpPr>
         <p:spPr>
           <a:xfrm>
-            <a:off x="12987783" y="4645151"/>
+            <a:off x="14128234" y="7795260"/>
             <a:ext cx="320040" cy="210312"/>
           </a:xfrm>
           <a:custGeom>
@@ -5729,14 +5526,14 @@
       </p:sp>
       <p:sp>
         <p:nvSpPr>
-          <p:cNvPr id="40" name="TextBox 39"/>
+          <p:cNvPr id="38" name="TextBox 37"/>
           <p:cNvSpPr txBox="1"/>
           <p:nvPr/>
         </p:nvSpPr>
         <p:spPr>
           <a:xfrm>
-            <a:off x="8595360" y="5641848"/>
-            <a:ext cx="9006840" cy="219456"/>
+            <a:off x="1097280" y="1783080"/>
+            <a:ext cx="1463040" cy="457200"/>
           </a:xfrm>
           <a:prstGeom prst="rect">
             <a:avLst/>
@@ -5744,57 +5541,38 @@
           <a:noFill/>
         </p:spPr>
         <p:txBody>
-          <a:bodyPr wrap="square" lIns="36576" tIns="18288" rIns="36576" bIns="18288">
+          <a:bodyPr wrap="square" anchor="t" lIns="27432" rIns="27432" tIns="18288" bIns="18288">
             <a:noAutofit/>
           </a:bodyPr>
           <a:lstStyle/>
           <a:p>
-            <a:r>
-              <a:rPr sz="1200" b="0" i="1">
-                <a:solidFill>
-                  <a:srgbClr val="6B6B6B"/>
+            <a:pPr algn="l">
+              <a:spcAft>
+                <a:spcPts val="0"/>
+              </a:spcAft>
+            </a:pPr>
+            <a:r>
+              <a:rPr sz="2500" b="1" i="0">
+                <a:solidFill>
+                  <a:srgbClr val="974826"/>
                 </a:solidFill>
                 <a:latin typeface="Calibri"/>
               </a:rPr>
-              <a:t>Real screenshots. Result screen shown in Tamil. Test Log (right) filters by date, officer, kit and result, and downloads CSV or PDF with QR.</a:t>
-            </a:r>
-          </a:p>
-        </p:txBody>
-      </p:sp>
-      <p:pic>
-        <p:nvPicPr>
-          <p:cNvPr id="43" name="Tamil result screen" descr="tamil_result_crop.png"/>
-          <p:cNvPicPr>
-            <a:picLocks noChangeAspect="1"/>
-          </p:cNvPicPr>
-          <p:nvPr/>
-        </p:nvPicPr>
-        <p:blipFill>
-          <a:blip r:embed="rId13"/>
-          <a:stretch>
-            <a:fillRect/>
-          </a:stretch>
-        </p:blipFill>
-        <p:spPr>
-          <a:xfrm>
-            <a:off x="11842913" y="3858768"/>
-            <a:ext cx="1063454" cy="1783080"/>
-          </a:xfrm>
-          <a:prstGeom prst="rect">
-            <a:avLst/>
-          </a:prstGeom>
-        </p:spPr>
-      </p:pic>
-      <p:sp>
-        <p:nvSpPr>
-          <p:cNvPr id="44" name="TextBox 43"/>
+              <a:t>Problem</a:t>
+            </a:r>
+          </a:p>
+        </p:txBody>
+      </p:sp>
+      <p:sp>
+        <p:nvSpPr>
+          <p:cNvPr id="39" name="TextBox 38"/>
           <p:cNvSpPr txBox="1"/>
           <p:nvPr/>
         </p:nvSpPr>
         <p:spPr>
           <a:xfrm>
-            <a:off x="987552" y="1783080"/>
-            <a:ext cx="1463040" cy="457200"/>
+            <a:off x="2377440" y="1901952"/>
+            <a:ext cx="5852160" cy="292608"/>
           </a:xfrm>
           <a:prstGeom prst="rect">
             <a:avLst/>
@@ -5809,45 +5587,6 @@
           <a:p>
             <a:pPr algn="l">
               <a:spcAft>
-                <a:spcPts val="0"/>
-              </a:spcAft>
-            </a:pPr>
-            <a:r>
-              <a:rPr sz="2500" b="1" i="0">
-                <a:solidFill>
-                  <a:srgbClr val="974826"/>
-                </a:solidFill>
-                <a:latin typeface="Calibri"/>
-              </a:rPr>
-              <a:t>Problem</a:t>
-            </a:r>
-          </a:p>
-        </p:txBody>
-      </p:sp>
-      <p:sp>
-        <p:nvSpPr>
-          <p:cNvPr id="45" name="TextBox 44"/>
-          <p:cNvSpPr txBox="1"/>
-          <p:nvPr/>
-        </p:nvSpPr>
-        <p:spPr>
-          <a:xfrm>
-            <a:off x="2331720" y="1883664"/>
-            <a:ext cx="5852160" cy="310896"/>
-          </a:xfrm>
-          <a:prstGeom prst="rect">
-            <a:avLst/>
-          </a:prstGeom>
-          <a:noFill/>
-        </p:spPr>
-        <p:txBody>
-          <a:bodyPr wrap="square" anchor="t" lIns="27432" rIns="27432" tIns="18288" bIns="18288">
-            <a:noAutofit/>
-          </a:bodyPr>
-          <a:lstStyle/>
-          <a:p>
-            <a:pPr algn="l">
-              <a:spcAft>
                 <a:spcPts val="400"/>
               </a:spcAft>
             </a:pPr>
@@ -5865,273 +5604,14 @@
       </p:sp>
       <p:sp>
         <p:nvSpPr>
-          <p:cNvPr id="46" name="TextBox 45"/>
+          <p:cNvPr id="40" name="TextBox 39"/>
           <p:cNvSpPr txBox="1"/>
           <p:nvPr/>
         </p:nvSpPr>
         <p:spPr>
           <a:xfrm>
-            <a:off x="987552" y="2258568"/>
-            <a:ext cx="7132320" cy="1572768"/>
-          </a:xfrm>
-          <a:prstGeom prst="rect">
-            <a:avLst/>
-          </a:prstGeom>
-          <a:noFill/>
-        </p:spPr>
-        <p:txBody>
-          <a:bodyPr wrap="square" anchor="t" lIns="27432" rIns="27432" tIns="18288" bIns="18288">
-            <a:noAutofit/>
-          </a:bodyPr>
-          <a:lstStyle/>
-          <a:p>
-            <a:pPr algn="l" marL="201168" indent="-201168">
-              <a:spcAft>
-                <a:spcPts val="300"/>
-              </a:spcAft>
-              <a:buFont typeface="Arial"/>
-              <a:buChar char="•"/>
-            </a:pPr>
-            <a:r>
-              <a:rPr sz="1600" b="0" i="0">
-                <a:solidFill>
-                  <a:srgbClr val="000000"/>
-                </a:solidFill>
-                <a:latin typeface="Calibri"/>
-              </a:rPr>
-              <a:t>Officers read the kit's colour change by eye, so street lamp, torch or sunlight and personal judgement can change the result.</a:t>
-            </a:r>
-          </a:p>
-          <a:p>
-            <a:pPr algn="l" marL="201168" indent="-201168">
-              <a:spcAft>
-                <a:spcPts val="300"/>
-              </a:spcAft>
-              <a:buFont typeface="Arial"/>
-              <a:buChar char="•"/>
-            </a:pPr>
-            <a:r>
-              <a:rPr sz="1600" b="0" i="0">
-                <a:solidFill>
-                  <a:srgbClr val="000000"/>
-                </a:solidFill>
-                <a:latin typeface="Calibri"/>
-              </a:rPr>
-              <a:t>There is no standard colour value to compare the result with.</a:t>
-            </a:r>
-          </a:p>
-          <a:p>
-            <a:pPr algn="l" marL="201168" indent="-201168">
-              <a:spcAft>
-                <a:spcPts val="300"/>
-              </a:spcAft>
-              <a:buFont typeface="Arial"/>
-              <a:buChar char="•"/>
-            </a:pPr>
-            <a:r>
-              <a:rPr sz="1600" b="0" i="0">
-                <a:solidFill>
-                  <a:srgbClr val="000000"/>
-                </a:solidFill>
-                <a:latin typeface="Calibri"/>
-              </a:rPr>
-              <a:t>The test often leaves no clear digital record of who tested, where and when, so it is hard to verify later.</a:t>
-            </a:r>
-          </a:p>
-        </p:txBody>
-      </p:sp>
-      <p:sp>
-        <p:nvSpPr>
-          <p:cNvPr id="47" name="TextBox 46"/>
-          <p:cNvSpPr txBox="1"/>
-          <p:nvPr/>
-        </p:nvSpPr>
-        <p:spPr>
-          <a:xfrm>
-            <a:off x="987552" y="3931920"/>
-            <a:ext cx="2743200" cy="457200"/>
-          </a:xfrm>
-          <a:prstGeom prst="rect">
-            <a:avLst/>
-          </a:prstGeom>
-          <a:noFill/>
-        </p:spPr>
-        <p:txBody>
-          <a:bodyPr wrap="square" anchor="t" lIns="27432" rIns="27432" tIns="18288" bIns="18288">
-            <a:noAutofit/>
-          </a:bodyPr>
-          <a:lstStyle/>
-          <a:p>
-            <a:pPr algn="l">
-              <a:spcAft>
-                <a:spcPts val="0"/>
-              </a:spcAft>
-            </a:pPr>
-            <a:r>
-              <a:rPr sz="2500" b="1" i="0">
-                <a:solidFill>
-                  <a:srgbClr val="974826"/>
-                </a:solidFill>
-                <a:latin typeface="Calibri"/>
-              </a:rPr>
-              <a:t>Solution</a:t>
-            </a:r>
-          </a:p>
-        </p:txBody>
-      </p:sp>
-      <p:sp>
-        <p:nvSpPr>
-          <p:cNvPr id="48" name="TextBox 47"/>
-          <p:cNvSpPr txBox="1"/>
-          <p:nvPr/>
-        </p:nvSpPr>
-        <p:spPr>
-          <a:xfrm>
-            <a:off x="987552" y="4370832"/>
-            <a:ext cx="7132320" cy="1783080"/>
-          </a:xfrm>
-          <a:prstGeom prst="rect">
-            <a:avLst/>
-          </a:prstGeom>
-          <a:noFill/>
-        </p:spPr>
-        <p:txBody>
-          <a:bodyPr wrap="square" anchor="t" lIns="27432" rIns="27432" tIns="18288" bIns="18288">
-            <a:noAutofit/>
-          </a:bodyPr>
-          <a:lstStyle/>
-          <a:p>
-            <a:pPr algn="l" marL="201168" indent="-201168">
-              <a:spcAft>
-                <a:spcPts val="300"/>
-              </a:spcAft>
-              <a:buFont typeface="Arial"/>
-              <a:buChar char="•"/>
-            </a:pPr>
-            <a:r>
-              <a:rPr sz="1600" b="1" i="0">
-                <a:solidFill>
-                  <a:srgbClr val="000000"/>
-                </a:solidFill>
-                <a:latin typeface="Calibri"/>
-              </a:rPr>
-              <a:t>Check the Test</a:t>
-            </a:r>
-            <a:r>
-              <a:rPr sz="1600" b="0" i="0">
-                <a:solidFill>
-                  <a:srgbClr val="000000"/>
-                </a:solidFill>
-                <a:latin typeface="Calibri"/>
-              </a:rPr>
-              <a:t> - the app photographs the kit next to a ₹10 colour card, corrects the colour and says POSITIVE, NEGATIVE or NOT SURE.</a:t>
-            </a:r>
-          </a:p>
-          <a:p>
-            <a:pPr algn="l" marL="201168" indent="-201168">
-              <a:spcAft>
-                <a:spcPts val="300"/>
-              </a:spcAft>
-              <a:buFont typeface="Arial"/>
-              <a:buChar char="•"/>
-            </a:pPr>
-            <a:r>
-              <a:rPr sz="1600" b="1" i="0">
-                <a:solidFill>
-                  <a:srgbClr val="000000"/>
-                </a:solidFill>
-                <a:latin typeface="Calibri"/>
-              </a:rPr>
-              <a:t>Record the Test</a:t>
-            </a:r>
-            <a:r>
-              <a:rPr sz="1600" b="0" i="0">
-                <a:solidFill>
-                  <a:srgbClr val="000000"/>
-                </a:solidFill>
-                <a:latin typeface="Calibri"/>
-              </a:rPr>
-              <a:t> - saves the photo fingerprint, internet time, GPS and officer ID as a signed record with a QR check.</a:t>
-            </a:r>
-          </a:p>
-          <a:p>
-            <a:pPr algn="l" marL="201168" indent="-201168">
-              <a:spcAft>
-                <a:spcPts val="300"/>
-              </a:spcAft>
-              <a:buFont typeface="Arial"/>
-              <a:buChar char="•"/>
-            </a:pPr>
-            <a:r>
-              <a:rPr sz="1600" b="1" i="0">
-                <a:solidFill>
-                  <a:srgbClr val="000000"/>
-                </a:solidFill>
-                <a:latin typeface="Calibri"/>
-              </a:rPr>
-              <a:t>Manage the Records</a:t>
-            </a:r>
-            <a:r>
-              <a:rPr sz="1600" b="0" i="0">
-                <a:solidFill>
-                  <a:srgbClr val="000000"/>
-                </a:solidFill>
-                <a:latin typeface="Calibri"/>
-              </a:rPr>
-              <a:t> - supervisors see the test log, map, NOT SURE review and PDF reports on the dashboard.</a:t>
-            </a:r>
-          </a:p>
-        </p:txBody>
-      </p:sp>
-      <p:sp>
-        <p:nvSpPr>
-          <p:cNvPr id="49" name="TextBox 48"/>
-          <p:cNvSpPr txBox="1"/>
-          <p:nvPr/>
-        </p:nvSpPr>
-        <p:spPr>
-          <a:xfrm>
-            <a:off x="987552" y="6199632"/>
-            <a:ext cx="4572000" cy="457200"/>
-          </a:xfrm>
-          <a:prstGeom prst="rect">
-            <a:avLst/>
-          </a:prstGeom>
-          <a:noFill/>
-        </p:spPr>
-        <p:txBody>
-          <a:bodyPr wrap="square" anchor="t" lIns="27432" rIns="27432" tIns="18288" bIns="18288">
-            <a:noAutofit/>
-          </a:bodyPr>
-          <a:lstStyle/>
-          <a:p>
-            <a:pPr algn="l">
-              <a:spcAft>
-                <a:spcPts val="0"/>
-              </a:spcAft>
-            </a:pPr>
-            <a:r>
-              <a:rPr sz="2500" b="1" i="0">
-                <a:solidFill>
-                  <a:srgbClr val="974826"/>
-                </a:solidFill>
-                <a:latin typeface="Calibri"/>
-              </a:rPr>
-              <a:t>User Experience</a:t>
-            </a:r>
-          </a:p>
-        </p:txBody>
-      </p:sp>
-      <p:sp>
-        <p:nvSpPr>
-          <p:cNvPr id="50" name="TextBox 49"/>
-          <p:cNvSpPr txBox="1"/>
-          <p:nvPr/>
-        </p:nvSpPr>
-        <p:spPr>
-          <a:xfrm>
-            <a:off x="987552" y="6638544"/>
-            <a:ext cx="7132320" cy="1645920"/>
+            <a:off x="1097280" y="2212848"/>
+            <a:ext cx="7178040" cy="1965960"/>
           </a:xfrm>
           <a:prstGeom prst="rect">
             <a:avLst/>
@@ -6152,22 +5632,13 @@
               <a:buChar char="•"/>
             </a:pPr>
             <a:r>
-              <a:rPr sz="1500" b="1" i="0">
+              <a:rPr sz="2000" b="0" i="0">
                 <a:solidFill>
                   <a:srgbClr val="000000"/>
                 </a:solidFill>
                 <a:latin typeface="Calibri"/>
               </a:rPr>
-              <a:t>4 steps</a:t>
-            </a:r>
-            <a:r>
-              <a:rPr sz="1500" b="0" i="0">
-                <a:solidFill>
-                  <a:srgbClr val="000000"/>
-                </a:solidFill>
-                <a:latin typeface="Calibri"/>
-              </a:rPr>
-              <a:t> - choose kit, start the kit's read timer, take the photo inside the box, see the result. About 16 s per test (19 scans, 1 team member).</a:t>
+              <a:t>Officers mainly judge the kit's colour change by looking at it, so lighting and personal judgement can affect the result.</a:t>
             </a:r>
           </a:p>
           <a:p>
@@ -6179,22 +5650,13 @@
               <a:buChar char="•"/>
             </a:pPr>
             <a:r>
-              <a:rPr sz="1500" b="1" i="0">
+              <a:rPr sz="2000" b="0" i="0">
                 <a:solidFill>
                   <a:srgbClr val="000000"/>
                 </a:solidFill>
                 <a:latin typeface="Calibri"/>
               </a:rPr>
-              <a:t>NOT SURE path</a:t>
-            </a:r>
-            <a:r>
-              <a:rPr sz="1500" b="0" i="0">
-                <a:solidFill>
-                  <a:srgbClr val="000000"/>
-                </a:solidFill>
-                <a:latin typeface="Calibri"/>
-              </a:rPr>
-              <a:t> - the app says why (blurry, shiny, card not seen, colour unclear) and asks for a retake. Still NOT SURE means no field result. The supervisor can only order a retest or confirm NOT SURE, and the sample goes to FSL.</a:t>
+              <a:t>There is no standard colour value to compare the test result with.</a:t>
             </a:r>
           </a:p>
           <a:p>
@@ -6206,44 +5668,178 @@
               <a:buChar char="•"/>
             </a:pPr>
             <a:r>
-              <a:rPr sz="1500" b="1" i="0">
+              <a:rPr sz="2000" b="0" i="0">
                 <a:solidFill>
                   <a:srgbClr val="000000"/>
                 </a:solidFill>
                 <a:latin typeface="Calibri"/>
               </a:rPr>
-              <a:t>Easy to read</a:t>
-            </a:r>
-            <a:r>
-              <a:rPr sz="1500" b="0" i="0">
+              <a:t>The test does not always leave a clear digital record of who performed it, where, and when, making it harder to verify later.</a:t>
+            </a:r>
+          </a:p>
+        </p:txBody>
+      </p:sp>
+      <p:sp>
+        <p:nvSpPr>
+          <p:cNvPr id="41" name="TextBox 40"/>
+          <p:cNvSpPr txBox="1"/>
+          <p:nvPr/>
+        </p:nvSpPr>
+        <p:spPr>
+          <a:xfrm>
+            <a:off x="1097280" y="4352544"/>
+            <a:ext cx="2743200" cy="457200"/>
+          </a:xfrm>
+          <a:prstGeom prst="rect">
+            <a:avLst/>
+          </a:prstGeom>
+          <a:noFill/>
+        </p:spPr>
+        <p:txBody>
+          <a:bodyPr wrap="square" anchor="t" lIns="27432" rIns="27432" tIns="18288" bIns="18288">
+            <a:noAutofit/>
+          </a:bodyPr>
+          <a:lstStyle/>
+          <a:p>
+            <a:pPr algn="l">
+              <a:spcAft>
+                <a:spcPts val="0"/>
+              </a:spcAft>
+            </a:pPr>
+            <a:r>
+              <a:rPr sz="2500" b="1" i="0">
+                <a:solidFill>
+                  <a:srgbClr val="974826"/>
+                </a:solidFill>
+                <a:latin typeface="Calibri"/>
+              </a:rPr>
+              <a:t>Solution</a:t>
+            </a:r>
+          </a:p>
+        </p:txBody>
+      </p:sp>
+      <p:sp>
+        <p:nvSpPr>
+          <p:cNvPr id="42" name="TextBox 41"/>
+          <p:cNvSpPr txBox="1"/>
+          <p:nvPr/>
+        </p:nvSpPr>
+        <p:spPr>
+          <a:xfrm>
+            <a:off x="1097280" y="4754880"/>
+            <a:ext cx="7178040" cy="2423160"/>
+          </a:xfrm>
+          <a:prstGeom prst="rect">
+            <a:avLst/>
+          </a:prstGeom>
+          <a:noFill/>
+        </p:spPr>
+        <p:txBody>
+          <a:bodyPr wrap="square" anchor="t" lIns="27432" rIns="27432" tIns="18288" bIns="18288">
+            <a:noAutofit/>
+          </a:bodyPr>
+          <a:lstStyle/>
+          <a:p>
+            <a:pPr algn="l" marL="201168" indent="-201168">
+              <a:spcAft>
+                <a:spcPts val="200"/>
+              </a:spcAft>
+              <a:buFont typeface="Arial"/>
+              <a:buChar char="•"/>
+            </a:pPr>
+            <a:r>
+              <a:rPr sz="2000" b="1" i="0">
                 <a:solidFill>
                   <a:srgbClr val="000000"/>
                 </a:solidFill>
                 <a:latin typeface="Calibri"/>
               </a:rPr>
-              <a:t> - big coloured result, works in Tamil too.</a:t>
-            </a:r>
-          </a:p>
-        </p:txBody>
-      </p:sp>
-      <p:sp>
-        <p:nvSpPr>
-          <p:cNvPr id="51" name="Rounded Rectangle 50"/>
+              <a:t>Check the Test</a:t>
+            </a:r>
+            <a:r>
+              <a:rPr sz="2000" b="0" i="0">
+                <a:solidFill>
+                  <a:srgbClr val="000000"/>
+                </a:solidFill>
+                <a:latin typeface="Calibri"/>
+              </a:rPr>
+              <a:t> - The app photographs the kit next to a ₹10 colour card and says POSITIVE, NEGATIVE or NOT SURE.</a:t>
+            </a:r>
+          </a:p>
+          <a:p>
+            <a:pPr algn="l" marL="201168" indent="-201168">
+              <a:spcAft>
+                <a:spcPts val="200"/>
+              </a:spcAft>
+              <a:buFont typeface="Arial"/>
+              <a:buChar char="•"/>
+            </a:pPr>
+            <a:r>
+              <a:rPr sz="2000" b="1" i="0">
+                <a:solidFill>
+                  <a:srgbClr val="000000"/>
+                </a:solidFill>
+                <a:latin typeface="Calibri"/>
+              </a:rPr>
+              <a:t>Record the Test</a:t>
+            </a:r>
+            <a:r>
+              <a:rPr sz="2000" b="0" i="0">
+                <a:solidFill>
+                  <a:srgbClr val="000000"/>
+                </a:solidFill>
+                <a:latin typeface="Calibri"/>
+              </a:rPr>
+              <a:t> - Saves the result with the photo fingerprint, time, GPS and Inspector ID, signed for a QR check.</a:t>
+            </a:r>
+          </a:p>
+          <a:p>
+            <a:pPr algn="l" marL="201168" indent="-201168">
+              <a:spcAft>
+                <a:spcPts val="200"/>
+              </a:spcAft>
+              <a:buFont typeface="Arial"/>
+              <a:buChar char="•"/>
+            </a:pPr>
+            <a:r>
+              <a:rPr sz="2000" b="1" i="0">
+                <a:solidFill>
+                  <a:srgbClr val="000000"/>
+                </a:solidFill>
+                <a:latin typeface="Calibri"/>
+              </a:rPr>
+              <a:t>Manage the Records</a:t>
+            </a:r>
+            <a:r>
+              <a:rPr sz="2000" b="0" i="0">
+                <a:solidFill>
+                  <a:srgbClr val="000000"/>
+                </a:solidFill>
+                <a:latin typeface="Calibri"/>
+              </a:rPr>
+              <a:t> - The admin dashboard manages Inspectors, test records, NOT SURE reviews and reports.</a:t>
+            </a:r>
+          </a:p>
+        </p:txBody>
+      </p:sp>
+      <p:sp>
+        <p:nvSpPr>
+          <p:cNvPr id="43" name="Rounded Rectangle 42"/>
           <p:cNvSpPr/>
           <p:nvPr/>
         </p:nvSpPr>
         <p:spPr>
           <a:xfrm>
-            <a:off x="8595360" y="5961888"/>
-            <a:ext cx="9006840" cy="3456432"/>
+            <a:off x="9144000" y="1709928"/>
+            <a:ext cx="7086600" cy="4160520"/>
           </a:xfrm>
           <a:prstGeom prst="roundRect">
             <a:avLst>
-              <a:gd name="adj" fmla="val 6000"/>
+              <a:gd name="adj" fmla="val 4000"/>
             </a:avLst>
           </a:prstGeom>
           <a:noFill/>
-          <a:ln w="25400">
+          <a:ln w="28575">
             <a:solidFill>
               <a:srgbClr val="7A2F00"/>
             </a:solidFill>
@@ -6274,13 +5870,13 @@
       </p:sp>
       <p:sp>
         <p:nvSpPr>
-          <p:cNvPr id="52" name="TextBox 51"/>
+          <p:cNvPr id="44" name="TextBox 43"/>
           <p:cNvSpPr txBox="1"/>
           <p:nvPr/>
         </p:nvSpPr>
         <p:spPr>
           <a:xfrm>
-            <a:off x="8796528" y="6016752"/>
+            <a:off x="9418320" y="1810512"/>
             <a:ext cx="1463040" cy="457200"/>
           </a:xfrm>
           <a:prstGeom prst="rect">
@@ -6300,7 +5896,7 @@
               </a:spcAft>
             </a:pPr>
             <a:r>
-              <a:rPr sz="2500" b="1" i="0">
+              <a:rPr sz="2300" b="1" i="0">
                 <a:solidFill>
                   <a:srgbClr val="974826"/>
                 </a:solidFill>
@@ -6313,14 +5909,14 @@
       </p:sp>
       <p:sp>
         <p:nvSpPr>
-          <p:cNvPr id="53" name="TextBox 52"/>
+          <p:cNvPr id="45" name="TextBox 44"/>
           <p:cNvSpPr txBox="1"/>
           <p:nvPr/>
         </p:nvSpPr>
         <p:spPr>
           <a:xfrm>
-            <a:off x="10241280" y="6108192"/>
-            <a:ext cx="7223760" cy="310896"/>
+            <a:off x="10607040" y="1920240"/>
+            <a:ext cx="5486400" cy="292608"/>
           </a:xfrm>
           <a:prstGeom prst="rect">
             <a:avLst/>
@@ -6335,1286 +5931,31 @@
           <a:p>
             <a:pPr algn="l">
               <a:spcAft>
-                <a:spcPts val="400"/>
+                <a:spcPts val="0"/>
               </a:spcAft>
             </a:pPr>
             <a:r>
-              <a:rPr sz="1400" b="1" i="0">
-                <a:solidFill>
-                  <a:srgbClr val="7A2F00"/>
+              <a:rPr sz="1300" b="1" i="0">
+                <a:solidFill>
+                  <a:srgbClr val="555555"/>
                 </a:solidFill>
                 <a:latin typeface="Calibri"/>
               </a:rPr>
-              <a:t>Not just a colour reader. A field result that anyone can check later.</a:t>
-            </a:r>
-          </a:p>
-        </p:txBody>
-      </p:sp>
-      <p:graphicFrame>
-        <p:nvGraphicFramePr>
-          <p:cNvPr id="54" name="Table 53"/>
-          <p:cNvGraphicFramePr>
-            <a:graphicFrameLocks noGrp="1"/>
-          </p:cNvGraphicFramePr>
-          <p:nvPr/>
-        </p:nvGraphicFramePr>
-        <p:xfrm>
-          <a:off x="8796528" y="6510528"/>
-          <a:ext cx="8641080" cy="2304288"/>
-        </p:xfrm>
-        <a:graphic>
-          <a:graphicData uri="http://schemas.openxmlformats.org/drawingml/2006/table">
-            <a:tbl>
-              <a:tblPr firstRow="1" bandRow="0">
-                <a:tableStyleId>{5C22544A-7EE6-4342-B048-85BDC9FD1C3A}</a:tableStyleId>
-              </a:tblPr>
-              <a:tblGrid>
-                <a:gridCol w="2514600"/>
-                <a:gridCol w="1554480"/>
-                <a:gridCol w="1600200"/>
-                <a:gridCol w="2971800"/>
-              </a:tblGrid>
-              <a:tr h="384048">
-                <a:tc>
-                  <a:txBody>
-                    <a:bodyPr wrap="square"/>
-                    <a:lstStyle/>
-                    <a:p>
-                      <a:pPr algn="l">
-                        <a:spcAft>
-                          <a:spcPts val="0"/>
-                        </a:spcAft>
-                      </a:pPr>
-                    </a:p>
-                  </a:txBody>
-                  <a:tcPr marL="73152" marR="73152" marT="27432" marB="27432" anchor="ctr">
-                    <a:lnL w="9525" cap="flat" cmpd="sng" algn="ctr">
-                      <a:solidFill>
-                        <a:srgbClr val="7A2F00"/>
-                      </a:solidFill>
-                      <a:prstDash val="solid"/>
-                    </a:lnL>
-                    <a:lnR w="9525" cap="flat" cmpd="sng" algn="ctr">
-                      <a:solidFill>
-                        <a:srgbClr val="7A2F00"/>
-                      </a:solidFill>
-                      <a:prstDash val="solid"/>
-                    </a:lnR>
-                    <a:lnT w="9525" cap="flat" cmpd="sng" algn="ctr">
-                      <a:solidFill>
-                        <a:srgbClr val="7A2F00"/>
-                      </a:solidFill>
-                      <a:prstDash val="solid"/>
-                    </a:lnT>
-                    <a:lnB w="9525" cap="flat" cmpd="sng" algn="ctr">
-                      <a:solidFill>
-                        <a:srgbClr val="7A2F00"/>
-                      </a:solidFill>
-                      <a:prstDash val="solid"/>
-                    </a:lnB>
-                    <a:solidFill>
-                      <a:srgbClr val="B2935B"/>
-                    </a:solidFill>
-                  </a:tcPr>
-                </a:tc>
-                <a:tc>
-                  <a:txBody>
-                    <a:bodyPr wrap="square"/>
-                    <a:lstStyle/>
-                    <a:p>
-                      <a:pPr algn="l">
-                        <a:spcAft>
-                          <a:spcPts val="0"/>
-                        </a:spcAft>
-                      </a:pPr>
-                      <a:r>
-                        <a:rPr sz="1300" b="1" i="0">
-                          <a:solidFill>
-                            <a:srgbClr val="000000"/>
-                          </a:solidFill>
-                          <a:latin typeface="Calibri"/>
-                        </a:rPr>
-                        <a:t>Eye check today</a:t>
-                      </a:r>
-                    </a:p>
-                  </a:txBody>
-                  <a:tcPr marL="73152" marR="73152" marT="27432" marB="27432" anchor="ctr">
-                    <a:lnL w="9525" cap="flat" cmpd="sng" algn="ctr">
-                      <a:solidFill>
-                        <a:srgbClr val="7A2F00"/>
-                      </a:solidFill>
-                      <a:prstDash val="solid"/>
-                    </a:lnL>
-                    <a:lnR w="9525" cap="flat" cmpd="sng" algn="ctr">
-                      <a:solidFill>
-                        <a:srgbClr val="7A2F00"/>
-                      </a:solidFill>
-                      <a:prstDash val="solid"/>
-                    </a:lnR>
-                    <a:lnT w="9525" cap="flat" cmpd="sng" algn="ctr">
-                      <a:solidFill>
-                        <a:srgbClr val="7A2F00"/>
-                      </a:solidFill>
-                      <a:prstDash val="solid"/>
-                    </a:lnT>
-                    <a:lnB w="9525" cap="flat" cmpd="sng" algn="ctr">
-                      <a:solidFill>
-                        <a:srgbClr val="7A2F00"/>
-                      </a:solidFill>
-                      <a:prstDash val="solid"/>
-                    </a:lnB>
-                    <a:solidFill>
-                      <a:srgbClr val="B2935B"/>
-                    </a:solidFill>
-                  </a:tcPr>
-                </a:tc>
-                <a:tc>
-                  <a:txBody>
-                    <a:bodyPr wrap="square"/>
-                    <a:lstStyle/>
-                    <a:p>
-                      <a:pPr algn="l">
-                        <a:spcAft>
-                          <a:spcPts val="0"/>
-                        </a:spcAft>
-                      </a:pPr>
-                      <a:r>
-                        <a:rPr sz="1300" b="1" i="0">
-                          <a:solidFill>
-                            <a:srgbClr val="000000"/>
-                          </a:solidFill>
-                          <a:latin typeface="Calibri"/>
-                        </a:rPr>
-                        <a:t>FSL lab</a:t>
-                      </a:r>
-                    </a:p>
-                  </a:txBody>
-                  <a:tcPr marL="73152" marR="73152" marT="27432" marB="27432" anchor="ctr">
-                    <a:lnL w="9525" cap="flat" cmpd="sng" algn="ctr">
-                      <a:solidFill>
-                        <a:srgbClr val="7A2F00"/>
-                      </a:solidFill>
-                      <a:prstDash val="solid"/>
-                    </a:lnL>
-                    <a:lnR w="9525" cap="flat" cmpd="sng" algn="ctr">
-                      <a:solidFill>
-                        <a:srgbClr val="7A2F00"/>
-                      </a:solidFill>
-                      <a:prstDash val="solid"/>
-                    </a:lnR>
-                    <a:lnT w="9525" cap="flat" cmpd="sng" algn="ctr">
-                      <a:solidFill>
-                        <a:srgbClr val="7A2F00"/>
-                      </a:solidFill>
-                      <a:prstDash val="solid"/>
-                    </a:lnT>
-                    <a:lnB w="9525" cap="flat" cmpd="sng" algn="ctr">
-                      <a:solidFill>
-                        <a:srgbClr val="7A2F00"/>
-                      </a:solidFill>
-                      <a:prstDash val="solid"/>
-                    </a:lnB>
-                    <a:solidFill>
-                      <a:srgbClr val="B2935B"/>
-                    </a:solidFill>
-                  </a:tcPr>
-                </a:tc>
-                <a:tc>
-                  <a:txBody>
-                    <a:bodyPr wrap="square"/>
-                    <a:lstStyle/>
-                    <a:p>
-                      <a:pPr algn="l">
-                        <a:spcAft>
-                          <a:spcPts val="0"/>
-                        </a:spcAft>
-                      </a:pPr>
-                      <a:r>
-                        <a:rPr sz="1300" b="1" i="0">
-                          <a:solidFill>
-                            <a:srgbClr val="000000"/>
-                          </a:solidFill>
-                          <a:latin typeface="Calibri"/>
-                        </a:rPr>
-                        <a:t>FieldProof</a:t>
-                      </a:r>
-                    </a:p>
-                  </a:txBody>
-                  <a:tcPr marL="73152" marR="73152" marT="27432" marB="27432" anchor="ctr">
-                    <a:lnL w="9525" cap="flat" cmpd="sng" algn="ctr">
-                      <a:solidFill>
-                        <a:srgbClr val="7A2F00"/>
-                      </a:solidFill>
-                      <a:prstDash val="solid"/>
-                    </a:lnL>
-                    <a:lnR w="9525" cap="flat" cmpd="sng" algn="ctr">
-                      <a:solidFill>
-                        <a:srgbClr val="7A2F00"/>
-                      </a:solidFill>
-                      <a:prstDash val="solid"/>
-                    </a:lnR>
-                    <a:lnT w="9525" cap="flat" cmpd="sng" algn="ctr">
-                      <a:solidFill>
-                        <a:srgbClr val="7A2F00"/>
-                      </a:solidFill>
-                      <a:prstDash val="solid"/>
-                    </a:lnT>
-                    <a:lnB w="9525" cap="flat" cmpd="sng" algn="ctr">
-                      <a:solidFill>
-                        <a:srgbClr val="7A2F00"/>
-                      </a:solidFill>
-                      <a:prstDash val="solid"/>
-                    </a:lnB>
-                    <a:solidFill>
-                      <a:srgbClr val="B2935B"/>
-                    </a:solidFill>
-                  </a:tcPr>
-                </a:tc>
-              </a:tr>
-              <a:tr h="384048">
-                <a:tc>
-                  <a:txBody>
-                    <a:bodyPr wrap="square"/>
-                    <a:lstStyle/>
-                    <a:p>
-                      <a:pPr algn="l">
-                        <a:spcAft>
-                          <a:spcPts val="0"/>
-                        </a:spcAft>
-                      </a:pPr>
-                      <a:r>
-                        <a:rPr sz="1300" b="1" i="0">
-                          <a:solidFill>
-                            <a:srgbClr val="000000"/>
-                          </a:solidFill>
-                          <a:latin typeface="Calibri"/>
-                        </a:rPr>
-                        <a:t>Result on the spot</a:t>
-                      </a:r>
-                    </a:p>
-                  </a:txBody>
-                  <a:tcPr marL="73152" marR="73152" marT="27432" marB="27432" anchor="ctr">
-                    <a:lnL w="9525" cap="flat" cmpd="sng" algn="ctr">
-                      <a:solidFill>
-                        <a:srgbClr val="7A2F00"/>
-                      </a:solidFill>
-                      <a:prstDash val="solid"/>
-                    </a:lnL>
-                    <a:lnR w="9525" cap="flat" cmpd="sng" algn="ctr">
-                      <a:solidFill>
-                        <a:srgbClr val="7A2F00"/>
-                      </a:solidFill>
-                      <a:prstDash val="solid"/>
-                    </a:lnR>
-                    <a:lnT w="9525" cap="flat" cmpd="sng" algn="ctr">
-                      <a:solidFill>
-                        <a:srgbClr val="7A2F00"/>
-                      </a:solidFill>
-                      <a:prstDash val="solid"/>
-                    </a:lnT>
-                    <a:lnB w="9525" cap="flat" cmpd="sng" algn="ctr">
-                      <a:solidFill>
-                        <a:srgbClr val="7A2F00"/>
-                      </a:solidFill>
-                      <a:prstDash val="solid"/>
-                    </a:lnB>
-                    <a:solidFill>
-                      <a:srgbClr val="FFFFFF"/>
-                    </a:solidFill>
-                  </a:tcPr>
-                </a:tc>
-                <a:tc>
-                  <a:txBody>
-                    <a:bodyPr wrap="square"/>
-                    <a:lstStyle/>
-                    <a:p>
-                      <a:pPr algn="l">
-                        <a:spcAft>
-                          <a:spcPts val="0"/>
-                        </a:spcAft>
-                      </a:pPr>
-                      <a:r>
-                        <a:rPr sz="1300" b="0" i="0">
-                          <a:solidFill>
-                            <a:srgbClr val="000000"/>
-                          </a:solidFill>
-                          <a:latin typeface="Calibri"/>
-                        </a:rPr>
-                        <a:t>Yes</a:t>
-                      </a:r>
-                    </a:p>
-                  </a:txBody>
-                  <a:tcPr marL="73152" marR="73152" marT="27432" marB="27432" anchor="ctr">
-                    <a:lnL w="9525" cap="flat" cmpd="sng" algn="ctr">
-                      <a:solidFill>
-                        <a:srgbClr val="7A2F00"/>
-                      </a:solidFill>
-                      <a:prstDash val="solid"/>
-                    </a:lnL>
-                    <a:lnR w="9525" cap="flat" cmpd="sng" algn="ctr">
-                      <a:solidFill>
-                        <a:srgbClr val="7A2F00"/>
-                      </a:solidFill>
-                      <a:prstDash val="solid"/>
-                    </a:lnR>
-                    <a:lnT w="9525" cap="flat" cmpd="sng" algn="ctr">
-                      <a:solidFill>
-                        <a:srgbClr val="7A2F00"/>
-                      </a:solidFill>
-                      <a:prstDash val="solid"/>
-                    </a:lnT>
-                    <a:lnB w="9525" cap="flat" cmpd="sng" algn="ctr">
-                      <a:solidFill>
-                        <a:srgbClr val="7A2F00"/>
-                      </a:solidFill>
-                      <a:prstDash val="solid"/>
-                    </a:lnB>
-                    <a:solidFill>
-                      <a:srgbClr val="FFFFFF"/>
-                    </a:solidFill>
-                  </a:tcPr>
-                </a:tc>
-                <a:tc>
-                  <a:txBody>
-                    <a:bodyPr wrap="square"/>
-                    <a:lstStyle/>
-                    <a:p>
-                      <a:pPr algn="l">
-                        <a:spcAft>
-                          <a:spcPts val="0"/>
-                        </a:spcAft>
-                      </a:pPr>
-                      <a:r>
-                        <a:rPr sz="1300" b="0" i="0">
-                          <a:solidFill>
-                            <a:srgbClr val="000000"/>
-                          </a:solidFill>
-                          <a:latin typeface="Calibri"/>
-                        </a:rPr>
-                        <a:t>No, report later</a:t>
-                      </a:r>
-                    </a:p>
-                  </a:txBody>
-                  <a:tcPr marL="73152" marR="73152" marT="27432" marB="27432" anchor="ctr">
-                    <a:lnL w="9525" cap="flat" cmpd="sng" algn="ctr">
-                      <a:solidFill>
-                        <a:srgbClr val="7A2F00"/>
-                      </a:solidFill>
-                      <a:prstDash val="solid"/>
-                    </a:lnL>
-                    <a:lnR w="9525" cap="flat" cmpd="sng" algn="ctr">
-                      <a:solidFill>
-                        <a:srgbClr val="7A2F00"/>
-                      </a:solidFill>
-                      <a:prstDash val="solid"/>
-                    </a:lnR>
-                    <a:lnT w="9525" cap="flat" cmpd="sng" algn="ctr">
-                      <a:solidFill>
-                        <a:srgbClr val="7A2F00"/>
-                      </a:solidFill>
-                      <a:prstDash val="solid"/>
-                    </a:lnT>
-                    <a:lnB w="9525" cap="flat" cmpd="sng" algn="ctr">
-                      <a:solidFill>
-                        <a:srgbClr val="7A2F00"/>
-                      </a:solidFill>
-                      <a:prstDash val="solid"/>
-                    </a:lnB>
-                    <a:solidFill>
-                      <a:srgbClr val="FFFFFF"/>
-                    </a:solidFill>
-                  </a:tcPr>
-                </a:tc>
-                <a:tc>
-                  <a:txBody>
-                    <a:bodyPr wrap="square"/>
-                    <a:lstStyle/>
-                    <a:p>
-                      <a:pPr algn="l">
-                        <a:spcAft>
-                          <a:spcPts val="0"/>
-                        </a:spcAft>
-                      </a:pPr>
-                      <a:r>
-                        <a:rPr sz="1300" b="0" i="0">
-                          <a:solidFill>
-                            <a:srgbClr val="000000"/>
-                          </a:solidFill>
-                          <a:latin typeface="Calibri"/>
-                        </a:rPr>
-                        <a:t>Yes, about 16 s</a:t>
-                      </a:r>
-                    </a:p>
-                  </a:txBody>
-                  <a:tcPr marL="73152" marR="73152" marT="27432" marB="27432" anchor="ctr">
-                    <a:lnL w="9525" cap="flat" cmpd="sng" algn="ctr">
-                      <a:solidFill>
-                        <a:srgbClr val="7A2F00"/>
-                      </a:solidFill>
-                      <a:prstDash val="solid"/>
-                    </a:lnL>
-                    <a:lnR w="9525" cap="flat" cmpd="sng" algn="ctr">
-                      <a:solidFill>
-                        <a:srgbClr val="7A2F00"/>
-                      </a:solidFill>
-                      <a:prstDash val="solid"/>
-                    </a:lnR>
-                    <a:lnT w="9525" cap="flat" cmpd="sng" algn="ctr">
-                      <a:solidFill>
-                        <a:srgbClr val="7A2F00"/>
-                      </a:solidFill>
-                      <a:prstDash val="solid"/>
-                    </a:lnT>
-                    <a:lnB w="9525" cap="flat" cmpd="sng" algn="ctr">
-                      <a:solidFill>
-                        <a:srgbClr val="7A2F00"/>
-                      </a:solidFill>
-                      <a:prstDash val="solid"/>
-                    </a:lnB>
-                    <a:solidFill>
-                      <a:srgbClr val="FFFFFF"/>
-                    </a:solidFill>
-                  </a:tcPr>
-                </a:tc>
-              </a:tr>
-              <a:tr h="384048">
-                <a:tc>
-                  <a:txBody>
-                    <a:bodyPr wrap="square"/>
-                    <a:lstStyle/>
-                    <a:p>
-                      <a:pPr algn="l">
-                        <a:spcAft>
-                          <a:spcPts val="0"/>
-                        </a:spcAft>
-                      </a:pPr>
-                      <a:r>
-                        <a:rPr sz="1300" b="1" i="0">
-                          <a:solidFill>
-                            <a:srgbClr val="000000"/>
-                          </a:solidFill>
-                          <a:latin typeface="Calibri"/>
-                        </a:rPr>
-                        <a:t>Same reading in any light</a:t>
-                      </a:r>
-                    </a:p>
-                  </a:txBody>
-                  <a:tcPr marL="73152" marR="73152" marT="27432" marB="27432" anchor="ctr">
-                    <a:lnL w="9525" cap="flat" cmpd="sng" algn="ctr">
-                      <a:solidFill>
-                        <a:srgbClr val="7A2F00"/>
-                      </a:solidFill>
-                      <a:prstDash val="solid"/>
-                    </a:lnL>
-                    <a:lnR w="9525" cap="flat" cmpd="sng" algn="ctr">
-                      <a:solidFill>
-                        <a:srgbClr val="7A2F00"/>
-                      </a:solidFill>
-                      <a:prstDash val="solid"/>
-                    </a:lnR>
-                    <a:lnT w="9525" cap="flat" cmpd="sng" algn="ctr">
-                      <a:solidFill>
-                        <a:srgbClr val="7A2F00"/>
-                      </a:solidFill>
-                      <a:prstDash val="solid"/>
-                    </a:lnT>
-                    <a:lnB w="9525" cap="flat" cmpd="sng" algn="ctr">
-                      <a:solidFill>
-                        <a:srgbClr val="7A2F00"/>
-                      </a:solidFill>
-                      <a:prstDash val="solid"/>
-                    </a:lnB>
-                    <a:solidFill>
-                      <a:srgbClr val="FFFFFF"/>
-                    </a:solidFill>
-                  </a:tcPr>
-                </a:tc>
-                <a:tc>
-                  <a:txBody>
-                    <a:bodyPr wrap="square"/>
-                    <a:lstStyle/>
-                    <a:p>
-                      <a:pPr algn="l">
-                        <a:spcAft>
-                          <a:spcPts val="0"/>
-                        </a:spcAft>
-                      </a:pPr>
-                      <a:r>
-                        <a:rPr sz="1300" b="0" i="0">
-                          <a:solidFill>
-                            <a:srgbClr val="000000"/>
-                          </a:solidFill>
-                          <a:latin typeface="Calibri"/>
-                        </a:rPr>
-                        <a:t>No</a:t>
-                      </a:r>
-                    </a:p>
-                  </a:txBody>
-                  <a:tcPr marL="73152" marR="73152" marT="27432" marB="27432" anchor="ctr">
-                    <a:lnL w="9525" cap="flat" cmpd="sng" algn="ctr">
-                      <a:solidFill>
-                        <a:srgbClr val="7A2F00"/>
-                      </a:solidFill>
-                      <a:prstDash val="solid"/>
-                    </a:lnL>
-                    <a:lnR w="9525" cap="flat" cmpd="sng" algn="ctr">
-                      <a:solidFill>
-                        <a:srgbClr val="7A2F00"/>
-                      </a:solidFill>
-                      <a:prstDash val="solid"/>
-                    </a:lnR>
-                    <a:lnT w="9525" cap="flat" cmpd="sng" algn="ctr">
-                      <a:solidFill>
-                        <a:srgbClr val="7A2F00"/>
-                      </a:solidFill>
-                      <a:prstDash val="solid"/>
-                    </a:lnT>
-                    <a:lnB w="9525" cap="flat" cmpd="sng" algn="ctr">
-                      <a:solidFill>
-                        <a:srgbClr val="7A2F00"/>
-                      </a:solidFill>
-                      <a:prstDash val="solid"/>
-                    </a:lnB>
-                    <a:solidFill>
-                      <a:srgbClr val="FFFFFF"/>
-                    </a:solidFill>
-                  </a:tcPr>
-                </a:tc>
-                <a:tc>
-                  <a:txBody>
-                    <a:bodyPr wrap="square"/>
-                    <a:lstStyle/>
-                    <a:p>
-                      <a:pPr algn="l">
-                        <a:spcAft>
-                          <a:spcPts val="0"/>
-                        </a:spcAft>
-                      </a:pPr>
-                      <a:r>
-                        <a:rPr sz="1300" b="0" i="0">
-                          <a:solidFill>
-                            <a:srgbClr val="000000"/>
-                          </a:solidFill>
-                          <a:latin typeface="Calibri"/>
-                        </a:rPr>
-                        <a:t>Yes, lab conditions</a:t>
-                      </a:r>
-                    </a:p>
-                  </a:txBody>
-                  <a:tcPr marL="73152" marR="73152" marT="27432" marB="27432" anchor="ctr">
-                    <a:lnL w="9525" cap="flat" cmpd="sng" algn="ctr">
-                      <a:solidFill>
-                        <a:srgbClr val="7A2F00"/>
-                      </a:solidFill>
-                      <a:prstDash val="solid"/>
-                    </a:lnL>
-                    <a:lnR w="9525" cap="flat" cmpd="sng" algn="ctr">
-                      <a:solidFill>
-                        <a:srgbClr val="7A2F00"/>
-                      </a:solidFill>
-                      <a:prstDash val="solid"/>
-                    </a:lnR>
-                    <a:lnT w="9525" cap="flat" cmpd="sng" algn="ctr">
-                      <a:solidFill>
-                        <a:srgbClr val="7A2F00"/>
-                      </a:solidFill>
-                      <a:prstDash val="solid"/>
-                    </a:lnT>
-                    <a:lnB w="9525" cap="flat" cmpd="sng" algn="ctr">
-                      <a:solidFill>
-                        <a:srgbClr val="7A2F00"/>
-                      </a:solidFill>
-                      <a:prstDash val="solid"/>
-                    </a:lnB>
-                    <a:solidFill>
-                      <a:srgbClr val="FFFFFF"/>
-                    </a:solidFill>
-                  </a:tcPr>
-                </a:tc>
-                <a:tc>
-                  <a:txBody>
-                    <a:bodyPr wrap="square"/>
-                    <a:lstStyle/>
-                    <a:p>
-                      <a:pPr algn="l">
-                        <a:spcAft>
-                          <a:spcPts val="0"/>
-                        </a:spcAft>
-                      </a:pPr>
-                      <a:r>
-                        <a:rPr sz="1300" b="0" i="0">
-                          <a:solidFill>
-                            <a:srgbClr val="000000"/>
-                          </a:solidFill>
-                          <a:latin typeface="Calibri"/>
-                        </a:rPr>
-                        <a:t>Yes, colour card in every photo</a:t>
-                      </a:r>
-                    </a:p>
-                  </a:txBody>
-                  <a:tcPr marL="73152" marR="73152" marT="27432" marB="27432" anchor="ctr">
-                    <a:lnL w="9525" cap="flat" cmpd="sng" algn="ctr">
-                      <a:solidFill>
-                        <a:srgbClr val="7A2F00"/>
-                      </a:solidFill>
-                      <a:prstDash val="solid"/>
-                    </a:lnL>
-                    <a:lnR w="9525" cap="flat" cmpd="sng" algn="ctr">
-                      <a:solidFill>
-                        <a:srgbClr val="7A2F00"/>
-                      </a:solidFill>
-                      <a:prstDash val="solid"/>
-                    </a:lnR>
-                    <a:lnT w="9525" cap="flat" cmpd="sng" algn="ctr">
-                      <a:solidFill>
-                        <a:srgbClr val="7A2F00"/>
-                      </a:solidFill>
-                      <a:prstDash val="solid"/>
-                    </a:lnT>
-                    <a:lnB w="9525" cap="flat" cmpd="sng" algn="ctr">
-                      <a:solidFill>
-                        <a:srgbClr val="7A2F00"/>
-                      </a:solidFill>
-                      <a:prstDash val="solid"/>
-                    </a:lnB>
-                    <a:solidFill>
-                      <a:srgbClr val="FFFFFF"/>
-                    </a:solidFill>
-                  </a:tcPr>
-                </a:tc>
-              </a:tr>
-              <a:tr h="384048">
-                <a:tc>
-                  <a:txBody>
-                    <a:bodyPr wrap="square"/>
-                    <a:lstStyle/>
-                    <a:p>
-                      <a:pPr algn="l">
-                        <a:spcAft>
-                          <a:spcPts val="0"/>
-                        </a:spcAft>
-                      </a:pPr>
-                      <a:r>
-                        <a:rPr sz="1300" b="1" i="0">
-                          <a:solidFill>
-                            <a:srgbClr val="000000"/>
-                          </a:solidFill>
-                          <a:latin typeface="Calibri"/>
-                        </a:rPr>
-                        <a:t>Says NOT SURE when unclear</a:t>
-                      </a:r>
-                    </a:p>
-                  </a:txBody>
-                  <a:tcPr marL="73152" marR="73152" marT="27432" marB="27432" anchor="ctr">
-                    <a:lnL w="9525" cap="flat" cmpd="sng" algn="ctr">
-                      <a:solidFill>
-                        <a:srgbClr val="7A2F00"/>
-                      </a:solidFill>
-                      <a:prstDash val="solid"/>
-                    </a:lnL>
-                    <a:lnR w="9525" cap="flat" cmpd="sng" algn="ctr">
-                      <a:solidFill>
-                        <a:srgbClr val="7A2F00"/>
-                      </a:solidFill>
-                      <a:prstDash val="solid"/>
-                    </a:lnR>
-                    <a:lnT w="9525" cap="flat" cmpd="sng" algn="ctr">
-                      <a:solidFill>
-                        <a:srgbClr val="7A2F00"/>
-                      </a:solidFill>
-                      <a:prstDash val="solid"/>
-                    </a:lnT>
-                    <a:lnB w="9525" cap="flat" cmpd="sng" algn="ctr">
-                      <a:solidFill>
-                        <a:srgbClr val="7A2F00"/>
-                      </a:solidFill>
-                      <a:prstDash val="solid"/>
-                    </a:lnB>
-                    <a:solidFill>
-                      <a:srgbClr val="FFFFFF"/>
-                    </a:solidFill>
-                  </a:tcPr>
-                </a:tc>
-                <a:tc>
-                  <a:txBody>
-                    <a:bodyPr wrap="square"/>
-                    <a:lstStyle/>
-                    <a:p>
-                      <a:pPr algn="l">
-                        <a:spcAft>
-                          <a:spcPts val="0"/>
-                        </a:spcAft>
-                      </a:pPr>
-                      <a:r>
-                        <a:rPr sz="1300" b="0" i="0">
-                          <a:solidFill>
-                            <a:srgbClr val="000000"/>
-                          </a:solidFill>
-                          <a:latin typeface="Calibri"/>
-                        </a:rPr>
-                        <a:t>Depends on officer</a:t>
-                      </a:r>
-                    </a:p>
-                  </a:txBody>
-                  <a:tcPr marL="73152" marR="73152" marT="27432" marB="27432" anchor="ctr">
-                    <a:lnL w="9525" cap="flat" cmpd="sng" algn="ctr">
-                      <a:solidFill>
-                        <a:srgbClr val="7A2F00"/>
-                      </a:solidFill>
-                      <a:prstDash val="solid"/>
-                    </a:lnL>
-                    <a:lnR w="9525" cap="flat" cmpd="sng" algn="ctr">
-                      <a:solidFill>
-                        <a:srgbClr val="7A2F00"/>
-                      </a:solidFill>
-                      <a:prstDash val="solid"/>
-                    </a:lnR>
-                    <a:lnT w="9525" cap="flat" cmpd="sng" algn="ctr">
-                      <a:solidFill>
-                        <a:srgbClr val="7A2F00"/>
-                      </a:solidFill>
-                      <a:prstDash val="solid"/>
-                    </a:lnT>
-                    <a:lnB w="9525" cap="flat" cmpd="sng" algn="ctr">
-                      <a:solidFill>
-                        <a:srgbClr val="7A2F00"/>
-                      </a:solidFill>
-                      <a:prstDash val="solid"/>
-                    </a:lnB>
-                    <a:solidFill>
-                      <a:srgbClr val="FFFFFF"/>
-                    </a:solidFill>
-                  </a:tcPr>
-                </a:tc>
-                <a:tc>
-                  <a:txBody>
-                    <a:bodyPr wrap="square"/>
-                    <a:lstStyle/>
-                    <a:p>
-                      <a:pPr algn="l">
-                        <a:spcAft>
-                          <a:spcPts val="0"/>
-                        </a:spcAft>
-                      </a:pPr>
-                      <a:r>
-                        <a:rPr sz="1300" b="0" i="0">
-                          <a:solidFill>
-                            <a:srgbClr val="000000"/>
-                          </a:solidFill>
-                          <a:latin typeface="Calibri"/>
-                        </a:rPr>
-                        <a:t>Not needed</a:t>
-                      </a:r>
-                    </a:p>
-                  </a:txBody>
-                  <a:tcPr marL="73152" marR="73152" marT="27432" marB="27432" anchor="ctr">
-                    <a:lnL w="9525" cap="flat" cmpd="sng" algn="ctr">
-                      <a:solidFill>
-                        <a:srgbClr val="7A2F00"/>
-                      </a:solidFill>
-                      <a:prstDash val="solid"/>
-                    </a:lnL>
-                    <a:lnR w="9525" cap="flat" cmpd="sng" algn="ctr">
-                      <a:solidFill>
-                        <a:srgbClr val="7A2F00"/>
-                      </a:solidFill>
-                      <a:prstDash val="solid"/>
-                    </a:lnR>
-                    <a:lnT w="9525" cap="flat" cmpd="sng" algn="ctr">
-                      <a:solidFill>
-                        <a:srgbClr val="7A2F00"/>
-                      </a:solidFill>
-                      <a:prstDash val="solid"/>
-                    </a:lnT>
-                    <a:lnB w="9525" cap="flat" cmpd="sng" algn="ctr">
-                      <a:solidFill>
-                        <a:srgbClr val="7A2F00"/>
-                      </a:solidFill>
-                      <a:prstDash val="solid"/>
-                    </a:lnB>
-                    <a:solidFill>
-                      <a:srgbClr val="FFFFFF"/>
-                    </a:solidFill>
-                  </a:tcPr>
-                </a:tc>
-                <a:tc>
-                  <a:txBody>
-                    <a:bodyPr wrap="square"/>
-                    <a:lstStyle/>
-                    <a:p>
-                      <a:pPr algn="l">
-                        <a:spcAft>
-                          <a:spcPts val="0"/>
-                        </a:spcAft>
-                      </a:pPr>
-                      <a:r>
-                        <a:rPr sz="1300" b="0" i="0">
-                          <a:solidFill>
-                            <a:srgbClr val="000000"/>
-                          </a:solidFill>
-                          <a:latin typeface="Calibri"/>
-                        </a:rPr>
-                        <a:t>Yes, with the reason</a:t>
-                      </a:r>
-                    </a:p>
-                  </a:txBody>
-                  <a:tcPr marL="73152" marR="73152" marT="27432" marB="27432" anchor="ctr">
-                    <a:lnL w="9525" cap="flat" cmpd="sng" algn="ctr">
-                      <a:solidFill>
-                        <a:srgbClr val="7A2F00"/>
-                      </a:solidFill>
-                      <a:prstDash val="solid"/>
-                    </a:lnL>
-                    <a:lnR w="9525" cap="flat" cmpd="sng" algn="ctr">
-                      <a:solidFill>
-                        <a:srgbClr val="7A2F00"/>
-                      </a:solidFill>
-                      <a:prstDash val="solid"/>
-                    </a:lnR>
-                    <a:lnT w="9525" cap="flat" cmpd="sng" algn="ctr">
-                      <a:solidFill>
-                        <a:srgbClr val="7A2F00"/>
-                      </a:solidFill>
-                      <a:prstDash val="solid"/>
-                    </a:lnT>
-                    <a:lnB w="9525" cap="flat" cmpd="sng" algn="ctr">
-                      <a:solidFill>
-                        <a:srgbClr val="7A2F00"/>
-                      </a:solidFill>
-                      <a:prstDash val="solid"/>
-                    </a:lnB>
-                    <a:solidFill>
-                      <a:srgbClr val="FFFFFF"/>
-                    </a:solidFill>
-                  </a:tcPr>
-                </a:tc>
-              </a:tr>
-              <a:tr h="384048">
-                <a:tc>
-                  <a:txBody>
-                    <a:bodyPr wrap="square"/>
-                    <a:lstStyle/>
-                    <a:p>
-                      <a:pPr algn="l">
-                        <a:spcAft>
-                          <a:spcPts val="0"/>
-                        </a:spcAft>
-                      </a:pPr>
-                      <a:r>
-                        <a:rPr sz="1300" b="1" i="0">
-                          <a:solidFill>
-                            <a:srgbClr val="000000"/>
-                          </a:solidFill>
-                          <a:latin typeface="Calibri"/>
-                        </a:rPr>
-                        <a:t>Record anyone can check later</a:t>
-                      </a:r>
-                    </a:p>
-                  </a:txBody>
-                  <a:tcPr marL="73152" marR="73152" marT="27432" marB="27432" anchor="ctr">
-                    <a:lnL w="9525" cap="flat" cmpd="sng" algn="ctr">
-                      <a:solidFill>
-                        <a:srgbClr val="7A2F00"/>
-                      </a:solidFill>
-                      <a:prstDash val="solid"/>
-                    </a:lnL>
-                    <a:lnR w="9525" cap="flat" cmpd="sng" algn="ctr">
-                      <a:solidFill>
-                        <a:srgbClr val="7A2F00"/>
-                      </a:solidFill>
-                      <a:prstDash val="solid"/>
-                    </a:lnR>
-                    <a:lnT w="9525" cap="flat" cmpd="sng" algn="ctr">
-                      <a:solidFill>
-                        <a:srgbClr val="7A2F00"/>
-                      </a:solidFill>
-                      <a:prstDash val="solid"/>
-                    </a:lnT>
-                    <a:lnB w="9525" cap="flat" cmpd="sng" algn="ctr">
-                      <a:solidFill>
-                        <a:srgbClr val="7A2F00"/>
-                      </a:solidFill>
-                      <a:prstDash val="solid"/>
-                    </a:lnB>
-                    <a:solidFill>
-                      <a:srgbClr val="FFFFFF"/>
-                    </a:solidFill>
-                  </a:tcPr>
-                </a:tc>
-                <a:tc>
-                  <a:txBody>
-                    <a:bodyPr wrap="square"/>
-                    <a:lstStyle/>
-                    <a:p>
-                      <a:pPr algn="l">
-                        <a:spcAft>
-                          <a:spcPts val="0"/>
-                        </a:spcAft>
-                      </a:pPr>
-                      <a:r>
-                        <a:rPr sz="1300" b="0" i="0">
-                          <a:solidFill>
-                            <a:srgbClr val="000000"/>
-                          </a:solidFill>
-                          <a:latin typeface="Calibri"/>
-                        </a:rPr>
-                        <a:t>No</a:t>
-                      </a:r>
-                    </a:p>
-                  </a:txBody>
-                  <a:tcPr marL="73152" marR="73152" marT="27432" marB="27432" anchor="ctr">
-                    <a:lnL w="9525" cap="flat" cmpd="sng" algn="ctr">
-                      <a:solidFill>
-                        <a:srgbClr val="7A2F00"/>
-                      </a:solidFill>
-                      <a:prstDash val="solid"/>
-                    </a:lnL>
-                    <a:lnR w="9525" cap="flat" cmpd="sng" algn="ctr">
-                      <a:solidFill>
-                        <a:srgbClr val="7A2F00"/>
-                      </a:solidFill>
-                      <a:prstDash val="solid"/>
-                    </a:lnR>
-                    <a:lnT w="9525" cap="flat" cmpd="sng" algn="ctr">
-                      <a:solidFill>
-                        <a:srgbClr val="7A2F00"/>
-                      </a:solidFill>
-                      <a:prstDash val="solid"/>
-                    </a:lnT>
-                    <a:lnB w="9525" cap="flat" cmpd="sng" algn="ctr">
-                      <a:solidFill>
-                        <a:srgbClr val="7A2F00"/>
-                      </a:solidFill>
-                      <a:prstDash val="solid"/>
-                    </a:lnB>
-                    <a:solidFill>
-                      <a:srgbClr val="FFFFFF"/>
-                    </a:solidFill>
-                  </a:tcPr>
-                </a:tc>
-                <a:tc>
-                  <a:txBody>
-                    <a:bodyPr wrap="square"/>
-                    <a:lstStyle/>
-                    <a:p>
-                      <a:pPr algn="l">
-                        <a:spcAft>
-                          <a:spcPts val="0"/>
-                        </a:spcAft>
-                      </a:pPr>
-                      <a:r>
-                        <a:rPr sz="1300" b="0" i="0">
-                          <a:solidFill>
-                            <a:srgbClr val="000000"/>
-                          </a:solidFill>
-                          <a:latin typeface="Calibri"/>
-                        </a:rPr>
-                        <a:t>Lab report</a:t>
-                      </a:r>
-                    </a:p>
-                  </a:txBody>
-                  <a:tcPr marL="73152" marR="73152" marT="27432" marB="27432" anchor="ctr">
-                    <a:lnL w="9525" cap="flat" cmpd="sng" algn="ctr">
-                      <a:solidFill>
-                        <a:srgbClr val="7A2F00"/>
-                      </a:solidFill>
-                      <a:prstDash val="solid"/>
-                    </a:lnL>
-                    <a:lnR w="9525" cap="flat" cmpd="sng" algn="ctr">
-                      <a:solidFill>
-                        <a:srgbClr val="7A2F00"/>
-                      </a:solidFill>
-                      <a:prstDash val="solid"/>
-                    </a:lnR>
-                    <a:lnT w="9525" cap="flat" cmpd="sng" algn="ctr">
-                      <a:solidFill>
-                        <a:srgbClr val="7A2F00"/>
-                      </a:solidFill>
-                      <a:prstDash val="solid"/>
-                    </a:lnT>
-                    <a:lnB w="9525" cap="flat" cmpd="sng" algn="ctr">
-                      <a:solidFill>
-                        <a:srgbClr val="7A2F00"/>
-                      </a:solidFill>
-                      <a:prstDash val="solid"/>
-                    </a:lnB>
-                    <a:solidFill>
-                      <a:srgbClr val="FFFFFF"/>
-                    </a:solidFill>
-                  </a:tcPr>
-                </a:tc>
-                <a:tc>
-                  <a:txBody>
-                    <a:bodyPr wrap="square"/>
-                    <a:lstStyle/>
-                    <a:p>
-                      <a:pPr algn="l">
-                        <a:spcAft>
-                          <a:spcPts val="0"/>
-                        </a:spcAft>
-                      </a:pPr>
-                      <a:r>
-                        <a:rPr sz="1300" b="0" i="0">
-                          <a:solidFill>
-                            <a:srgbClr val="000000"/>
-                          </a:solidFill>
-                          <a:latin typeface="Calibri"/>
-                        </a:rPr>
-                        <a:t>Signed record + QR, BSA s.63 page</a:t>
-                      </a:r>
-                    </a:p>
-                  </a:txBody>
-                  <a:tcPr marL="73152" marR="73152" marT="27432" marB="27432" anchor="ctr">
-                    <a:lnL w="9525" cap="flat" cmpd="sng" algn="ctr">
-                      <a:solidFill>
-                        <a:srgbClr val="7A2F00"/>
-                      </a:solidFill>
-                      <a:prstDash val="solid"/>
-                    </a:lnL>
-                    <a:lnR w="9525" cap="flat" cmpd="sng" algn="ctr">
-                      <a:solidFill>
-                        <a:srgbClr val="7A2F00"/>
-                      </a:solidFill>
-                      <a:prstDash val="solid"/>
-                    </a:lnR>
-                    <a:lnT w="9525" cap="flat" cmpd="sng" algn="ctr">
-                      <a:solidFill>
-                        <a:srgbClr val="7A2F00"/>
-                      </a:solidFill>
-                      <a:prstDash val="solid"/>
-                    </a:lnT>
-                    <a:lnB w="9525" cap="flat" cmpd="sng" algn="ctr">
-                      <a:solidFill>
-                        <a:srgbClr val="7A2F00"/>
-                      </a:solidFill>
-                      <a:prstDash val="solid"/>
-                    </a:lnB>
-                    <a:solidFill>
-                      <a:srgbClr val="FFFFFF"/>
-                    </a:solidFill>
-                  </a:tcPr>
-                </a:tc>
-              </a:tr>
-              <a:tr h="384048">
-                <a:tc>
-                  <a:txBody>
-                    <a:bodyPr wrap="square"/>
-                    <a:lstStyle/>
-                    <a:p>
-                      <a:pPr algn="l">
-                        <a:spcAft>
-                          <a:spcPts val="0"/>
-                        </a:spcAft>
-                      </a:pPr>
-                      <a:r>
-                        <a:rPr sz="1300" b="1" i="0">
-                          <a:solidFill>
-                            <a:srgbClr val="000000"/>
-                          </a:solidFill>
-                          <a:latin typeface="Calibri"/>
-                        </a:rPr>
-                        <a:t>Confirms which drug</a:t>
-                      </a:r>
-                    </a:p>
-                  </a:txBody>
-                  <a:tcPr marL="73152" marR="73152" marT="27432" marB="27432" anchor="ctr">
-                    <a:lnL w="9525" cap="flat" cmpd="sng" algn="ctr">
-                      <a:solidFill>
-                        <a:srgbClr val="7A2F00"/>
-                      </a:solidFill>
-                      <a:prstDash val="solid"/>
-                    </a:lnL>
-                    <a:lnR w="9525" cap="flat" cmpd="sng" algn="ctr">
-                      <a:solidFill>
-                        <a:srgbClr val="7A2F00"/>
-                      </a:solidFill>
-                      <a:prstDash val="solid"/>
-                    </a:lnR>
-                    <a:lnT w="9525" cap="flat" cmpd="sng" algn="ctr">
-                      <a:solidFill>
-                        <a:srgbClr val="7A2F00"/>
-                      </a:solidFill>
-                      <a:prstDash val="solid"/>
-                    </a:lnT>
-                    <a:lnB w="9525" cap="flat" cmpd="sng" algn="ctr">
-                      <a:solidFill>
-                        <a:srgbClr val="7A2F00"/>
-                      </a:solidFill>
-                      <a:prstDash val="solid"/>
-                    </a:lnB>
-                    <a:solidFill>
-                      <a:srgbClr val="FFFFFF"/>
-                    </a:solidFill>
-                  </a:tcPr>
-                </a:tc>
-                <a:tc>
-                  <a:txBody>
-                    <a:bodyPr wrap="square"/>
-                    <a:lstStyle/>
-                    <a:p>
-                      <a:pPr algn="l">
-                        <a:spcAft>
-                          <a:spcPts val="0"/>
-                        </a:spcAft>
-                      </a:pPr>
-                      <a:r>
-                        <a:rPr sz="1300" b="0" i="0">
-                          <a:solidFill>
-                            <a:srgbClr val="000000"/>
-                          </a:solidFill>
-                          <a:latin typeface="Calibri"/>
-                        </a:rPr>
-                        <a:t>No</a:t>
-                      </a:r>
-                    </a:p>
-                  </a:txBody>
-                  <a:tcPr marL="73152" marR="73152" marT="27432" marB="27432" anchor="ctr">
-                    <a:lnL w="9525" cap="flat" cmpd="sng" algn="ctr">
-                      <a:solidFill>
-                        <a:srgbClr val="7A2F00"/>
-                      </a:solidFill>
-                      <a:prstDash val="solid"/>
-                    </a:lnL>
-                    <a:lnR w="9525" cap="flat" cmpd="sng" algn="ctr">
-                      <a:solidFill>
-                        <a:srgbClr val="7A2F00"/>
-                      </a:solidFill>
-                      <a:prstDash val="solid"/>
-                    </a:lnR>
-                    <a:lnT w="9525" cap="flat" cmpd="sng" algn="ctr">
-                      <a:solidFill>
-                        <a:srgbClr val="7A2F00"/>
-                      </a:solidFill>
-                      <a:prstDash val="solid"/>
-                    </a:lnT>
-                    <a:lnB w="9525" cap="flat" cmpd="sng" algn="ctr">
-                      <a:solidFill>
-                        <a:srgbClr val="7A2F00"/>
-                      </a:solidFill>
-                      <a:prstDash val="solid"/>
-                    </a:lnB>
-                    <a:solidFill>
-                      <a:srgbClr val="FFFFFF"/>
-                    </a:solidFill>
-                  </a:tcPr>
-                </a:tc>
-                <a:tc>
-                  <a:txBody>
-                    <a:bodyPr wrap="square"/>
-                    <a:lstStyle/>
-                    <a:p>
-                      <a:pPr algn="l">
-                        <a:spcAft>
-                          <a:spcPts val="0"/>
-                        </a:spcAft>
-                      </a:pPr>
-                      <a:r>
-                        <a:rPr sz="1300" b="0" i="0">
-                          <a:solidFill>
-                            <a:srgbClr val="000000"/>
-                          </a:solidFill>
-                          <a:latin typeface="Calibri"/>
-                        </a:rPr>
-                        <a:t>Yes</a:t>
-                      </a:r>
-                    </a:p>
-                  </a:txBody>
-                  <a:tcPr marL="73152" marR="73152" marT="27432" marB="27432" anchor="ctr">
-                    <a:lnL w="9525" cap="flat" cmpd="sng" algn="ctr">
-                      <a:solidFill>
-                        <a:srgbClr val="7A2F00"/>
-                      </a:solidFill>
-                      <a:prstDash val="solid"/>
-                    </a:lnL>
-                    <a:lnR w="9525" cap="flat" cmpd="sng" algn="ctr">
-                      <a:solidFill>
-                        <a:srgbClr val="7A2F00"/>
-                      </a:solidFill>
-                      <a:prstDash val="solid"/>
-                    </a:lnR>
-                    <a:lnT w="9525" cap="flat" cmpd="sng" algn="ctr">
-                      <a:solidFill>
-                        <a:srgbClr val="7A2F00"/>
-                      </a:solidFill>
-                      <a:prstDash val="solid"/>
-                    </a:lnT>
-                    <a:lnB w="9525" cap="flat" cmpd="sng" algn="ctr">
-                      <a:solidFill>
-                        <a:srgbClr val="7A2F00"/>
-                      </a:solidFill>
-                      <a:prstDash val="solid"/>
-                    </a:lnB>
-                    <a:solidFill>
-                      <a:srgbClr val="FFFFFF"/>
-                    </a:solidFill>
-                  </a:tcPr>
-                </a:tc>
-                <a:tc>
-                  <a:txBody>
-                    <a:bodyPr wrap="square"/>
-                    <a:lstStyle/>
-                    <a:p>
-                      <a:pPr algn="l">
-                        <a:spcAft>
-                          <a:spcPts val="0"/>
-                        </a:spcAft>
-                      </a:pPr>
-                      <a:r>
-                        <a:rPr sz="1300" b="0" i="0">
-                          <a:solidFill>
-                            <a:srgbClr val="000000"/>
-                          </a:solidFill>
-                          <a:latin typeface="Calibri"/>
-                        </a:rPr>
-                        <a:t>No, first check only</a:t>
-                      </a:r>
-                    </a:p>
-                  </a:txBody>
-                  <a:tcPr marL="73152" marR="73152" marT="27432" marB="27432" anchor="ctr">
-                    <a:lnL w="9525" cap="flat" cmpd="sng" algn="ctr">
-                      <a:solidFill>
-                        <a:srgbClr val="7A2F00"/>
-                      </a:solidFill>
-                      <a:prstDash val="solid"/>
-                    </a:lnL>
-                    <a:lnR w="9525" cap="flat" cmpd="sng" algn="ctr">
-                      <a:solidFill>
-                        <a:srgbClr val="7A2F00"/>
-                      </a:solidFill>
-                      <a:prstDash val="solid"/>
-                    </a:lnR>
-                    <a:lnT w="9525" cap="flat" cmpd="sng" algn="ctr">
-                      <a:solidFill>
-                        <a:srgbClr val="7A2F00"/>
-                      </a:solidFill>
-                      <a:prstDash val="solid"/>
-                    </a:lnT>
-                    <a:lnB w="9525" cap="flat" cmpd="sng" algn="ctr">
-                      <a:solidFill>
-                        <a:srgbClr val="7A2F00"/>
-                      </a:solidFill>
-                      <a:prstDash val="solid"/>
-                    </a:lnB>
-                    <a:solidFill>
-                      <a:srgbClr val="FFFFFF"/>
-                    </a:solidFill>
-                  </a:tcPr>
-                </a:tc>
-              </a:tr>
-            </a:tbl>
-          </a:graphicData>
-        </a:graphic>
-      </p:graphicFrame>
-      <p:sp>
-        <p:nvSpPr>
-          <p:cNvPr id="55" name="TextBox 54"/>
+              <a:t>Not just a colour reader. A field result anyone can check later.</a:t>
+            </a:r>
+          </a:p>
+        </p:txBody>
+      </p:sp>
+      <p:sp>
+        <p:nvSpPr>
+          <p:cNvPr id="46" name="TextBox 45"/>
           <p:cNvSpPr txBox="1"/>
           <p:nvPr/>
         </p:nvSpPr>
         <p:spPr>
           <a:xfrm>
-            <a:off x="8796528" y="9034272"/>
-            <a:ext cx="8686800" cy="310896"/>
+            <a:off x="9418320" y="2331720"/>
+            <a:ext cx="6675120" cy="3474720"/>
           </a:xfrm>
           <a:prstGeom prst="rect">
             <a:avLst/>
@@ -7627,23 +5968,262 @@
           </a:bodyPr>
           <a:lstStyle/>
           <a:p>
-            <a:pPr algn="l">
+            <a:pPr algn="l" marL="201168" indent="-201168">
               <a:spcAft>
-                <a:spcPts val="400"/>
+                <a:spcPts val="600"/>
               </a:spcAft>
+              <a:buFont typeface="Arial"/>
+              <a:buChar char="•"/>
             </a:pPr>
             <a:r>
-              <a:rPr sz="1250" b="0" i="0">
-                <a:solidFill>
-                  <a:srgbClr val="555555"/>
+              <a:rPr sz="1900" b="1" i="0">
+                <a:solidFill>
+                  <a:srgbClr val="000000"/>
                 </a:solidFill>
                 <a:latin typeface="Calibri"/>
               </a:rPr>
-              <a:t>Also: new kit profiles are added from the admin website without an app update. The app works in Tamil.</a:t>
-            </a:r>
-          </a:p>
-        </p:txBody>
-      </p:sp>
+              <a:t>Handles Lighting Variations</a:t>
+            </a:r>
+            <a:r>
+              <a:rPr sz="1900" b="0" i="0">
+                <a:solidFill>
+                  <a:srgbClr val="000000"/>
+                </a:solidFill>
+                <a:latin typeface="Calibri"/>
+              </a:rPr>
+              <a:t> - 24 known colours on a ₹10 card correct the light before the kit colour is read.</a:t>
+            </a:r>
+          </a:p>
+          <a:p>
+            <a:pPr algn="l" marL="201168" indent="-201168">
+              <a:spcAft>
+                <a:spcPts val="600"/>
+              </a:spcAft>
+              <a:buFont typeface="Arial"/>
+              <a:buChar char="•"/>
+            </a:pPr>
+            <a:r>
+              <a:rPr sz="1900" b="1" i="0">
+                <a:solidFill>
+                  <a:srgbClr val="000000"/>
+                </a:solidFill>
+                <a:latin typeface="Calibri"/>
+              </a:rPr>
+              <a:t>Handles Unclear Results</a:t>
+            </a:r>
+            <a:r>
+              <a:rPr sz="1900" b="0" i="0">
+                <a:solidFill>
+                  <a:srgbClr val="000000"/>
+                </a:solidFill>
+                <a:latin typeface="Calibri"/>
+              </a:rPr>
+              <a:t> - Blurry, shiny or in-between photos get NOT SURE with the reason, never a guess.</a:t>
+            </a:r>
+          </a:p>
+          <a:p>
+            <a:pPr algn="l" marL="201168" indent="-201168">
+              <a:spcAft>
+                <a:spcPts val="600"/>
+              </a:spcAft>
+              <a:buFont typeface="Arial"/>
+              <a:buChar char="•"/>
+            </a:pPr>
+            <a:r>
+              <a:rPr sz="1900" b="1" i="0">
+                <a:solidFill>
+                  <a:srgbClr val="000000"/>
+                </a:solidFill>
+                <a:latin typeface="Calibri"/>
+              </a:rPr>
+              <a:t>Creates Verifiable Evidence</a:t>
+            </a:r>
+            <a:r>
+              <a:rPr sz="1900" b="0" i="0">
+                <a:solidFill>
+                  <a:srgbClr val="000000"/>
+                </a:solidFill>
+                <a:latin typeface="Calibri"/>
+              </a:rPr>
+              <a:t> - Photo fingerprint, GPS, internet time and Inspector ID are signed and checked by QR.</a:t>
+            </a:r>
+          </a:p>
+          <a:p>
+            <a:pPr algn="l" marL="201168" indent="-201168">
+              <a:spcAft>
+                <a:spcPts val="600"/>
+              </a:spcAft>
+              <a:buFont typeface="Arial"/>
+              <a:buChar char="•"/>
+            </a:pPr>
+            <a:r>
+              <a:rPr sz="1900" b="1" i="0">
+                <a:solidFill>
+                  <a:srgbClr val="000000"/>
+                </a:solidFill>
+                <a:latin typeface="Calibri"/>
+              </a:rPr>
+              <a:t>Supports Multiple Kits</a:t>
+            </a:r>
+            <a:r>
+              <a:rPr sz="1900" b="0" i="0">
+                <a:solidFill>
+                  <a:srgbClr val="000000"/>
+                </a:solidFill>
+                <a:latin typeface="Calibri"/>
+              </a:rPr>
+              <a:t> - New kit colour profiles are added from the Admin website without changing the app.</a:t>
+            </a:r>
+          </a:p>
+          <a:p>
+            <a:pPr algn="l" marL="201168" indent="-201168">
+              <a:spcAft>
+                <a:spcPts val="600"/>
+              </a:spcAft>
+              <a:buFont typeface="Arial"/>
+              <a:buChar char="•"/>
+            </a:pPr>
+            <a:r>
+              <a:rPr sz="1900" b="1" i="0">
+                <a:solidFill>
+                  <a:srgbClr val="000000"/>
+                </a:solidFill>
+                <a:latin typeface="Calibri"/>
+              </a:rPr>
+              <a:t>Local Language Support</a:t>
+            </a:r>
+            <a:r>
+              <a:rPr sz="1900" b="0" i="0">
+                <a:solidFill>
+                  <a:srgbClr val="000000"/>
+                </a:solidFill>
+                <a:latin typeface="Calibri"/>
+              </a:rPr>
+              <a:t> - Officers can use the app in Tamil.</a:t>
+            </a:r>
+          </a:p>
+        </p:txBody>
+      </p:sp>
+      <p:pic>
+        <p:nvPicPr>
+          <p:cNvPr id="47" name="Picture 46" descr="image.png"/>
+          <p:cNvPicPr>
+            <a:picLocks noChangeAspect="1"/>
+          </p:cNvPicPr>
+          <p:nvPr/>
+        </p:nvPicPr>
+        <p:blipFill>
+          <a:blip r:embed="rId8"/>
+          <a:srcRect b="34000"/>
+          <a:stretch>
+            <a:fillRect/>
+          </a:stretch>
+        </p:blipFill>
+        <p:spPr>
+          <a:xfrm>
+            <a:off x="8641080" y="6510528"/>
+            <a:ext cx="1901536" cy="2788920"/>
+          </a:xfrm>
+          <a:prstGeom prst="rect">
+            <a:avLst/>
+          </a:prstGeom>
+          <a:ln w="9525">
+            <a:solidFill>
+              <a:srgbClr val="D0D0D0"/>
+            </a:solidFill>
+          </a:ln>
+        </p:spPr>
+      </p:pic>
+      <p:pic>
+        <p:nvPicPr>
+          <p:cNvPr id="48" name="Picture 47" descr="image.png"/>
+          <p:cNvPicPr>
+            <a:picLocks noChangeAspect="1"/>
+          </p:cNvPicPr>
+          <p:nvPr/>
+        </p:nvPicPr>
+        <p:blipFill>
+          <a:blip r:embed="rId9"/>
+          <a:srcRect/>
+          <a:stretch>
+            <a:fillRect/>
+          </a:stretch>
+        </p:blipFill>
+        <p:spPr>
+          <a:xfrm>
+            <a:off x="10926663" y="6510528"/>
+            <a:ext cx="1255014" cy="2788920"/>
+          </a:xfrm>
+          <a:prstGeom prst="rect">
+            <a:avLst/>
+          </a:prstGeom>
+          <a:ln w="9525">
+            <a:solidFill>
+              <a:srgbClr val="D0D0D0"/>
+            </a:solidFill>
+          </a:ln>
+        </p:spPr>
+      </p:pic>
+      <p:pic>
+        <p:nvPicPr>
+          <p:cNvPr id="49" name="Picture 48" descr="image.png"/>
+          <p:cNvPicPr>
+            <a:picLocks noChangeAspect="1"/>
+          </p:cNvPicPr>
+          <p:nvPr/>
+        </p:nvPicPr>
+        <p:blipFill>
+          <a:blip r:embed="rId10"/>
+          <a:srcRect b="18000"/>
+          <a:stretch>
+            <a:fillRect/>
+          </a:stretch>
+        </p:blipFill>
+        <p:spPr>
+          <a:xfrm>
+            <a:off x="12565726" y="6510528"/>
+            <a:ext cx="1530504" cy="2788920"/>
+          </a:xfrm>
+          <a:prstGeom prst="rect">
+            <a:avLst/>
+          </a:prstGeom>
+          <a:ln w="9525">
+            <a:solidFill>
+              <a:srgbClr val="D0D0D0"/>
+            </a:solidFill>
+          </a:ln>
+        </p:spPr>
+      </p:pic>
+      <p:pic>
+        <p:nvPicPr>
+          <p:cNvPr id="50" name="Picture 49" descr="image.png"/>
+          <p:cNvPicPr>
+            <a:picLocks noChangeAspect="1"/>
+          </p:cNvPicPr>
+          <p:nvPr/>
+        </p:nvPicPr>
+        <p:blipFill>
+          <a:blip r:embed="rId11"/>
+          <a:srcRect r="38000"/>
+          <a:stretch>
+            <a:fillRect/>
+          </a:stretch>
+        </p:blipFill>
+        <p:spPr>
+          <a:xfrm>
+            <a:off x="14480278" y="6510528"/>
+            <a:ext cx="3137930" cy="2788920"/>
+          </a:xfrm>
+          <a:prstGeom prst="rect">
+            <a:avLst/>
+          </a:prstGeom>
+          <a:ln w="9525">
+            <a:solidFill>
+              <a:srgbClr val="D0D0D0"/>
+            </a:solidFill>
+          </a:ln>
+        </p:spPr>
+      </p:pic>
     </p:spTree>
   </p:cSld>
   <p:clrMapOvr>
@@ -8242,7 +6822,7 @@
         </p:nvSpPr>
         <p:spPr>
           <a:xfrm>
-            <a:off x="640080" y="2286000"/>
+            <a:off x="640080" y="2331720"/>
             <a:ext cx="8321040" cy="877824"/>
           </a:xfrm>
           <a:prstGeom prst="roundRect">
@@ -8290,7 +6870,7 @@
         </p:nvSpPr>
         <p:spPr>
           <a:xfrm>
-            <a:off x="685800" y="2286000"/>
+            <a:off x="685800" y="2331720"/>
             <a:ext cx="1234439" cy="877824"/>
           </a:xfrm>
           <a:prstGeom prst="rect">
@@ -8345,7 +6925,7 @@
         </p:nvSpPr>
         <p:spPr>
           <a:xfrm>
-            <a:off x="1965959" y="2395728"/>
+            <a:off x="1965959" y="2441448"/>
             <a:ext cx="1074420" cy="658368"/>
           </a:xfrm>
           <a:prstGeom prst="roundRect">
@@ -8424,7 +7004,7 @@
         </p:nvSpPr>
         <p:spPr>
           <a:xfrm>
-            <a:off x="3131820" y="2395728"/>
+            <a:off x="3131820" y="2441448"/>
             <a:ext cx="1074420" cy="658368"/>
           </a:xfrm>
           <a:prstGeom prst="roundRect">
@@ -8503,7 +7083,7 @@
         </p:nvSpPr>
         <p:spPr>
           <a:xfrm>
-            <a:off x="4297679" y="2395728"/>
+            <a:off x="4297679" y="2441448"/>
             <a:ext cx="1074420" cy="658368"/>
           </a:xfrm>
           <a:prstGeom prst="roundRect">
@@ -8582,7 +7162,7 @@
         </p:nvSpPr>
         <p:spPr>
           <a:xfrm>
-            <a:off x="5463540" y="2395728"/>
+            <a:off x="5463540" y="2441448"/>
             <a:ext cx="1074420" cy="658368"/>
           </a:xfrm>
           <a:prstGeom prst="roundRect">
@@ -8661,7 +7241,7 @@
         </p:nvSpPr>
         <p:spPr>
           <a:xfrm>
-            <a:off x="6629400" y="2395728"/>
+            <a:off x="6629400" y="2441448"/>
             <a:ext cx="1074420" cy="658368"/>
           </a:xfrm>
           <a:prstGeom prst="roundRect">
@@ -8740,7 +7320,7 @@
         </p:nvSpPr>
         <p:spPr>
           <a:xfrm>
-            <a:off x="7795260" y="2395728"/>
+            <a:off x="7795260" y="2441448"/>
             <a:ext cx="1074420" cy="658368"/>
           </a:xfrm>
           <a:prstGeom prst="roundRect">
@@ -8819,7 +7399,7 @@
         </p:nvSpPr>
         <p:spPr>
           <a:xfrm>
-            <a:off x="5262371" y="3191256"/>
+            <a:off x="5262371" y="3236976"/>
             <a:ext cx="310896" cy="237744"/>
           </a:xfrm>
           <a:prstGeom prst="downArrow">
@@ -8863,7 +7443,7 @@
         </p:nvSpPr>
         <p:spPr>
           <a:xfrm>
-            <a:off x="640080" y="3474720"/>
+            <a:off x="640080" y="3520439"/>
             <a:ext cx="8321040" cy="1335024"/>
           </a:xfrm>
           <a:prstGeom prst="roundRect">
@@ -8911,7 +7491,7 @@
         </p:nvSpPr>
         <p:spPr>
           <a:xfrm>
-            <a:off x="685800" y="3474720"/>
+            <a:off x="685800" y="3520439"/>
             <a:ext cx="1234439" cy="1335024"/>
           </a:xfrm>
           <a:prstGeom prst="rect">
@@ -8966,7 +7546,7 @@
         </p:nvSpPr>
         <p:spPr>
           <a:xfrm>
-            <a:off x="1965959" y="3584448"/>
+            <a:off x="1965959" y="3630168"/>
             <a:ext cx="1307592" cy="658368"/>
           </a:xfrm>
           <a:prstGeom prst="roundRect">
@@ -9045,7 +7625,7 @@
         </p:nvSpPr>
         <p:spPr>
           <a:xfrm>
-            <a:off x="3364991" y="3584448"/>
+            <a:off x="3364991" y="3630168"/>
             <a:ext cx="1307592" cy="658368"/>
           </a:xfrm>
           <a:prstGeom prst="roundRect">
@@ -9124,7 +7704,7 @@
         </p:nvSpPr>
         <p:spPr>
           <a:xfrm>
-            <a:off x="4764023" y="3584448"/>
+            <a:off x="4764023" y="3630168"/>
             <a:ext cx="1307592" cy="658368"/>
           </a:xfrm>
           <a:prstGeom prst="roundRect">
@@ -9203,7 +7783,7 @@
         </p:nvSpPr>
         <p:spPr>
           <a:xfrm>
-            <a:off x="6163055" y="3584448"/>
+            <a:off x="6163055" y="3630168"/>
             <a:ext cx="1307592" cy="658368"/>
           </a:xfrm>
           <a:prstGeom prst="roundRect">
@@ -9282,7 +7862,7 @@
         </p:nvSpPr>
         <p:spPr>
           <a:xfrm>
-            <a:off x="7562088" y="3584448"/>
+            <a:off x="7562088" y="3630168"/>
             <a:ext cx="1307592" cy="658368"/>
           </a:xfrm>
           <a:prstGeom prst="roundRect">
@@ -9361,7 +7941,7 @@
         </p:nvSpPr>
         <p:spPr>
           <a:xfrm>
-            <a:off x="1965959" y="4343400"/>
+            <a:off x="1965959" y="4389120"/>
             <a:ext cx="2240279" cy="347472"/>
           </a:xfrm>
           <a:prstGeom prst="roundRect">
@@ -9422,7 +8002,7 @@
         </p:nvSpPr>
         <p:spPr>
           <a:xfrm>
-            <a:off x="4297679" y="4343400"/>
+            <a:off x="4297679" y="4389120"/>
             <a:ext cx="2240279" cy="347472"/>
           </a:xfrm>
           <a:prstGeom prst="roundRect">
@@ -9483,7 +8063,7 @@
         </p:nvSpPr>
         <p:spPr>
           <a:xfrm>
-            <a:off x="6629399" y="4343400"/>
+            <a:off x="6629399" y="4389120"/>
             <a:ext cx="2240279" cy="347472"/>
           </a:xfrm>
           <a:prstGeom prst="roundRect">
@@ -9544,7 +8124,7 @@
         </p:nvSpPr>
         <p:spPr>
           <a:xfrm>
-            <a:off x="5262371" y="4837176"/>
+            <a:off x="5262371" y="4882896"/>
             <a:ext cx="310896" cy="237744"/>
           </a:xfrm>
           <a:prstGeom prst="downArrow">
@@ -9588,7 +8168,7 @@
         </p:nvSpPr>
         <p:spPr>
           <a:xfrm>
-            <a:off x="640080" y="5120640"/>
+            <a:off x="640080" y="5166359"/>
             <a:ext cx="8321040" cy="877824"/>
           </a:xfrm>
           <a:prstGeom prst="roundRect">
@@ -9636,7 +8216,7 @@
         </p:nvSpPr>
         <p:spPr>
           <a:xfrm>
-            <a:off x="685800" y="5120640"/>
+            <a:off x="685800" y="5166359"/>
             <a:ext cx="1234439" cy="877824"/>
           </a:xfrm>
           <a:prstGeom prst="rect">
@@ -9691,7 +8271,7 @@
         </p:nvSpPr>
         <p:spPr>
           <a:xfrm>
-            <a:off x="1965959" y="5230368"/>
+            <a:off x="1965959" y="5276088"/>
             <a:ext cx="1307592" cy="658368"/>
           </a:xfrm>
           <a:prstGeom prst="roundRect">
@@ -9770,7 +8350,7 @@
         </p:nvSpPr>
         <p:spPr>
           <a:xfrm>
-            <a:off x="3364991" y="5230368"/>
+            <a:off x="3364991" y="5276088"/>
             <a:ext cx="1307592" cy="658368"/>
           </a:xfrm>
           <a:prstGeom prst="roundRect">
@@ -9849,7 +8429,7 @@
         </p:nvSpPr>
         <p:spPr>
           <a:xfrm>
-            <a:off x="4764023" y="5230368"/>
+            <a:off x="4764023" y="5276088"/>
             <a:ext cx="1307592" cy="658368"/>
           </a:xfrm>
           <a:prstGeom prst="roundRect">
@@ -9928,7 +8508,7 @@
         </p:nvSpPr>
         <p:spPr>
           <a:xfrm>
-            <a:off x="6163055" y="5230368"/>
+            <a:off x="6163055" y="5276088"/>
             <a:ext cx="1307592" cy="658368"/>
           </a:xfrm>
           <a:prstGeom prst="roundRect">
@@ -10007,7 +8587,7 @@
         </p:nvSpPr>
         <p:spPr>
           <a:xfrm>
-            <a:off x="7562088" y="5230368"/>
+            <a:off x="7562088" y="5276088"/>
             <a:ext cx="1307592" cy="658368"/>
           </a:xfrm>
           <a:prstGeom prst="roundRect">
@@ -10086,7 +8666,7 @@
         </p:nvSpPr>
         <p:spPr>
           <a:xfrm>
-            <a:off x="5262371" y="6025896"/>
+            <a:off x="5262371" y="6071616"/>
             <a:ext cx="310896" cy="237744"/>
           </a:xfrm>
           <a:prstGeom prst="downArrow">
@@ -10130,7 +8710,7 @@
         </p:nvSpPr>
         <p:spPr>
           <a:xfrm>
-            <a:off x="640080" y="6309359"/>
+            <a:off x="640080" y="6355079"/>
             <a:ext cx="8321040" cy="877824"/>
           </a:xfrm>
           <a:prstGeom prst="roundRect">
@@ -10178,7 +8758,7 @@
         </p:nvSpPr>
         <p:spPr>
           <a:xfrm>
-            <a:off x="685800" y="6309359"/>
+            <a:off x="685800" y="6355079"/>
             <a:ext cx="1234439" cy="877824"/>
           </a:xfrm>
           <a:prstGeom prst="rect">
@@ -10217,7 +8797,7 @@
         </p:nvSpPr>
         <p:spPr>
           <a:xfrm>
-            <a:off x="1965959" y="6419088"/>
+            <a:off x="1965959" y="6464807"/>
             <a:ext cx="3406140" cy="658368"/>
           </a:xfrm>
           <a:prstGeom prst="roundRect">
@@ -10296,7 +8876,7 @@
         </p:nvSpPr>
         <p:spPr>
           <a:xfrm>
-            <a:off x="5463540" y="6419088"/>
+            <a:off x="5463540" y="6464807"/>
             <a:ext cx="3406140" cy="658368"/>
           </a:xfrm>
           <a:prstGeom prst="roundRect">
@@ -10375,7 +8955,7 @@
         </p:nvSpPr>
         <p:spPr>
           <a:xfrm>
-            <a:off x="5262371" y="7214616"/>
+            <a:off x="5262371" y="7260336"/>
             <a:ext cx="310896" cy="237744"/>
           </a:xfrm>
           <a:prstGeom prst="downArrow">
@@ -10419,7 +8999,7 @@
         </p:nvSpPr>
         <p:spPr>
           <a:xfrm>
-            <a:off x="640080" y="7498079"/>
+            <a:off x="640080" y="7543800"/>
             <a:ext cx="8321040" cy="877824"/>
           </a:xfrm>
           <a:prstGeom prst="roundRect">
@@ -10467,7 +9047,7 @@
         </p:nvSpPr>
         <p:spPr>
           <a:xfrm>
-            <a:off x="685800" y="7498079"/>
+            <a:off x="685800" y="7543800"/>
             <a:ext cx="1234439" cy="877824"/>
           </a:xfrm>
           <a:prstGeom prst="rect">
@@ -10493,7 +9073,7 @@
                 </a:solidFill>
                 <a:latin typeface="Calibri"/>
               </a:rPr>
-              <a:t>Dashboard</a:t>
+              <a:t>Admin</a:t>
             </a:r>
           </a:p>
           <a:p>
@@ -10509,7 +9089,7 @@
                 </a:solidFill>
                 <a:latin typeface="Calibri"/>
               </a:rPr>
-              <a:t>(React)</a:t>
+              <a:t>Dashboard</a:t>
             </a:r>
           </a:p>
         </p:txBody>
@@ -10522,7 +9102,7 @@
         </p:nvSpPr>
         <p:spPr>
           <a:xfrm>
-            <a:off x="1965959" y="7607807"/>
+            <a:off x="1965959" y="7653527"/>
             <a:ext cx="1307592" cy="658368"/>
           </a:xfrm>
           <a:prstGeom prst="roundRect">
@@ -10601,7 +9181,7 @@
         </p:nvSpPr>
         <p:spPr>
           <a:xfrm>
-            <a:off x="3364991" y="7607807"/>
+            <a:off x="3364991" y="7653527"/>
             <a:ext cx="1307592" cy="658368"/>
           </a:xfrm>
           <a:prstGeom prst="roundRect">
@@ -10664,7 +9244,7 @@
         </p:nvSpPr>
         <p:spPr>
           <a:xfrm>
-            <a:off x="4764023" y="7607807"/>
+            <a:off x="4764023" y="7653527"/>
             <a:ext cx="1307592" cy="658368"/>
           </a:xfrm>
           <a:prstGeom prst="roundRect">
@@ -10727,7 +9307,7 @@
         </p:nvSpPr>
         <p:spPr>
           <a:xfrm>
-            <a:off x="6163055" y="7607807"/>
+            <a:off x="6163055" y="7653527"/>
             <a:ext cx="1307592" cy="658368"/>
           </a:xfrm>
           <a:prstGeom prst="roundRect">
@@ -10806,7 +9386,7 @@
         </p:nvSpPr>
         <p:spPr>
           <a:xfrm>
-            <a:off x="7562088" y="7607807"/>
+            <a:off x="7562088" y="7653527"/>
             <a:ext cx="1307592" cy="658368"/>
           </a:xfrm>
           <a:prstGeom prst="roundRect">
@@ -10885,7 +9465,7 @@
         </p:nvSpPr>
         <p:spPr>
           <a:xfrm>
-            <a:off x="640080" y="8412480"/>
+            <a:off x="640080" y="8458200"/>
             <a:ext cx="8321040" cy="274320"/>
           </a:xfrm>
           <a:prstGeom prst="rect">
@@ -10911,7 +9491,7 @@
                 </a:solidFill>
                 <a:latin typeface="Calibri"/>
               </a:rPr>
-              <a:t>Everything in this diagram is built and running in our prototype.</a:t>
+              <a:t>Everything shown is built. No AI model, on purpose: colour maths that can be explained with numbers.</a:t>
             </a:r>
           </a:p>
         </p:txBody>
@@ -10924,7 +9504,7 @@
         </p:nvSpPr>
         <p:spPr>
           <a:xfrm>
-            <a:off x="9281160" y="1783080"/>
+            <a:off x="9299448" y="1847088"/>
             <a:ext cx="5852160" cy="457200"/>
           </a:xfrm>
           <a:prstGeom prst="rect">
@@ -10950,7 +9530,7 @@
                 </a:solidFill>
                 <a:latin typeface="Calibri"/>
               </a:rPr>
-              <a:t>How the App Decides</a:t>
+              <a:t>Measured Results</a:t>
             </a:r>
           </a:p>
         </p:txBody>
@@ -10963,8 +9543,8 @@
         </p:nvSpPr>
         <p:spPr>
           <a:xfrm>
-            <a:off x="9281160" y="2240280"/>
-            <a:ext cx="5897880" cy="2743200"/>
+            <a:off x="9326880" y="2286000"/>
+            <a:ext cx="5897880" cy="3310128"/>
           </a:xfrm>
           <a:prstGeom prst="rect">
             <a:avLst/>
@@ -10979,163 +9559,136 @@
           <a:p>
             <a:pPr algn="l" marL="201168" indent="-201168">
               <a:spcAft>
-                <a:spcPts val="300"/>
+                <a:spcPts val="800"/>
               </a:spcAft>
               <a:buFont typeface="Arial"/>
               <a:buChar char="•"/>
             </a:pPr>
             <a:r>
-              <a:rPr sz="1500" b="0" i="0">
+              <a:rPr sz="1700" b="1" i="0">
                 <a:solidFill>
                   <a:srgbClr val="000000"/>
                 </a:solidFill>
                 <a:latin typeface="Calibri"/>
               </a:rPr>
-              <a:t>The card has 24 colours we already know. The app sees how the light changed them and removes the same change from the kit colour.</a:t>
+              <a:t>Testing</a:t>
+            </a:r>
+            <a:r>
+              <a:rPr sz="1700" b="0" i="0">
+                <a:solidFill>
+                  <a:srgbClr val="000000"/>
+                </a:solidFill>
+                <a:latin typeface="Calibri"/>
+              </a:rPr>
+              <a:t> - 37 computer-made photos in 5 lights and 25 real phone scans.</a:t>
             </a:r>
           </a:p>
           <a:p>
             <a:pPr algn="l" marL="201168" indent="-201168">
               <a:spcAft>
-                <a:spcPts val="300"/>
+                <a:spcPts val="800"/>
               </a:spcAft>
               <a:buFont typeface="Arial"/>
               <a:buChar char="•"/>
             </a:pPr>
             <a:r>
-              <a:rPr sz="1500" b="0" i="0">
+              <a:rPr sz="1700" b="1" i="0">
                 <a:solidFill>
                   <a:srgbClr val="000000"/>
                 </a:solidFill>
                 <a:latin typeface="Calibri"/>
               </a:rPr>
-              <a:t>Result only if the closest kit colour is within </a:t>
-            </a:r>
-            <a:r>
-              <a:rPr sz="1500" b="1" i="0">
+              <a:t>Accuracy</a:t>
+            </a:r>
+            <a:r>
+              <a:rPr sz="1700" b="0" i="0">
                 <a:solidFill>
                   <a:srgbClr val="000000"/>
                 </a:solidFill>
                 <a:latin typeface="Calibri"/>
               </a:rPr>
-              <a:t>ΔE 14</a:t>
-            </a:r>
-            <a:r>
-              <a:rPr sz="1500" b="0" i="0">
-                <a:solidFill>
-                  <a:srgbClr val="000000"/>
-                </a:solidFill>
-                <a:latin typeface="Calibri"/>
-              </a:rPr>
-              <a:t> and at least </a:t>
-            </a:r>
-            <a:r>
-              <a:rPr sz="1500" b="1" i="0">
-                <a:solidFill>
-                  <a:srgbClr val="000000"/>
-                </a:solidFill>
-                <a:latin typeface="Calibri"/>
-              </a:rPr>
-              <a:t>4 points</a:t>
-            </a:r>
-            <a:r>
-              <a:rPr sz="1500" b="0" i="0">
-                <a:solidFill>
-                  <a:srgbClr val="000000"/>
-                </a:solidFill>
-                <a:latin typeface="Calibri"/>
-              </a:rPr>
-              <a:t> ahead of the next. Else NOT SURE.</a:t>
+              <a:t> - 25/25 computer photos right. Real scans: 14 right, 11 NOT SURE, 0 wrong.</a:t>
             </a:r>
           </a:p>
           <a:p>
             <a:pPr algn="l" marL="201168" indent="-201168">
               <a:spcAft>
-                <a:spcPts val="300"/>
+                <a:spcPts val="800"/>
               </a:spcAft>
               <a:buFont typeface="Arial"/>
               <a:buChar char="•"/>
             </a:pPr>
             <a:r>
-              <a:rPr sz="1500" b="1" i="0">
+              <a:rPr sz="1700" b="1" i="0">
                 <a:solidFill>
                   <a:srgbClr val="000000"/>
                 </a:solidFill>
                 <a:latin typeface="Calibri"/>
               </a:rPr>
-              <a:t>Card fit check</a:t>
-            </a:r>
-            <a:r>
-              <a:rPr sz="1500" b="0" i="0">
+              <a:t>Colour Check</a:t>
+            </a:r>
+            <a:r>
+              <a:rPr sz="1700" b="0" i="0">
                 <a:solidFill>
                   <a:srgbClr val="000000"/>
                 </a:solidFill>
                 <a:latin typeface="Calibri"/>
               </a:rPr>
-              <a:t> - after correction, the 24 known colours must be within ΔE 9 on average (real photos gave 5.9 to 8.7).</a:t>
+              <a:t> - ΔE ≤ 14 and a 4-point lead, else NOT SURE. The % shown is a match score, not a probability.</a:t>
             </a:r>
           </a:p>
           <a:p>
             <a:pPr algn="l" marL="201168" indent="-201168">
               <a:spcAft>
-                <a:spcPts val="300"/>
+                <a:spcPts val="800"/>
               </a:spcAft>
               <a:buFont typeface="Arial"/>
               <a:buChar char="•"/>
             </a:pPr>
             <a:r>
-              <a:rPr sz="1500" b="0" i="0">
+              <a:rPr sz="1700" b="1" i="0">
                 <a:solidFill>
                   <a:srgbClr val="000000"/>
                 </a:solidFill>
                 <a:latin typeface="Calibri"/>
               </a:rPr>
-              <a:t>The % on the result screen is a </a:t>
-            </a:r>
-            <a:r>
-              <a:rPr sz="1500" b="1" i="0">
+              <a:t>Speed</a:t>
+            </a:r>
+            <a:r>
+              <a:rPr sz="1700" b="0" i="0">
                 <a:solidFill>
                   <a:srgbClr val="000000"/>
                 </a:solidFill>
                 <a:latin typeface="Calibri"/>
               </a:rPr>
-              <a:t>match score</a:t>
-            </a:r>
-            <a:r>
-              <a:rPr sz="1500" b="0" i="0">
-                <a:solidFill>
-                  <a:srgbClr val="000000"/>
-                </a:solidFill>
-                <a:latin typeface="Calibri"/>
-              </a:rPr>
-              <a:t> (closeness and lead), not a probability.</a:t>
+              <a:t> - Server check 2.5 s (5 s max). Whole test about 16 seconds.</a:t>
             </a:r>
           </a:p>
           <a:p>
             <a:pPr algn="l" marL="201168" indent="-201168">
               <a:spcAft>
-                <a:spcPts val="300"/>
+                <a:spcPts val="800"/>
               </a:spcAft>
               <a:buFont typeface="Arial"/>
               <a:buChar char="•"/>
             </a:pPr>
             <a:r>
-              <a:rPr sz="1500" b="1" i="0">
+              <a:rPr sz="1700" b="1" i="0">
                 <a:solidFill>
                   <a:srgbClr val="000000"/>
                 </a:solidFill>
                 <a:latin typeface="Calibri"/>
               </a:rPr>
-              <a:t>No AI model, on purpose</a:t>
-            </a:r>
-            <a:r>
-              <a:rPr sz="1500" b="0" i="0">
+              <a:t>Tamper Test</a:t>
+            </a:r>
+            <a:r>
+              <a:rPr sz="1700" b="0" i="0">
                 <a:solidFill>
                   <a:srgbClr val="000000"/>
                 </a:solidFill>
                 <a:latin typeface="Calibri"/>
               </a:rPr>
-              <a:t> - it needs no drug photos to train, and every result can be explained with numbers.</a:t>
+              <a:t> - All 4/4 changed records were caught.</a:t>
             </a:r>
           </a:p>
         </p:txBody>
@@ -11148,8 +9701,8 @@
         </p:nvSpPr>
         <p:spPr>
           <a:xfrm>
-            <a:off x="9281160" y="4983480"/>
-            <a:ext cx="5852160" cy="457200"/>
+            <a:off x="9326880" y="5230368"/>
+            <a:ext cx="5897880" cy="566928"/>
           </a:xfrm>
           <a:prstGeom prst="rect">
             <a:avLst/>
@@ -11162,33 +9715,132 @@
           </a:bodyPr>
           <a:lstStyle/>
           <a:p>
+            <a:pPr algn="ctr">
+              <a:spcAft>
+                <a:spcPts val="0"/>
+              </a:spcAft>
+            </a:pPr>
+            <a:r>
+              <a:rPr sz="1550" b="0" i="1">
+                <a:solidFill>
+                  <a:srgbClr val="000000"/>
+                </a:solidFill>
+                <a:latin typeface="Calibri"/>
+              </a:rPr>
+              <a:t>Kit colours are printed swatches on a screen, 1 phone. Small test, not proof. Real kits need an FSL trial (TRL 4).</a:t>
+            </a:r>
+          </a:p>
+        </p:txBody>
+      </p:sp>
+      <p:cxnSp>
+        <p:nvCxnSpPr>
+          <p:cNvPr id="63" name="Connector 62"/>
+          <p:cNvCxnSpPr/>
+          <p:nvPr/>
+        </p:nvCxnSpPr>
+        <p:spPr>
+          <a:xfrm>
+            <a:off x="9299448" y="5870448"/>
+            <a:ext cx="5833872" cy="0"/>
+          </a:xfrm>
+          <a:prstGeom prst="line">
+            <a:avLst/>
+          </a:prstGeom>
+          <a:ln w="15875">
+            <a:solidFill>
+              <a:srgbClr val="B2935B"/>
+            </a:solidFill>
+          </a:ln>
+        </p:spPr>
+        <p:style>
+          <a:lnRef idx="2">
+            <a:schemeClr val="accent1"/>
+          </a:lnRef>
+          <a:fillRef idx="0">
+            <a:schemeClr val="accent1"/>
+          </a:fillRef>
+          <a:effectRef idx="1">
+            <a:schemeClr val="accent1"/>
+          </a:effectRef>
+          <a:fontRef idx="minor">
+            <a:schemeClr val="tx1"/>
+          </a:fontRef>
+        </p:style>
+      </p:cxnSp>
+      <p:sp>
+        <p:nvSpPr>
+          <p:cNvPr id="64" name="TextBox 63"/>
+          <p:cNvSpPr txBox="1"/>
+          <p:nvPr/>
+        </p:nvSpPr>
+        <p:spPr>
+          <a:xfrm>
+            <a:off x="9299448" y="5943600"/>
+            <a:ext cx="5897880" cy="310896"/>
+          </a:xfrm>
+          <a:prstGeom prst="rect">
+            <a:avLst/>
+          </a:prstGeom>
+          <a:noFill/>
+        </p:spPr>
+        <p:txBody>
+          <a:bodyPr wrap="square" anchor="t" lIns="27432" rIns="27432" tIns="18288" bIns="18288">
+            <a:noAutofit/>
+          </a:bodyPr>
+          <a:lstStyle/>
+          <a:p>
             <a:pPr algn="l">
               <a:spcAft>
                 <a:spcPts val="0"/>
               </a:spcAft>
             </a:pPr>
             <a:r>
-              <a:rPr sz="2500" b="1" i="0">
-                <a:solidFill>
-                  <a:srgbClr val="974826"/>
+              <a:rPr sz="1700" b="1" i="0">
+                <a:solidFill>
+                  <a:srgbClr val="7A2F00"/>
                 </a:solidFill>
                 <a:latin typeface="Calibri"/>
               </a:rPr>
-              <a:t>Measured Results</a:t>
-            </a:r>
-          </a:p>
-        </p:txBody>
-      </p:sp>
-      <p:sp>
-        <p:nvSpPr>
-          <p:cNvPr id="63" name="TextBox 62"/>
+              <a:t>Prototype Validation Using Real Phone Scans (29 Sep)</a:t>
+            </a:r>
+          </a:p>
+        </p:txBody>
+      </p:sp>
+      <p:pic>
+        <p:nvPicPr>
+          <p:cNvPr id="65" name="Picture 64" descr="real_scans_tiles.png"/>
+          <p:cNvPicPr>
+            <a:picLocks noChangeAspect="1"/>
+          </p:cNvPicPr>
+          <p:nvPr/>
+        </p:nvPicPr>
+        <p:blipFill>
+          <a:blip r:embed="rId9"/>
+          <a:srcRect/>
+          <a:stretch>
+            <a:fillRect/>
+          </a:stretch>
+        </p:blipFill>
+        <p:spPr>
+          <a:xfrm>
+            <a:off x="9299448" y="6355080"/>
+            <a:ext cx="3291840" cy="2039815"/>
+          </a:xfrm>
+          <a:prstGeom prst="rect">
+            <a:avLst/>
+          </a:prstGeom>
+        </p:spPr>
+      </p:pic>
+      <p:sp>
+        <p:nvSpPr>
+          <p:cNvPr id="66" name="TextBox 65"/>
           <p:cNvSpPr txBox="1"/>
           <p:nvPr/>
         </p:nvSpPr>
         <p:spPr>
           <a:xfrm>
-            <a:off x="9281160" y="5394960"/>
-            <a:ext cx="5897880" cy="329184"/>
+            <a:off x="9299448" y="8458200"/>
+            <a:ext cx="3291840" cy="685800"/>
           </a:xfrm>
           <a:prstGeom prst="rect">
             <a:avLst/>
@@ -11207,28 +9859,67 @@
               </a:spcAft>
             </a:pPr>
             <a:r>
+              <a:rPr sz="1200" b="0" i="0">
+                <a:solidFill>
+                  <a:srgbClr val="555555"/>
+                </a:solidFill>
+                <a:latin typeface="Calibri"/>
+              </a:rPr>
+              <a:t>1 phone, 1 room, card on a laptop screen. We checked each card by eye.</a:t>
+            </a:r>
+          </a:p>
+        </p:txBody>
+      </p:sp>
+      <p:sp>
+        <p:nvSpPr>
+          <p:cNvPr id="67" name="TextBox 66"/>
+          <p:cNvSpPr txBox="1"/>
+          <p:nvPr/>
+        </p:nvSpPr>
+        <p:spPr>
+          <a:xfrm>
+            <a:off x="12710160" y="6327648"/>
+            <a:ext cx="2514600" cy="310896"/>
+          </a:xfrm>
+          <a:prstGeom prst="rect">
+            <a:avLst/>
+          </a:prstGeom>
+          <a:noFill/>
+        </p:spPr>
+        <p:txBody>
+          <a:bodyPr wrap="square" anchor="t" lIns="27432" rIns="27432" tIns="18288" bIns="18288">
+            <a:noAutofit/>
+          </a:bodyPr>
+          <a:lstStyle/>
+          <a:p>
+            <a:pPr algn="l">
+              <a:spcAft>
+                <a:spcPts val="0"/>
+              </a:spcAft>
+            </a:pPr>
+            <a:r>
               <a:rPr sz="1500" b="1" i="0">
                 <a:solidFill>
                   <a:srgbClr val="7A2F00"/>
                 </a:solidFill>
                 <a:latin typeface="Calibri"/>
               </a:rPr>
-              <a:t>0 wrong answers so far, and every NOT SURE had a reason.</a:t>
+              <a:t>All 19 real scans</a:t>
             </a:r>
           </a:p>
         </p:txBody>
       </p:sp>
       <p:graphicFrame>
         <p:nvGraphicFramePr>
-          <p:cNvPr id="64" name="Table 63"/>
+          <p:cNvPr id="68" name="Table 67"/>
           <p:cNvGraphicFramePr>
             <a:graphicFrameLocks noGrp="1"/>
           </p:cNvGraphicFramePr>
           <p:nvPr/>
         </p:nvGraphicFramePr>
         <p:xfrm>
-          <a:off x="9281160" y="5760720"/>
-          <a:ext cx="5897879" cy="2304288"/>
+          <a:off x="12710160" y="6675120"/>
+          <a:ext cx="2514600" cy="1243584"/>
         </p:xfrm>
         <a:graphic>
           <a:graphicData uri="http://schemas.openxmlformats.org/drawingml/2006/table">
@@ -11237,9 +9928,10 @@
                 <a:tableStyleId>{5C22544A-7EE6-4342-B048-85BDC9FD1C3A}</a:tableStyleId>
               </a:tblPr>
               <a:tblGrid>
-                <a:gridCol w="1874519"/>
-                <a:gridCol w="502920"/>
-                <a:gridCol w="3520440"/>
+                <a:gridCol w="960120"/>
+                <a:gridCol w="457200"/>
+                <a:gridCol w="457200"/>
+                <a:gridCol w="640080"/>
               </a:tblGrid>
               <a:tr h="310896">
                 <a:tc>
@@ -11253,46 +9945,201 @@
                         </a:spcAft>
                       </a:pPr>
                       <a:r>
-                        <a:rPr sz="1250" b="1" i="0">
+                        <a:rPr sz="1200" b="1" i="0">
                           <a:solidFill>
                             <a:srgbClr val="000000"/>
                           </a:solidFill>
                           <a:latin typeface="Calibri"/>
                         </a:rPr>
-                        <a:t>Test</a:t>
+                        <a:t>Card</a:t>
                       </a:r>
                     </a:p>
                   </a:txBody>
                   <a:tcPr marL="73152" marR="73152" marT="27432" marB="27432" anchor="ctr">
                     <a:lnL w="9525" cap="flat" cmpd="sng" algn="ctr">
                       <a:solidFill>
-                        <a:srgbClr val="7A2F00"/>
+                        <a:srgbClr val="D9C4A0"/>
                       </a:solidFill>
                       <a:prstDash val="solid"/>
                     </a:lnL>
                     <a:lnR w="9525" cap="flat" cmpd="sng" algn="ctr">
                       <a:solidFill>
-                        <a:srgbClr val="7A2F00"/>
+                        <a:srgbClr val="D9C4A0"/>
                       </a:solidFill>
                       <a:prstDash val="solid"/>
                     </a:lnR>
                     <a:lnT w="9525" cap="flat" cmpd="sng" algn="ctr">
                       <a:solidFill>
-                        <a:srgbClr val="7A2F00"/>
+                        <a:srgbClr val="D9C4A0"/>
                       </a:solidFill>
                       <a:prstDash val="solid"/>
                     </a:lnT>
                     <a:lnB w="9525" cap="flat" cmpd="sng" algn="ctr">
                       <a:solidFill>
-                        <a:srgbClr val="7A2F00"/>
+                        <a:srgbClr val="D9C4A0"/>
                       </a:solidFill>
                       <a:prstDash val="solid"/>
                     </a:lnB>
                     <a:solidFill>
-                      <a:srgbClr val="B2935B"/>
+                      <a:srgbClr val="F2EBDD"/>
                     </a:solidFill>
                   </a:tcPr>
                 </a:tc>
+                <a:tc>
+                  <a:txBody>
+                    <a:bodyPr wrap="square"/>
+                    <a:lstStyle/>
+                    <a:p>
+                      <a:pPr algn="ctr">
+                        <a:spcAft>
+                          <a:spcPts val="0"/>
+                        </a:spcAft>
+                      </a:pPr>
+                      <a:r>
+                        <a:rPr sz="1200" b="1" i="0">
+                          <a:solidFill>
+                            <a:srgbClr val="000000"/>
+                          </a:solidFill>
+                          <a:latin typeface="Calibri"/>
+                        </a:rPr>
+                        <a:t>POS</a:t>
+                      </a:r>
+                    </a:p>
+                  </a:txBody>
+                  <a:tcPr marL="73152" marR="73152" marT="27432" marB="27432" anchor="ctr">
+                    <a:lnL w="9525" cap="flat" cmpd="sng" algn="ctr">
+                      <a:solidFill>
+                        <a:srgbClr val="D9C4A0"/>
+                      </a:solidFill>
+                      <a:prstDash val="solid"/>
+                    </a:lnL>
+                    <a:lnR w="9525" cap="flat" cmpd="sng" algn="ctr">
+                      <a:solidFill>
+                        <a:srgbClr val="D9C4A0"/>
+                      </a:solidFill>
+                      <a:prstDash val="solid"/>
+                    </a:lnR>
+                    <a:lnT w="9525" cap="flat" cmpd="sng" algn="ctr">
+                      <a:solidFill>
+                        <a:srgbClr val="D9C4A0"/>
+                      </a:solidFill>
+                      <a:prstDash val="solid"/>
+                    </a:lnT>
+                    <a:lnB w="9525" cap="flat" cmpd="sng" algn="ctr">
+                      <a:solidFill>
+                        <a:srgbClr val="D9C4A0"/>
+                      </a:solidFill>
+                      <a:prstDash val="solid"/>
+                    </a:lnB>
+                    <a:solidFill>
+                      <a:srgbClr val="F2EBDD"/>
+                    </a:solidFill>
+                  </a:tcPr>
+                </a:tc>
+                <a:tc>
+                  <a:txBody>
+                    <a:bodyPr wrap="square"/>
+                    <a:lstStyle/>
+                    <a:p>
+                      <a:pPr algn="ctr">
+                        <a:spcAft>
+                          <a:spcPts val="0"/>
+                        </a:spcAft>
+                      </a:pPr>
+                      <a:r>
+                        <a:rPr sz="1200" b="1" i="0">
+                          <a:solidFill>
+                            <a:srgbClr val="000000"/>
+                          </a:solidFill>
+                          <a:latin typeface="Calibri"/>
+                        </a:rPr>
+                        <a:t>NEG</a:t>
+                      </a:r>
+                    </a:p>
+                  </a:txBody>
+                  <a:tcPr marL="73152" marR="73152" marT="27432" marB="27432" anchor="ctr">
+                    <a:lnL w="9525" cap="flat" cmpd="sng" algn="ctr">
+                      <a:solidFill>
+                        <a:srgbClr val="D9C4A0"/>
+                      </a:solidFill>
+                      <a:prstDash val="solid"/>
+                    </a:lnL>
+                    <a:lnR w="9525" cap="flat" cmpd="sng" algn="ctr">
+                      <a:solidFill>
+                        <a:srgbClr val="D9C4A0"/>
+                      </a:solidFill>
+                      <a:prstDash val="solid"/>
+                    </a:lnR>
+                    <a:lnT w="9525" cap="flat" cmpd="sng" algn="ctr">
+                      <a:solidFill>
+                        <a:srgbClr val="D9C4A0"/>
+                      </a:solidFill>
+                      <a:prstDash val="solid"/>
+                    </a:lnT>
+                    <a:lnB w="9525" cap="flat" cmpd="sng" algn="ctr">
+                      <a:solidFill>
+                        <a:srgbClr val="D9C4A0"/>
+                      </a:solidFill>
+                      <a:prstDash val="solid"/>
+                    </a:lnB>
+                    <a:solidFill>
+                      <a:srgbClr val="F2EBDD"/>
+                    </a:solidFill>
+                  </a:tcPr>
+                </a:tc>
+                <a:tc>
+                  <a:txBody>
+                    <a:bodyPr wrap="square"/>
+                    <a:lstStyle/>
+                    <a:p>
+                      <a:pPr algn="ctr">
+                        <a:spcAft>
+                          <a:spcPts val="0"/>
+                        </a:spcAft>
+                      </a:pPr>
+                      <a:r>
+                        <a:rPr sz="1200" b="1" i="0">
+                          <a:solidFill>
+                            <a:srgbClr val="000000"/>
+                          </a:solidFill>
+                          <a:latin typeface="Calibri"/>
+                        </a:rPr>
+                        <a:t>NOT SURE</a:t>
+                      </a:r>
+                    </a:p>
+                  </a:txBody>
+                  <a:tcPr marL="73152" marR="73152" marT="27432" marB="27432" anchor="ctr">
+                    <a:lnL w="9525" cap="flat" cmpd="sng" algn="ctr">
+                      <a:solidFill>
+                        <a:srgbClr val="D9C4A0"/>
+                      </a:solidFill>
+                      <a:prstDash val="solid"/>
+                    </a:lnL>
+                    <a:lnR w="9525" cap="flat" cmpd="sng" algn="ctr">
+                      <a:solidFill>
+                        <a:srgbClr val="D9C4A0"/>
+                      </a:solidFill>
+                      <a:prstDash val="solid"/>
+                    </a:lnR>
+                    <a:lnT w="9525" cap="flat" cmpd="sng" algn="ctr">
+                      <a:solidFill>
+                        <a:srgbClr val="D9C4A0"/>
+                      </a:solidFill>
+                      <a:prstDash val="solid"/>
+                    </a:lnT>
+                    <a:lnB w="9525" cap="flat" cmpd="sng" algn="ctr">
+                      <a:solidFill>
+                        <a:srgbClr val="D9C4A0"/>
+                      </a:solidFill>
+                      <a:prstDash val="solid"/>
+                    </a:lnB>
+                    <a:solidFill>
+                      <a:srgbClr val="F2EBDD"/>
+                    </a:solidFill>
+                  </a:tcPr>
+                </a:tc>
+              </a:tr>
+              <a:tr h="310896">
                 <a:tc>
                   <a:txBody>
                     <a:bodyPr wrap="square"/>
@@ -11304,142 +10151,38 @@
                         </a:spcAft>
                       </a:pPr>
                       <a:r>
-                        <a:rPr sz="1250" b="1" i="0">
+                        <a:rPr sz="1200" b="0" i="0">
                           <a:solidFill>
                             <a:srgbClr val="000000"/>
                           </a:solidFill>
                           <a:latin typeface="Calibri"/>
                         </a:rPr>
-                        <a:t>n</a:t>
+                        <a:t>Positive (8)</a:t>
                       </a:r>
                     </a:p>
                   </a:txBody>
                   <a:tcPr marL="73152" marR="73152" marT="27432" marB="27432" anchor="ctr">
                     <a:lnL w="9525" cap="flat" cmpd="sng" algn="ctr">
                       <a:solidFill>
-                        <a:srgbClr val="7A2F00"/>
+                        <a:srgbClr val="D9C4A0"/>
                       </a:solidFill>
                       <a:prstDash val="solid"/>
                     </a:lnL>
                     <a:lnR w="9525" cap="flat" cmpd="sng" algn="ctr">
                       <a:solidFill>
-                        <a:srgbClr val="7A2F00"/>
+                        <a:srgbClr val="D9C4A0"/>
                       </a:solidFill>
                       <a:prstDash val="solid"/>
                     </a:lnR>
                     <a:lnT w="9525" cap="flat" cmpd="sng" algn="ctr">
                       <a:solidFill>
-                        <a:srgbClr val="7A2F00"/>
+                        <a:srgbClr val="D9C4A0"/>
                       </a:solidFill>
                       <a:prstDash val="solid"/>
                     </a:lnT>
                     <a:lnB w="9525" cap="flat" cmpd="sng" algn="ctr">
                       <a:solidFill>
-                        <a:srgbClr val="7A2F00"/>
-                      </a:solidFill>
-                      <a:prstDash val="solid"/>
-                    </a:lnB>
-                    <a:solidFill>
-                      <a:srgbClr val="B2935B"/>
-                    </a:solidFill>
-                  </a:tcPr>
-                </a:tc>
-                <a:tc>
-                  <a:txBody>
-                    <a:bodyPr wrap="square"/>
-                    <a:lstStyle/>
-                    <a:p>
-                      <a:pPr algn="l">
-                        <a:spcAft>
-                          <a:spcPts val="0"/>
-                        </a:spcAft>
-                      </a:pPr>
-                      <a:r>
-                        <a:rPr sz="1250" b="1" i="0">
-                          <a:solidFill>
-                            <a:srgbClr val="000000"/>
-                          </a:solidFill>
-                          <a:latin typeface="Calibri"/>
-                        </a:rPr>
-                        <a:t>What happened</a:t>
-                      </a:r>
-                    </a:p>
-                  </a:txBody>
-                  <a:tcPr marL="73152" marR="73152" marT="27432" marB="27432" anchor="ctr">
-                    <a:lnL w="9525" cap="flat" cmpd="sng" algn="ctr">
-                      <a:solidFill>
-                        <a:srgbClr val="7A2F00"/>
-                      </a:solidFill>
-                      <a:prstDash val="solid"/>
-                    </a:lnL>
-                    <a:lnR w="9525" cap="flat" cmpd="sng" algn="ctr">
-                      <a:solidFill>
-                        <a:srgbClr val="7A2F00"/>
-                      </a:solidFill>
-                      <a:prstDash val="solid"/>
-                    </a:lnR>
-                    <a:lnT w="9525" cap="flat" cmpd="sng" algn="ctr">
-                      <a:solidFill>
-                        <a:srgbClr val="7A2F00"/>
-                      </a:solidFill>
-                      <a:prstDash val="solid"/>
-                    </a:lnT>
-                    <a:lnB w="9525" cap="flat" cmpd="sng" algn="ctr">
-                      <a:solidFill>
-                        <a:srgbClr val="7A2F00"/>
-                      </a:solidFill>
-                      <a:prstDash val="solid"/>
-                    </a:lnB>
-                    <a:solidFill>
-                      <a:srgbClr val="B2935B"/>
-                    </a:solidFill>
-                  </a:tcPr>
-                </a:tc>
-              </a:tr>
-              <a:tr h="457200">
-                <a:tc>
-                  <a:txBody>
-                    <a:bodyPr wrap="square"/>
-                    <a:lstStyle/>
-                    <a:p>
-                      <a:pPr algn="l">
-                        <a:spcAft>
-                          <a:spcPts val="0"/>
-                        </a:spcAft>
-                      </a:pPr>
-                      <a:r>
-                        <a:rPr sz="1250" b="0" i="0">
-                          <a:solidFill>
-                            <a:srgbClr val="000000"/>
-                          </a:solidFill>
-                          <a:latin typeface="Calibri"/>
-                        </a:rPr>
-                        <a:t>Computer-made photos</a:t>
-                      </a:r>
-                    </a:p>
-                  </a:txBody>
-                  <a:tcPr marL="73152" marR="73152" marT="27432" marB="27432" anchor="ctr">
-                    <a:lnL w="9525" cap="flat" cmpd="sng" algn="ctr">
-                      <a:solidFill>
-                        <a:srgbClr val="7A2F00"/>
-                      </a:solidFill>
-                      <a:prstDash val="solid"/>
-                    </a:lnL>
-                    <a:lnR w="9525" cap="flat" cmpd="sng" algn="ctr">
-                      <a:solidFill>
-                        <a:srgbClr val="7A2F00"/>
-                      </a:solidFill>
-                      <a:prstDash val="solid"/>
-                    </a:lnR>
-                    <a:lnT w="9525" cap="flat" cmpd="sng" algn="ctr">
-                      <a:solidFill>
-                        <a:srgbClr val="7A2F00"/>
-                      </a:solidFill>
-                      <a:prstDash val="solid"/>
-                    </a:lnT>
-                    <a:lnB w="9525" cap="flat" cmpd="sng" algn="ctr">
-                      <a:solidFill>
-                        <a:srgbClr val="7A2F00"/>
+                        <a:srgbClr val="D9C4A0"/>
                       </a:solidFill>
                       <a:prstDash val="solid"/>
                     </a:lnB>
@@ -11453,44 +10196,95 @@
                     <a:bodyPr wrap="square"/>
                     <a:lstStyle/>
                     <a:p>
-                      <a:pPr algn="l">
+                      <a:pPr algn="ctr">
                         <a:spcAft>
                           <a:spcPts val="0"/>
                         </a:spcAft>
                       </a:pPr>
                       <a:r>
-                        <a:rPr sz="1250" b="0" i="0">
+                        <a:rPr sz="1200" b="1" i="0">
                           <a:solidFill>
-                            <a:srgbClr val="000000"/>
+                            <a:srgbClr val="2E7D32"/>
                           </a:solidFill>
                           <a:latin typeface="Calibri"/>
                         </a:rPr>
-                        <a:t>37</a:t>
+                        <a:t>5</a:t>
                       </a:r>
                     </a:p>
                   </a:txBody>
                   <a:tcPr marL="73152" marR="73152" marT="27432" marB="27432" anchor="ctr">
                     <a:lnL w="9525" cap="flat" cmpd="sng" algn="ctr">
                       <a:solidFill>
-                        <a:srgbClr val="7A2F00"/>
+                        <a:srgbClr val="D9C4A0"/>
                       </a:solidFill>
                       <a:prstDash val="solid"/>
                     </a:lnL>
                     <a:lnR w="9525" cap="flat" cmpd="sng" algn="ctr">
                       <a:solidFill>
-                        <a:srgbClr val="7A2F00"/>
+                        <a:srgbClr val="D9C4A0"/>
                       </a:solidFill>
                       <a:prstDash val="solid"/>
                     </a:lnR>
                     <a:lnT w="9525" cap="flat" cmpd="sng" algn="ctr">
                       <a:solidFill>
-                        <a:srgbClr val="7A2F00"/>
+                        <a:srgbClr val="D9C4A0"/>
                       </a:solidFill>
                       <a:prstDash val="solid"/>
                     </a:lnT>
                     <a:lnB w="9525" cap="flat" cmpd="sng" algn="ctr">
                       <a:solidFill>
-                        <a:srgbClr val="7A2F00"/>
+                        <a:srgbClr val="D9C4A0"/>
+                      </a:solidFill>
+                      <a:prstDash val="solid"/>
+                    </a:lnB>
+                    <a:solidFill>
+                      <a:srgbClr val="E8F5E9"/>
+                    </a:solidFill>
+                  </a:tcPr>
+                </a:tc>
+                <a:tc>
+                  <a:txBody>
+                    <a:bodyPr wrap="square"/>
+                    <a:lstStyle/>
+                    <a:p>
+                      <a:pPr algn="ctr">
+                        <a:spcAft>
+                          <a:spcPts val="0"/>
+                        </a:spcAft>
+                      </a:pPr>
+                      <a:r>
+                        <a:rPr sz="1200" b="0" i="0">
+                          <a:solidFill>
+                            <a:srgbClr val="B0B0B0"/>
+                          </a:solidFill>
+                          <a:latin typeface="Calibri"/>
+                        </a:rPr>
+                        <a:t>0</a:t>
+                      </a:r>
+                    </a:p>
+                  </a:txBody>
+                  <a:tcPr marL="73152" marR="73152" marT="27432" marB="27432" anchor="ctr">
+                    <a:lnL w="9525" cap="flat" cmpd="sng" algn="ctr">
+                      <a:solidFill>
+                        <a:srgbClr val="D9C4A0"/>
+                      </a:solidFill>
+                      <a:prstDash val="solid"/>
+                    </a:lnL>
+                    <a:lnR w="9525" cap="flat" cmpd="sng" algn="ctr">
+                      <a:solidFill>
+                        <a:srgbClr val="D9C4A0"/>
+                      </a:solidFill>
+                      <a:prstDash val="solid"/>
+                    </a:lnR>
+                    <a:lnT w="9525" cap="flat" cmpd="sng" algn="ctr">
+                      <a:solidFill>
+                        <a:srgbClr val="D9C4A0"/>
+                      </a:solidFill>
+                      <a:prstDash val="solid"/>
+                    </a:lnT>
+                    <a:lnB w="9525" cap="flat" cmpd="sng" algn="ctr">
+                      <a:solidFill>
+                        <a:srgbClr val="D9C4A0"/>
                       </a:solidFill>
                       <a:prstDash val="solid"/>
                     </a:lnB>
@@ -11504,44 +10298,44 @@
                     <a:bodyPr wrap="square"/>
                     <a:lstStyle/>
                     <a:p>
-                      <a:pPr algn="l">
+                      <a:pPr algn="ctr">
                         <a:spcAft>
                           <a:spcPts val="0"/>
                         </a:spcAft>
                       </a:pPr>
                       <a:r>
-                        <a:rPr sz="1250" b="0" i="0">
+                        <a:rPr sz="1200" b="0" i="0">
                           <a:solidFill>
                             <a:srgbClr val="000000"/>
                           </a:solidFill>
                           <a:latin typeface="Calibri"/>
                         </a:rPr>
-                        <a:t>5 lights. 25 of 25 good photos right, 12 of 12 bad photos NOT SURE</a:t>
+                        <a:t>3</a:t>
                       </a:r>
                     </a:p>
                   </a:txBody>
                   <a:tcPr marL="73152" marR="73152" marT="27432" marB="27432" anchor="ctr">
                     <a:lnL w="9525" cap="flat" cmpd="sng" algn="ctr">
                       <a:solidFill>
-                        <a:srgbClr val="7A2F00"/>
+                        <a:srgbClr val="D9C4A0"/>
                       </a:solidFill>
                       <a:prstDash val="solid"/>
                     </a:lnL>
                     <a:lnR w="9525" cap="flat" cmpd="sng" algn="ctr">
                       <a:solidFill>
-                        <a:srgbClr val="7A2F00"/>
+                        <a:srgbClr val="D9C4A0"/>
                       </a:solidFill>
                       <a:prstDash val="solid"/>
                     </a:lnR>
                     <a:lnT w="9525" cap="flat" cmpd="sng" algn="ctr">
                       <a:solidFill>
-                        <a:srgbClr val="7A2F00"/>
+                        <a:srgbClr val="D9C4A0"/>
                       </a:solidFill>
                       <a:prstDash val="solid"/>
                     </a:lnT>
                     <a:lnB w="9525" cap="flat" cmpd="sng" algn="ctr">
                       <a:solidFill>
-                        <a:srgbClr val="7A2F00"/>
+                        <a:srgbClr val="D9C4A0"/>
                       </a:solidFill>
                       <a:prstDash val="solid"/>
                     </a:lnB>
@@ -11563,38 +10357,38 @@
                         </a:spcAft>
                       </a:pPr>
                       <a:r>
-                        <a:rPr sz="1250" b="0" i="0">
+                        <a:rPr sz="1200" b="0" i="0">
                           <a:solidFill>
                             <a:srgbClr val="000000"/>
                           </a:solidFill>
                           <a:latin typeface="Calibri"/>
                         </a:rPr>
-                        <a:t>Real scans, 28 Sep</a:t>
+                        <a:t>Plain (4)</a:t>
                       </a:r>
                     </a:p>
                   </a:txBody>
                   <a:tcPr marL="73152" marR="73152" marT="27432" marB="27432" anchor="ctr">
                     <a:lnL w="9525" cap="flat" cmpd="sng" algn="ctr">
                       <a:solidFill>
-                        <a:srgbClr val="7A2F00"/>
+                        <a:srgbClr val="D9C4A0"/>
                       </a:solidFill>
                       <a:prstDash val="solid"/>
                     </a:lnL>
                     <a:lnR w="9525" cap="flat" cmpd="sng" algn="ctr">
                       <a:solidFill>
-                        <a:srgbClr val="7A2F00"/>
+                        <a:srgbClr val="D9C4A0"/>
                       </a:solidFill>
                       <a:prstDash val="solid"/>
                     </a:lnR>
                     <a:lnT w="9525" cap="flat" cmpd="sng" algn="ctr">
                       <a:solidFill>
-                        <a:srgbClr val="7A2F00"/>
+                        <a:srgbClr val="D9C4A0"/>
                       </a:solidFill>
                       <a:prstDash val="solid"/>
                     </a:lnT>
                     <a:lnB w="9525" cap="flat" cmpd="sng" algn="ctr">
                       <a:solidFill>
-                        <a:srgbClr val="7A2F00"/>
+                        <a:srgbClr val="D9C4A0"/>
                       </a:solidFill>
                       <a:prstDash val="solid"/>
                     </a:lnB>
@@ -11608,44 +10402,44 @@
                     <a:bodyPr wrap="square"/>
                     <a:lstStyle/>
                     <a:p>
-                      <a:pPr algn="l">
+                      <a:pPr algn="ctr">
                         <a:spcAft>
                           <a:spcPts val="0"/>
                         </a:spcAft>
                       </a:pPr>
                       <a:r>
-                        <a:rPr sz="1250" b="0" i="0">
+                        <a:rPr sz="1200" b="0" i="0">
                           <a:solidFill>
-                            <a:srgbClr val="000000"/>
+                            <a:srgbClr val="B0B0B0"/>
                           </a:solidFill>
                           <a:latin typeface="Calibri"/>
                         </a:rPr>
-                        <a:t>6</a:t>
+                        <a:t>0</a:t>
                       </a:r>
                     </a:p>
                   </a:txBody>
                   <a:tcPr marL="73152" marR="73152" marT="27432" marB="27432" anchor="ctr">
                     <a:lnL w="9525" cap="flat" cmpd="sng" algn="ctr">
                       <a:solidFill>
-                        <a:srgbClr val="7A2F00"/>
+                        <a:srgbClr val="D9C4A0"/>
                       </a:solidFill>
                       <a:prstDash val="solid"/>
                     </a:lnL>
                     <a:lnR w="9525" cap="flat" cmpd="sng" algn="ctr">
                       <a:solidFill>
-                        <a:srgbClr val="7A2F00"/>
+                        <a:srgbClr val="D9C4A0"/>
                       </a:solidFill>
                       <a:prstDash val="solid"/>
                     </a:lnR>
                     <a:lnT w="9525" cap="flat" cmpd="sng" algn="ctr">
                       <a:solidFill>
-                        <a:srgbClr val="7A2F00"/>
+                        <a:srgbClr val="D9C4A0"/>
                       </a:solidFill>
                       <a:prstDash val="solid"/>
                     </a:lnT>
                     <a:lnB w="9525" cap="flat" cmpd="sng" algn="ctr">
                       <a:solidFill>
-                        <a:srgbClr val="7A2F00"/>
+                        <a:srgbClr val="D9C4A0"/>
                       </a:solidFill>
                       <a:prstDash val="solid"/>
                     </a:lnB>
@@ -11659,102 +10453,49 @@
                     <a:bodyPr wrap="square"/>
                     <a:lstStyle/>
                     <a:p>
-                      <a:pPr algn="l">
+                      <a:pPr algn="ctr">
                         <a:spcAft>
                           <a:spcPts val="0"/>
                         </a:spcAft>
                       </a:pPr>
                       <a:r>
-                        <a:rPr sz="1250" b="0" i="0">
+                        <a:rPr sz="1200" b="1" i="0">
                           <a:solidFill>
-                            <a:srgbClr val="000000"/>
+                            <a:srgbClr val="2E7D32"/>
                           </a:solidFill>
                           <a:latin typeface="Calibri"/>
                         </a:rPr>
-                        <a:t>5 right, 1 NOT SURE (card fit), 0 wrong</a:t>
+                        <a:t>4</a:t>
                       </a:r>
                     </a:p>
                   </a:txBody>
                   <a:tcPr marL="73152" marR="73152" marT="27432" marB="27432" anchor="ctr">
                     <a:lnL w="9525" cap="flat" cmpd="sng" algn="ctr">
                       <a:solidFill>
-                        <a:srgbClr val="7A2F00"/>
+                        <a:srgbClr val="D9C4A0"/>
                       </a:solidFill>
                       <a:prstDash val="solid"/>
                     </a:lnL>
                     <a:lnR w="9525" cap="flat" cmpd="sng" algn="ctr">
                       <a:solidFill>
-                        <a:srgbClr val="7A2F00"/>
+                        <a:srgbClr val="D9C4A0"/>
                       </a:solidFill>
                       <a:prstDash val="solid"/>
                     </a:lnR>
                     <a:lnT w="9525" cap="flat" cmpd="sng" algn="ctr">
                       <a:solidFill>
-                        <a:srgbClr val="7A2F00"/>
+                        <a:srgbClr val="D9C4A0"/>
                       </a:solidFill>
                       <a:prstDash val="solid"/>
                     </a:lnT>
                     <a:lnB w="9525" cap="flat" cmpd="sng" algn="ctr">
                       <a:solidFill>
-                        <a:srgbClr val="7A2F00"/>
+                        <a:srgbClr val="D9C4A0"/>
                       </a:solidFill>
                       <a:prstDash val="solid"/>
                     </a:lnB>
                     <a:solidFill>
-                      <a:srgbClr val="FFFFFF"/>
-                    </a:solidFill>
-                  </a:tcPr>
-                </a:tc>
-              </a:tr>
-              <a:tr h="457200">
-                <a:tc>
-                  <a:txBody>
-                    <a:bodyPr wrap="square"/>
-                    <a:lstStyle/>
-                    <a:p>
-                      <a:pPr algn="l">
-                        <a:spcAft>
-                          <a:spcPts val="0"/>
-                        </a:spcAft>
-                      </a:pPr>
-                      <a:r>
-                        <a:rPr sz="1250" b="0" i="0">
-                          <a:solidFill>
-                            <a:srgbClr val="000000"/>
-                          </a:solidFill>
-                          <a:latin typeface="Calibri"/>
-                        </a:rPr>
-                        <a:t>Real scans, 29 Sep</a:t>
-                      </a:r>
-                    </a:p>
-                  </a:txBody>
-                  <a:tcPr marL="73152" marR="73152" marT="27432" marB="27432" anchor="ctr">
-                    <a:lnL w="9525" cap="flat" cmpd="sng" algn="ctr">
-                      <a:solidFill>
-                        <a:srgbClr val="7A2F00"/>
-                      </a:solidFill>
-                      <a:prstDash val="solid"/>
-                    </a:lnL>
-                    <a:lnR w="9525" cap="flat" cmpd="sng" algn="ctr">
-                      <a:solidFill>
-                        <a:srgbClr val="7A2F00"/>
-                      </a:solidFill>
-                      <a:prstDash val="solid"/>
-                    </a:lnR>
-                    <a:lnT w="9525" cap="flat" cmpd="sng" algn="ctr">
-                      <a:solidFill>
-                        <a:srgbClr val="7A2F00"/>
-                      </a:solidFill>
-                      <a:prstDash val="solid"/>
-                    </a:lnT>
-                    <a:lnB w="9525" cap="flat" cmpd="sng" algn="ctr">
-                      <a:solidFill>
-                        <a:srgbClr val="7A2F00"/>
-                      </a:solidFill>
-                      <a:prstDash val="solid"/>
-                    </a:lnB>
-                    <a:solidFill>
-                      <a:srgbClr val="FFFFFF"/>
+                      <a:srgbClr val="E8F5E9"/>
                     </a:solidFill>
                   </a:tcPr>
                 </a:tc>
@@ -11763,95 +10504,44 @@
                     <a:bodyPr wrap="square"/>
                     <a:lstStyle/>
                     <a:p>
-                      <a:pPr algn="l">
+                      <a:pPr algn="ctr">
                         <a:spcAft>
                           <a:spcPts val="0"/>
                         </a:spcAft>
                       </a:pPr>
                       <a:r>
-                        <a:rPr sz="1250" b="0" i="0">
+                        <a:rPr sz="1200" b="0" i="0">
                           <a:solidFill>
-                            <a:srgbClr val="000000"/>
+                            <a:srgbClr val="B0B0B0"/>
                           </a:solidFill>
                           <a:latin typeface="Calibri"/>
                         </a:rPr>
-                        <a:t>19</a:t>
+                        <a:t>0</a:t>
                       </a:r>
                     </a:p>
                   </a:txBody>
                   <a:tcPr marL="73152" marR="73152" marT="27432" marB="27432" anchor="ctr">
                     <a:lnL w="9525" cap="flat" cmpd="sng" algn="ctr">
                       <a:solidFill>
-                        <a:srgbClr val="7A2F00"/>
+                        <a:srgbClr val="D9C4A0"/>
                       </a:solidFill>
                       <a:prstDash val="solid"/>
                     </a:lnL>
                     <a:lnR w="9525" cap="flat" cmpd="sng" algn="ctr">
                       <a:solidFill>
-                        <a:srgbClr val="7A2F00"/>
+                        <a:srgbClr val="D9C4A0"/>
                       </a:solidFill>
                       <a:prstDash val="solid"/>
                     </a:lnR>
                     <a:lnT w="9525" cap="flat" cmpd="sng" algn="ctr">
                       <a:solidFill>
-                        <a:srgbClr val="7A2F00"/>
+                        <a:srgbClr val="D9C4A0"/>
                       </a:solidFill>
                       <a:prstDash val="solid"/>
                     </a:lnT>
                     <a:lnB w="9525" cap="flat" cmpd="sng" algn="ctr">
                       <a:solidFill>
-                        <a:srgbClr val="7A2F00"/>
-                      </a:solidFill>
-                      <a:prstDash val="solid"/>
-                    </a:lnB>
-                    <a:solidFill>
-                      <a:srgbClr val="FFFFFF"/>
-                    </a:solidFill>
-                  </a:tcPr>
-                </a:tc>
-                <a:tc>
-                  <a:txBody>
-                    <a:bodyPr wrap="square"/>
-                    <a:lstStyle/>
-                    <a:p>
-                      <a:pPr algn="l">
-                        <a:spcAft>
-                          <a:spcPts val="0"/>
-                        </a:spcAft>
-                      </a:pPr>
-                      <a:r>
-                        <a:rPr sz="1250" b="0" i="0">
-                          <a:solidFill>
-                            <a:srgbClr val="000000"/>
-                          </a:solidFill>
-                          <a:latin typeface="Calibri"/>
-                        </a:rPr>
-                        <a:t>9 right, 7 of 7 trick cards NOT SURE, 3 blurry photos NOT SURE, 0 wrong</a:t>
-                      </a:r>
-                    </a:p>
-                  </a:txBody>
-                  <a:tcPr marL="73152" marR="73152" marT="27432" marB="27432" anchor="ctr">
-                    <a:lnL w="9525" cap="flat" cmpd="sng" algn="ctr">
-                      <a:solidFill>
-                        <a:srgbClr val="7A2F00"/>
-                      </a:solidFill>
-                      <a:prstDash val="solid"/>
-                    </a:lnL>
-                    <a:lnR w="9525" cap="flat" cmpd="sng" algn="ctr">
-                      <a:solidFill>
-                        <a:srgbClr val="7A2F00"/>
-                      </a:solidFill>
-                      <a:prstDash val="solid"/>
-                    </a:lnR>
-                    <a:lnT w="9525" cap="flat" cmpd="sng" algn="ctr">
-                      <a:solidFill>
-                        <a:srgbClr val="7A2F00"/>
-                      </a:solidFill>
-                      <a:prstDash val="solid"/>
-                    </a:lnT>
-                    <a:lnB w="9525" cap="flat" cmpd="sng" algn="ctr">
-                      <a:solidFill>
-                        <a:srgbClr val="7A2F00"/>
+                        <a:srgbClr val="D9C4A0"/>
                       </a:solidFill>
                       <a:prstDash val="solid"/>
                     </a:lnB>
@@ -11873,38 +10563,38 @@
                         </a:spcAft>
                       </a:pPr>
                       <a:r>
-                        <a:rPr sz="1250" b="1" i="0">
+                        <a:rPr sz="1200" b="0" i="0">
                           <a:solidFill>
                             <a:srgbClr val="000000"/>
                           </a:solidFill>
                           <a:latin typeface="Calibri"/>
                         </a:rPr>
-                        <a:t>All real scans</a:t>
+                        <a:t>Trick (7)</a:t>
                       </a:r>
                     </a:p>
                   </a:txBody>
                   <a:tcPr marL="73152" marR="73152" marT="27432" marB="27432" anchor="ctr">
                     <a:lnL w="9525" cap="flat" cmpd="sng" algn="ctr">
                       <a:solidFill>
-                        <a:srgbClr val="7A2F00"/>
+                        <a:srgbClr val="D9C4A0"/>
                       </a:solidFill>
                       <a:prstDash val="solid"/>
                     </a:lnL>
                     <a:lnR w="9525" cap="flat" cmpd="sng" algn="ctr">
                       <a:solidFill>
-                        <a:srgbClr val="7A2F00"/>
+                        <a:srgbClr val="D9C4A0"/>
                       </a:solidFill>
                       <a:prstDash val="solid"/>
                     </a:lnR>
                     <a:lnT w="9525" cap="flat" cmpd="sng" algn="ctr">
                       <a:solidFill>
-                        <a:srgbClr val="7A2F00"/>
+                        <a:srgbClr val="D9C4A0"/>
                       </a:solidFill>
                       <a:prstDash val="solid"/>
                     </a:lnT>
                     <a:lnB w="9525" cap="flat" cmpd="sng" algn="ctr">
                       <a:solidFill>
-                        <a:srgbClr val="7A2F00"/>
+                        <a:srgbClr val="D9C4A0"/>
                       </a:solidFill>
                       <a:prstDash val="solid"/>
                     </a:lnB>
@@ -11918,44 +10608,44 @@
                     <a:bodyPr wrap="square"/>
                     <a:lstStyle/>
                     <a:p>
-                      <a:pPr algn="l">
+                      <a:pPr algn="ctr">
                         <a:spcAft>
                           <a:spcPts val="0"/>
                         </a:spcAft>
                       </a:pPr>
                       <a:r>
-                        <a:rPr sz="1250" b="1" i="0">
+                        <a:rPr sz="1200" b="0" i="0">
                           <a:solidFill>
-                            <a:srgbClr val="000000"/>
+                            <a:srgbClr val="B0B0B0"/>
                           </a:solidFill>
                           <a:latin typeface="Calibri"/>
                         </a:rPr>
-                        <a:t>25</a:t>
+                        <a:t>0</a:t>
                       </a:r>
                     </a:p>
                   </a:txBody>
                   <a:tcPr marL="73152" marR="73152" marT="27432" marB="27432" anchor="ctr">
                     <a:lnL w="9525" cap="flat" cmpd="sng" algn="ctr">
                       <a:solidFill>
-                        <a:srgbClr val="7A2F00"/>
+                        <a:srgbClr val="D9C4A0"/>
                       </a:solidFill>
                       <a:prstDash val="solid"/>
                     </a:lnL>
                     <a:lnR w="9525" cap="flat" cmpd="sng" algn="ctr">
                       <a:solidFill>
-                        <a:srgbClr val="7A2F00"/>
+                        <a:srgbClr val="D9C4A0"/>
                       </a:solidFill>
                       <a:prstDash val="solid"/>
                     </a:lnR>
                     <a:lnT w="9525" cap="flat" cmpd="sng" algn="ctr">
                       <a:solidFill>
-                        <a:srgbClr val="7A2F00"/>
+                        <a:srgbClr val="D9C4A0"/>
                       </a:solidFill>
                       <a:prstDash val="solid"/>
                     </a:lnT>
                     <a:lnB w="9525" cap="flat" cmpd="sng" algn="ctr">
                       <a:solidFill>
-                        <a:srgbClr val="7A2F00"/>
+                        <a:srgbClr val="D9C4A0"/>
                       </a:solidFill>
                       <a:prstDash val="solid"/>
                     </a:lnB>
@@ -11969,97 +10659,44 @@
                     <a:bodyPr wrap="square"/>
                     <a:lstStyle/>
                     <a:p>
-                      <a:pPr algn="l">
+                      <a:pPr algn="ctr">
                         <a:spcAft>
                           <a:spcPts val="0"/>
                         </a:spcAft>
                       </a:pPr>
                       <a:r>
-                        <a:rPr sz="1250" b="1" i="0">
+                        <a:rPr sz="1200" b="0" i="0">
                           <a:solidFill>
-                            <a:srgbClr val="000000"/>
+                            <a:srgbClr val="B0B0B0"/>
                           </a:solidFill>
                           <a:latin typeface="Calibri"/>
                         </a:rPr>
-                        <a:t>14 right, 11 NOT SURE, 0 wrong</a:t>
+                        <a:t>0</a:t>
                       </a:r>
                     </a:p>
                   </a:txBody>
                   <a:tcPr marL="73152" marR="73152" marT="27432" marB="27432" anchor="ctr">
                     <a:lnL w="9525" cap="flat" cmpd="sng" algn="ctr">
                       <a:solidFill>
-                        <a:srgbClr val="7A2F00"/>
+                        <a:srgbClr val="D9C4A0"/>
                       </a:solidFill>
                       <a:prstDash val="solid"/>
                     </a:lnL>
                     <a:lnR w="9525" cap="flat" cmpd="sng" algn="ctr">
                       <a:solidFill>
-                        <a:srgbClr val="7A2F00"/>
+                        <a:srgbClr val="D9C4A0"/>
                       </a:solidFill>
                       <a:prstDash val="solid"/>
                     </a:lnR>
                     <a:lnT w="9525" cap="flat" cmpd="sng" algn="ctr">
                       <a:solidFill>
-                        <a:srgbClr val="7A2F00"/>
+                        <a:srgbClr val="D9C4A0"/>
                       </a:solidFill>
                       <a:prstDash val="solid"/>
                     </a:lnT>
                     <a:lnB w="9525" cap="flat" cmpd="sng" algn="ctr">
                       <a:solidFill>
-                        <a:srgbClr val="7A2F00"/>
-                      </a:solidFill>
-                      <a:prstDash val="solid"/>
-                    </a:lnB>
-                    <a:solidFill>
-                      <a:srgbClr val="FFFFFF"/>
-                    </a:solidFill>
-                  </a:tcPr>
-                </a:tc>
-              </a:tr>
-              <a:tr h="457200">
-                <a:tc>
-                  <a:txBody>
-                    <a:bodyPr wrap="square"/>
-                    <a:lstStyle/>
-                    <a:p>
-                      <a:pPr algn="l">
-                        <a:spcAft>
-                          <a:spcPts val="0"/>
-                        </a:spcAft>
-                      </a:pPr>
-                      <a:r>
-                        <a:rPr sz="1250" b="0" i="0">
-                          <a:solidFill>
-                            <a:srgbClr val="000000"/>
-                          </a:solidFill>
-                          <a:latin typeface="Calibri"/>
-                        </a:rPr>
-                        <a:t>Speed</a:t>
-                      </a:r>
-                    </a:p>
-                  </a:txBody>
-                  <a:tcPr marL="73152" marR="73152" marT="27432" marB="27432" anchor="ctr">
-                    <a:lnL w="9525" cap="flat" cmpd="sng" algn="ctr">
-                      <a:solidFill>
-                        <a:srgbClr val="7A2F00"/>
-                      </a:solidFill>
-                      <a:prstDash val="solid"/>
-                    </a:lnL>
-                    <a:lnR w="9525" cap="flat" cmpd="sng" algn="ctr">
-                      <a:solidFill>
-                        <a:srgbClr val="7A2F00"/>
-                      </a:solidFill>
-                      <a:prstDash val="solid"/>
-                    </a:lnR>
-                    <a:lnT w="9525" cap="flat" cmpd="sng" algn="ctr">
-                      <a:solidFill>
-                        <a:srgbClr val="7A2F00"/>
-                      </a:solidFill>
-                      <a:prstDash val="solid"/>
-                    </a:lnT>
-                    <a:lnB w="9525" cap="flat" cmpd="sng" algn="ctr">
-                      <a:solidFill>
-                        <a:srgbClr val="7A2F00"/>
+                        <a:srgbClr val="D9C4A0"/>
                       </a:solidFill>
                       <a:prstDash val="solid"/>
                     </a:lnB>
@@ -12073,116 +10710,49 @@
                     <a:bodyPr wrap="square"/>
                     <a:lstStyle/>
                     <a:p>
-                      <a:pPr algn="l">
+                      <a:pPr algn="ctr">
                         <a:spcAft>
                           <a:spcPts val="0"/>
                         </a:spcAft>
                       </a:pPr>
                       <a:r>
-                        <a:rPr sz="1250" b="0" i="0">
+                        <a:rPr sz="1200" b="1" i="0">
                           <a:solidFill>
-                            <a:srgbClr val="000000"/>
+                            <a:srgbClr val="2E7D32"/>
                           </a:solidFill>
                           <a:latin typeface="Calibri"/>
                         </a:rPr>
-                        <a:t>18</a:t>
+                        <a:t>7</a:t>
                       </a:r>
                     </a:p>
                   </a:txBody>
                   <a:tcPr marL="73152" marR="73152" marT="27432" marB="27432" anchor="ctr">
                     <a:lnL w="9525" cap="flat" cmpd="sng" algn="ctr">
                       <a:solidFill>
-                        <a:srgbClr val="7A2F00"/>
+                        <a:srgbClr val="D9C4A0"/>
                       </a:solidFill>
                       <a:prstDash val="solid"/>
                     </a:lnL>
                     <a:lnR w="9525" cap="flat" cmpd="sng" algn="ctr">
                       <a:solidFill>
-                        <a:srgbClr val="7A2F00"/>
+                        <a:srgbClr val="D9C4A0"/>
                       </a:solidFill>
                       <a:prstDash val="solid"/>
                     </a:lnR>
                     <a:lnT w="9525" cap="flat" cmpd="sng" algn="ctr">
                       <a:solidFill>
-                        <a:srgbClr val="7A2F00"/>
+                        <a:srgbClr val="D9C4A0"/>
                       </a:solidFill>
                       <a:prstDash val="solid"/>
                     </a:lnT>
                     <a:lnB w="9525" cap="flat" cmpd="sng" algn="ctr">
                       <a:solidFill>
-                        <a:srgbClr val="7A2F00"/>
+                        <a:srgbClr val="D9C4A0"/>
                       </a:solidFill>
                       <a:prstDash val="solid"/>
                     </a:lnB>
                     <a:solidFill>
-                      <a:srgbClr val="FFFFFF"/>
-                    </a:solidFill>
-                  </a:tcPr>
-                </a:tc>
-                <a:tc>
-                  <a:txBody>
-                    <a:bodyPr wrap="square"/>
-                    <a:lstStyle/>
-                    <a:p>
-                      <a:pPr algn="l">
-                        <a:spcAft>
-                          <a:spcPts val="0"/>
-                        </a:spcAft>
-                      </a:pPr>
-                      <a:r>
-                        <a:rPr sz="1250" b="0" i="0">
-                          <a:solidFill>
-                            <a:srgbClr val="000000"/>
-                          </a:solidFill>
-                          <a:latin typeface="Calibri"/>
-                        </a:rPr>
-                        <a:t>Server check 2.5 s typical, 5 s max</a:t>
-                      </a:r>
-                    </a:p>
-                    <a:p>
-                      <a:pPr algn="l">
-                        <a:spcAft>
-                          <a:spcPts val="0"/>
-                        </a:spcAft>
-                      </a:pPr>
-                      <a:r>
-                        <a:rPr sz="1250" b="0" i="0">
-                          <a:solidFill>
-                            <a:srgbClr val="000000"/>
-                          </a:solidFill>
-                          <a:latin typeface="Calibri"/>
-                        </a:rPr>
-                        <a:t>Whole test about 16 s (1 team member)</a:t>
-                      </a:r>
-                    </a:p>
-                  </a:txBody>
-                  <a:tcPr marL="73152" marR="73152" marT="27432" marB="27432" anchor="ctr">
-                    <a:lnL w="9525" cap="flat" cmpd="sng" algn="ctr">
-                      <a:solidFill>
-                        <a:srgbClr val="7A2F00"/>
-                      </a:solidFill>
-                      <a:prstDash val="solid"/>
-                    </a:lnL>
-                    <a:lnR w="9525" cap="flat" cmpd="sng" algn="ctr">
-                      <a:solidFill>
-                        <a:srgbClr val="7A2F00"/>
-                      </a:solidFill>
-                      <a:prstDash val="solid"/>
-                    </a:lnR>
-                    <a:lnT w="9525" cap="flat" cmpd="sng" algn="ctr">
-                      <a:solidFill>
-                        <a:srgbClr val="7A2F00"/>
-                      </a:solidFill>
-                      <a:prstDash val="solid"/>
-                    </a:lnT>
-                    <a:lnB w="9525" cap="flat" cmpd="sng" algn="ctr">
-                      <a:solidFill>
-                        <a:srgbClr val="7A2F00"/>
-                      </a:solidFill>
-                      <a:prstDash val="solid"/>
-                    </a:lnB>
-                    <a:solidFill>
-                      <a:srgbClr val="FFFFFF"/>
+                      <a:srgbClr val="E8F5E9"/>
                     </a:solidFill>
                   </a:tcPr>
                 </a:tc>
@@ -12193,14 +10763,14 @@
       </p:graphicFrame>
       <p:sp>
         <p:nvSpPr>
-          <p:cNvPr id="65" name="TextBox 64"/>
+          <p:cNvPr id="69" name="TextBox 68"/>
           <p:cNvSpPr txBox="1"/>
           <p:nvPr/>
         </p:nvSpPr>
         <p:spPr>
           <a:xfrm>
-            <a:off x="9281160" y="8229600"/>
-            <a:ext cx="5897880" cy="914400"/>
+            <a:off x="12710160" y="8092440"/>
+            <a:ext cx="2514600" cy="1280160"/>
           </a:xfrm>
           <a:prstGeom prst="rect">
             <a:avLst/>
@@ -12215,17 +10785,65 @@
           <a:p>
             <a:pPr algn="l">
               <a:spcAft>
-                <a:spcPts val="400"/>
+                <a:spcPts val="100"/>
               </a:spcAft>
             </a:pPr>
             <a:r>
-              <a:rPr sz="1250" b="0" i="1">
-                <a:solidFill>
-                  <a:srgbClr val="555555"/>
+              <a:rPr sz="1300" b="1" i="0">
+                <a:solidFill>
+                  <a:srgbClr val="7A2F00"/>
                 </a:solidFill>
                 <a:latin typeface="Calibri"/>
               </a:rPr>
-              <a:t>Kit colours are printed swatches shown on a screen, 1 phone, 1 room, our team only. 0 wrong in 14 real answers is a small test, not proof. Real kits need an FSL trial (lab prototype, TRL 4).</a:t>
+              <a:t>0 wrong answers</a:t>
+            </a:r>
+          </a:p>
+          <a:p>
+            <a:pPr algn="l">
+              <a:spcAft>
+                <a:spcPts val="100"/>
+              </a:spcAft>
+            </a:pPr>
+            <a:r>
+              <a:rPr sz="1250" b="0" i="0">
+                <a:solidFill>
+                  <a:srgbClr val="000000"/>
+                </a:solidFill>
+                <a:latin typeface="Calibri"/>
+              </a:rPr>
+              <a:t>All 9 clear scans correct</a:t>
+            </a:r>
+          </a:p>
+          <a:p>
+            <a:pPr algn="l">
+              <a:spcAft>
+                <a:spcPts val="100"/>
+              </a:spcAft>
+            </a:pPr>
+            <a:r>
+              <a:rPr sz="1250" b="0" i="0">
+                <a:solidFill>
+                  <a:srgbClr val="000000"/>
+                </a:solidFill>
+                <a:latin typeface="Calibri"/>
+              </a:rPr>
+              <a:t>All 7 trick cards said NOT SURE</a:t>
+            </a:r>
+          </a:p>
+          <a:p>
+            <a:pPr algn="l">
+              <a:spcAft>
+                <a:spcPts val="100"/>
+              </a:spcAft>
+            </a:pPr>
+            <a:r>
+              <a:rPr sz="1250" b="0" i="0">
+                <a:solidFill>
+                  <a:srgbClr val="000000"/>
+                </a:solidFill>
+                <a:latin typeface="Calibri"/>
+              </a:rPr>
+              <a:t>3 blurry photos, app asked to retake</a:t>
             </a:r>
           </a:p>
         </p:txBody>
@@ -12532,7 +11150,7 @@
         </p:nvSpPr>
         <p:spPr>
           <a:xfrm>
-            <a:off x="414105" y="5120640"/>
+            <a:off x="414105" y="6018440"/>
             <a:ext cx="8475596" cy="0"/>
           </a:xfrm>
           <a:prstGeom prst="line">
@@ -12616,59 +11234,6 @@
       </p:sp>
       <p:sp>
         <p:nvSpPr>
-          <p:cNvPr id="14" name="Freeform 14"/>
-          <p:cNvSpPr/>
-          <p:nvPr/>
-        </p:nvSpPr>
-        <p:spPr>
-          <a:xfrm>
-            <a:off x="411480" y="6172200"/>
-            <a:ext cx="3474720" cy="1947672"/>
-          </a:xfrm>
-          <a:custGeom>
-            <a:avLst/>
-            <a:gdLst/>
-            <a:ahLst/>
-            <a:cxnLst/>
-            <a:rect l="l" t="t" r="r" b="b"/>
-            <a:pathLst>
-              <a:path w="5354622" h="2987110">
-                <a:moveTo>
-                  <a:pt x="0" y="0"/>
-                </a:moveTo>
-                <a:lnTo>
-                  <a:pt x="5354622" y="0"/>
-                </a:lnTo>
-                <a:lnTo>
-                  <a:pt x="5354622" y="2987110"/>
-                </a:lnTo>
-                <a:lnTo>
-                  <a:pt x="0" y="2987110"/>
-                </a:lnTo>
-                <a:lnTo>
-                  <a:pt x="0" y="0"/>
-                </a:lnTo>
-                <a:close/>
-              </a:path>
-            </a:pathLst>
-          </a:custGeom>
-          <a:blipFill>
-            <a:blip r:embed="rId4"/>
-            <a:stretch>
-              <a:fillRect l="-22999" t="-62172" r="-21685" b="-32345"/>
-            </a:stretch>
-          </a:blipFill>
-        </p:spPr>
-        <p:txBody>
-          <a:bodyPr/>
-          <a:lstStyle/>
-          <a:p>
-            <a:endParaRPr/>
-          </a:p>
-        </p:txBody>
-      </p:sp>
-      <p:sp>
-        <p:nvSpPr>
           <p:cNvPr id="15" name="TextBox 15" descr="$PPTXTitle"/>
           <p:cNvSpPr txBox="1"/>
           <p:nvPr/>
@@ -12839,7 +11404,7 @@
         </p:nvSpPr>
         <p:spPr>
           <a:xfrm>
-            <a:off x="646791" y="5193792"/>
+            <a:off x="646791" y="6104165"/>
             <a:ext cx="4281964" cy="381000"/>
           </a:xfrm>
           <a:prstGeom prst="rect">
@@ -13954,7 +12519,7 @@
                 <a:cs typeface="Calibri"/>
                 <a:sym typeface="Calibri"/>
               </a:rPr>
-              <a:t>Own phone, ₹10 card per officer, open-source software</a:t>
+              <a:t>Existing phone, ₹10 card, open-source software</a:t>
             </a:r>
           </a:p>
         </p:txBody>
@@ -13998,7 +12563,7 @@
                 <a:cs typeface="Calibri"/>
                 <a:sym typeface="Calibri"/>
               </a:rPr>
-              <a:t>NIC cloud or state data centre in India (to confirm)</a:t>
+              <a:t>NIC or state data centre in India (to confirm)</a:t>
             </a:r>
           </a:p>
         </p:txBody>
@@ -14042,7 +12607,7 @@
                 <a:cs typeface="Calibri"/>
                 <a:sym typeface="Calibri"/>
               </a:rPr>
-              <a:t>Security update every 3 months. FSL updates kit colours</a:t>
+              <a:t>Security updates, FSL keeps kit colours right</a:t>
             </a:r>
           </a:p>
         </p:txBody>
@@ -14086,7 +12651,7 @@
                 <a:cs typeface="Calibri"/>
                 <a:sym typeface="Calibri"/>
               </a:rPr>
-              <a:t>Pilot first, then district, state and national</a:t>
+              <a:t>Pilot with police and FSL, then scale across locations</a:t>
             </a:r>
           </a:p>
         </p:txBody>
@@ -14130,7 +12695,7 @@
                 <a:cs typeface="Calibri"/>
                 <a:sym typeface="Calibri"/>
               </a:rPr>
-              <a:t>New kits from the website after FSL calibration</a:t>
+              <a:t>New test kits added through the website, no app update</a:t>
             </a:r>
           </a:p>
         </p:txBody>
@@ -14261,14 +12826,14 @@
       </p:sp>
       <p:sp>
         <p:nvSpPr>
-          <p:cNvPr id="56" name="TextBox 55"/>
+          <p:cNvPr id="54" name="TextBox 53"/>
           <p:cNvSpPr txBox="1"/>
           <p:nvPr/>
         </p:nvSpPr>
         <p:spPr>
           <a:xfrm>
-            <a:off x="12207240" y="6731026"/>
-            <a:ext cx="5715000" cy="475488"/>
+            <a:off x="3931920" y="1810512"/>
+            <a:ext cx="4937760" cy="457200"/>
           </a:xfrm>
           <a:prstGeom prst="rect">
             <a:avLst/>
@@ -14276,33 +12841,72 @@
           <a:noFill/>
         </p:spPr>
         <p:txBody>
-          <a:bodyPr wrap="square" lIns="27432" tIns="9144" rIns="27432" bIns="9144">
+          <a:bodyPr wrap="square" anchor="t" lIns="27432" rIns="27432" tIns="18288" bIns="18288">
             <a:noAutofit/>
           </a:bodyPr>
           <a:lstStyle/>
           <a:p>
-            <a:r>
-              <a:rPr sz="1200" b="1" dirty="0">
+            <a:pPr algn="l">
+              <a:spcAft>
+                <a:spcPts val="0"/>
+              </a:spcAft>
+            </a:pPr>
+            <a:r>
+              <a:rPr sz="1200" b="1" i="0">
                 <a:solidFill>
                   <a:srgbClr val="555555"/>
                 </a:solidFill>
                 <a:latin typeface="Calibri"/>
               </a:rPr>
-              <a:t>After the pilot, the cost can come from the state police or NCB IT budget. Server about ₹36,000 a year (estimate).</a:t>
-            </a:r>
-          </a:p>
-        </p:txBody>
-      </p:sp>
-      <p:sp>
-        <p:nvSpPr>
-          <p:cNvPr id="57" name="TextBox 56"/>
+              <a:t>Legal:</a:t>
+            </a:r>
+            <a:r>
+              <a:rPr sz="1200" b="0" i="0">
+                <a:solidFill>
+                  <a:srgbClr val="555555"/>
+                </a:solidFill>
+                <a:latin typeface="Calibri"/>
+              </a:rPr>
+              <a:t> first check only, the FSL lab confirms it.</a:t>
+            </a:r>
+          </a:p>
+          <a:p>
+            <a:pPr algn="l">
+              <a:spcAft>
+                <a:spcPts val="0"/>
+              </a:spcAft>
+            </a:pPr>
+            <a:r>
+              <a:rPr sz="1200" b="1" i="0">
+                <a:solidFill>
+                  <a:srgbClr val="555555"/>
+                </a:solidFill>
+                <a:latin typeface="Calibri"/>
+              </a:rPr>
+              <a:t>Privacy:</a:t>
+            </a:r>
+            <a:r>
+              <a:rPr sz="1200" b="0" i="0">
+                <a:solidFill>
+                  <a:srgbClr val="555555"/>
+                </a:solidFill>
+                <a:latin typeface="Calibri"/>
+              </a:rPr>
+              <a:t> no face, fingerprint or suspect name, only a sample code.</a:t>
+            </a:r>
+          </a:p>
+        </p:txBody>
+      </p:sp>
+      <p:sp>
+        <p:nvSpPr>
+          <p:cNvPr id="55" name="TextBox 54"/>
           <p:cNvSpPr txBox="1"/>
           <p:nvPr/>
         </p:nvSpPr>
         <p:spPr>
           <a:xfrm>
-            <a:off x="3849624" y="1810512"/>
-            <a:ext cx="4983480" cy="457200"/>
+            <a:off x="502920" y="2286000"/>
+            <a:ext cx="8321040" cy="3611880"/>
           </a:xfrm>
           <a:prstGeom prst="rect">
             <a:avLst/>
@@ -14315,53 +12919,229 @@
           </a:bodyPr>
           <a:lstStyle/>
           <a:p>
+            <a:pPr algn="l" marL="201168" indent="-201168">
+              <a:spcAft>
+                <a:spcPts val="1000"/>
+              </a:spcAft>
+              <a:buFont typeface="Arial"/>
+              <a:buChar char="•"/>
+            </a:pPr>
+            <a:r>
+              <a:rPr sz="1900" b="1" i="0">
+                <a:solidFill>
+                  <a:srgbClr val="000000"/>
+                </a:solidFill>
+                <a:latin typeface="Calibri"/>
+              </a:rPr>
+              <a:t>Technical</a:t>
+            </a:r>
+            <a:r>
+              <a:rPr sz="1900" b="0" i="0">
+                <a:solidFill>
+                  <a:srgbClr val="000000"/>
+                </a:solidFill>
+                <a:latin typeface="Calibri"/>
+              </a:rPr>
+              <a:t> - Full chain works today: app, server, database and dashboard (TRL 4).</a:t>
+            </a:r>
+          </a:p>
+          <a:p>
+            <a:pPr algn="l" marL="201168" indent="-201168">
+              <a:spcAft>
+                <a:spcPts val="1000"/>
+              </a:spcAft>
+              <a:buFont typeface="Arial"/>
+              <a:buChar char="•"/>
+            </a:pPr>
+            <a:r>
+              <a:rPr sz="1900" b="1" i="0">
+                <a:solidFill>
+                  <a:srgbClr val="000000"/>
+                </a:solidFill>
+                <a:latin typeface="Calibri"/>
+              </a:rPr>
+              <a:t>User-Friendly</a:t>
+            </a:r>
+            <a:r>
+              <a:rPr sz="1900" b="0" i="0">
+                <a:solidFill>
+                  <a:srgbClr val="000000"/>
+                </a:solidFill>
+                <a:latin typeface="Calibri"/>
+              </a:rPr>
+              <a:t> - One photo, result in about 16 s (tested by our team so far).</a:t>
+            </a:r>
+          </a:p>
+          <a:p>
+            <a:pPr algn="l" marL="201168" indent="-201168">
+              <a:spcAft>
+                <a:spcPts val="1000"/>
+              </a:spcAft>
+              <a:buFont typeface="Arial"/>
+              <a:buChar char="•"/>
+            </a:pPr>
+            <a:r>
+              <a:rPr sz="1900" b="1" i="0">
+                <a:solidFill>
+                  <a:srgbClr val="000000"/>
+                </a:solidFill>
+                <a:latin typeface="Calibri"/>
+              </a:rPr>
+              <a:t>Low Cost</a:t>
+            </a:r>
+            <a:r>
+              <a:rPr sz="1900" b="0" i="0">
+                <a:solidFill>
+                  <a:srgbClr val="000000"/>
+                </a:solidFill>
+                <a:latin typeface="Calibri"/>
+              </a:rPr>
+              <a:t> - Existing Android phone, a reusable ₹10 colour card and open-source tools.</a:t>
+            </a:r>
+          </a:p>
+          <a:p>
+            <a:pPr algn="l" marL="201168" indent="-201168">
+              <a:spcAft>
+                <a:spcPts val="1000"/>
+              </a:spcAft>
+              <a:buFont typeface="Arial"/>
+              <a:buChar char="•"/>
+            </a:pPr>
+            <a:r>
+              <a:rPr sz="1900" b="1" i="0">
+                <a:solidFill>
+                  <a:srgbClr val="000000"/>
+                </a:solidFill>
+                <a:latin typeface="Calibri"/>
+              </a:rPr>
+              <a:t>Operational</a:t>
+            </a:r>
+            <a:r>
+              <a:rPr sz="1900" b="0" i="0">
+                <a:solidFill>
+                  <a:srgbClr val="000000"/>
+                </a:solidFill>
+                <a:latin typeface="Calibri"/>
+              </a:rPr>
+              <a:t> - Simple photo-based workflow. Officer trial is part of the pilot.</a:t>
+            </a:r>
+          </a:p>
+          <a:p>
+            <a:pPr algn="l" marL="201168" indent="-201168">
+              <a:spcAft>
+                <a:spcPts val="1000"/>
+              </a:spcAft>
+              <a:buFont typeface="Arial"/>
+              <a:buChar char="•"/>
+            </a:pPr>
+            <a:r>
+              <a:rPr sz="1900" b="1" i="0">
+                <a:solidFill>
+                  <a:srgbClr val="000000"/>
+                </a:solidFill>
+                <a:latin typeface="Calibri"/>
+              </a:rPr>
+              <a:t>Scalable</a:t>
+            </a:r>
+            <a:r>
+              <a:rPr sz="1900" b="0" i="0">
+                <a:solidFill>
+                  <a:srgbClr val="000000"/>
+                </a:solidFill>
+                <a:latin typeface="Calibri"/>
+              </a:rPr>
+              <a:t> - New kit profiles from the Admin website, after FSL calibration.</a:t>
+            </a:r>
+          </a:p>
+          <a:p>
+            <a:pPr algn="l" marL="201168" indent="-201168">
+              <a:spcAft>
+                <a:spcPts val="1000"/>
+              </a:spcAft>
+              <a:buFont typeface="Arial"/>
+              <a:buChar char="•"/>
+            </a:pPr>
+            <a:r>
+              <a:rPr sz="1900" b="1" i="0">
+                <a:solidFill>
+                  <a:srgbClr val="000000"/>
+                </a:solidFill>
+                <a:latin typeface="Calibri"/>
+              </a:rPr>
+              <a:t>Sustainable</a:t>
+            </a:r>
+            <a:r>
+              <a:rPr sz="1900" b="0" i="0">
+                <a:solidFill>
+                  <a:srgbClr val="000000"/>
+                </a:solidFill>
+                <a:latin typeface="Calibri"/>
+              </a:rPr>
+              <a:t> - State police IT cell runs it, FSL keeps kit colours right (proposed).</a:t>
+            </a:r>
+          </a:p>
+        </p:txBody>
+      </p:sp>
+      <p:pic>
+        <p:nvPicPr>
+          <p:cNvPr id="56" name="Picture 55" descr="phased_189360.png"/>
+          <p:cNvPicPr>
+            <a:picLocks noChangeAspect="1"/>
+          </p:cNvPicPr>
+          <p:nvPr/>
+        </p:nvPicPr>
+        <p:blipFill>
+          <a:blip r:embed="rId6"/>
+          <a:srcRect t="14600"/>
+          <a:stretch>
+            <a:fillRect/>
+          </a:stretch>
+        </p:blipFill>
+        <p:spPr>
+          <a:xfrm>
+            <a:off x="411480" y="6903720"/>
+            <a:ext cx="3931920" cy="1446192"/>
+          </a:xfrm>
+          <a:prstGeom prst="rect">
+            <a:avLst/>
+          </a:prstGeom>
+        </p:spPr>
+      </p:pic>
+      <p:sp>
+        <p:nvSpPr>
+          <p:cNvPr id="57" name="TextBox 56"/>
+          <p:cNvSpPr txBox="1"/>
+          <p:nvPr/>
+        </p:nvSpPr>
+        <p:spPr>
+          <a:xfrm>
+            <a:off x="4526280" y="6473952"/>
+            <a:ext cx="4297680" cy="457200"/>
+          </a:xfrm>
+          <a:prstGeom prst="rect">
+            <a:avLst/>
+          </a:prstGeom>
+          <a:noFill/>
+        </p:spPr>
+        <p:txBody>
+          <a:bodyPr wrap="square" anchor="t" lIns="27432" rIns="27432" tIns="18288" bIns="18288">
+            <a:noAutofit/>
+          </a:bodyPr>
+          <a:lstStyle/>
+          <a:p>
             <a:pPr algn="l">
               <a:spcAft>
                 <a:spcPts val="0"/>
               </a:spcAft>
             </a:pPr>
             <a:r>
-              <a:rPr sz="1200" b="1" i="0">
-                <a:solidFill>
-                  <a:srgbClr val="555555"/>
+              <a:rPr sz="2000" b="1" i="0">
+                <a:solidFill>
+                  <a:srgbClr val="974826"/>
                 </a:solidFill>
                 <a:latin typeface="Calibri"/>
               </a:rPr>
-              <a:t>Legal:</a:t>
-            </a:r>
-            <a:r>
-              <a:rPr sz="1200" b="0" i="0">
-                <a:solidFill>
-                  <a:srgbClr val="555555"/>
-                </a:solidFill>
-                <a:latin typeface="Calibri"/>
-              </a:rPr>
-              <a:t> first check only, the FSL lab confirms it.</a:t>
-            </a:r>
-          </a:p>
-          <a:p>
-            <a:pPr algn="l">
-              <a:spcAft>
-                <a:spcPts val="0"/>
-              </a:spcAft>
-            </a:pPr>
-            <a:r>
-              <a:rPr sz="1200" b="1" i="0">
-                <a:solidFill>
-                  <a:srgbClr val="555555"/>
-                </a:solidFill>
-                <a:latin typeface="Calibri"/>
-              </a:rPr>
-              <a:t>Privacy:</a:t>
-            </a:r>
-            <a:r>
-              <a:rPr sz="1200" b="0" i="0">
-                <a:solidFill>
-                  <a:srgbClr val="555555"/>
-                </a:solidFill>
-                <a:latin typeface="Calibri"/>
-              </a:rPr>
-              <a:t> no face, fingerprint or suspect name, only a sample code.</a:t>
+              <a:t>Pilot Plan (proposed)</a:t>
             </a:r>
           </a:p>
         </p:txBody>
@@ -14374,8 +13154,8 @@
         </p:nvSpPr>
         <p:spPr>
           <a:xfrm>
-            <a:off x="475488" y="2286000"/>
-            <a:ext cx="8366760" cy="2743200"/>
+            <a:off x="4526280" y="6858000"/>
+            <a:ext cx="4315968" cy="2606040"/>
           </a:xfrm>
           <a:prstGeom prst="rect">
             <a:avLst/>
@@ -14390,348 +13170,151 @@
           <a:p>
             <a:pPr algn="l" marL="201168" indent="-201168">
               <a:spcAft>
-                <a:spcPts val="400"/>
+                <a:spcPts val="300"/>
               </a:spcAft>
               <a:buFont typeface="Arial"/>
               <a:buChar char="•"/>
             </a:pPr>
             <a:r>
-              <a:rPr sz="1550" b="1" i="0">
+              <a:rPr sz="1400" b="1" i="0">
                 <a:solidFill>
                   <a:srgbClr val="000000"/>
                 </a:solidFill>
                 <a:latin typeface="Calibri"/>
               </a:rPr>
-              <a:t>Technical</a:t>
-            </a:r>
-            <a:r>
-              <a:rPr sz="1550" b="0" i="0">
+              <a:t>Where</a:t>
+            </a:r>
+            <a:r>
+              <a:rPr sz="1400" b="0" i="0">
                 <a:solidFill>
                   <a:srgbClr val="000000"/>
                 </a:solidFill>
                 <a:latin typeface="Calibri"/>
               </a:rPr>
-              <a:t> - the full chain works today: phone app, server, database and dashboard (lab prototype, TRL 4).</a:t>
+              <a:t> - 1 district in Tamil Nadu, 20 officers, 3 months, nearest FSL.</a:t>
             </a:r>
           </a:p>
           <a:p>
             <a:pPr algn="l" marL="201168" indent="-201168">
               <a:spcAft>
-                <a:spcPts val="400"/>
+                <a:spcPts val="300"/>
               </a:spcAft>
               <a:buFont typeface="Arial"/>
               <a:buChar char="•"/>
             </a:pPr>
             <a:r>
-              <a:rPr sz="1550" b="1" i="0">
+              <a:rPr sz="1400" b="1" i="0">
                 <a:solidFill>
                   <a:srgbClr val="000000"/>
                 </a:solidFill>
                 <a:latin typeface="Calibri"/>
               </a:rPr>
-              <a:t>User-friendly</a:t>
-            </a:r>
-            <a:r>
-              <a:rPr sz="1550" b="0" i="0">
+              <a:t>Check 2 things apart</a:t>
+            </a:r>
+            <a:r>
+              <a:rPr sz="1400" b="0" i="0">
                 <a:solidFill>
                   <a:srgbClr val="000000"/>
                 </a:solidFill>
                 <a:latin typeface="Calibri"/>
               </a:rPr>
-              <a:t> - one photo, result in about 16 s. Tested by our team, not yet by officers.</a:t>
+              <a:t> - app vs an expert reading the same kit (target 95%+), and kit vs FSL lab.</a:t>
             </a:r>
           </a:p>
           <a:p>
             <a:pPr algn="l" marL="201168" indent="-201168">
               <a:spcAft>
-                <a:spcPts val="400"/>
+                <a:spcPts val="300"/>
               </a:spcAft>
               <a:buFont typeface="Arial"/>
               <a:buChar char="•"/>
             </a:pPr>
             <a:r>
-              <a:rPr sz="1550" b="1" i="0">
+              <a:rPr sz="1400" b="1" i="0">
                 <a:solidFill>
                   <a:srgbClr val="000000"/>
                 </a:solidFill>
                 <a:latin typeface="Calibri"/>
               </a:rPr>
-              <a:t>Low cost</a:t>
-            </a:r>
-            <a:r>
-              <a:rPr sz="1550" b="0" i="0">
+              <a:t>Size</a:t>
+            </a:r>
+            <a:r>
+              <a:rPr sz="1400" b="0" i="0">
                 <a:solidFill>
                   <a:srgbClr val="000000"/>
                 </a:solidFill>
                 <a:latin typeface="Calibri"/>
               </a:rPr>
-              <a:t> - officer's own Android phone, a ₹10 reusable card per officer and open-source software. Kits cost the same as today.</a:t>
+              <a:t> - 60+ tests per kit, so 0 wrong shows error under 5%.</a:t>
             </a:r>
           </a:p>
           <a:p>
             <a:pPr algn="l" marL="201168" indent="-201168">
               <a:spcAft>
-                <a:spcPts val="400"/>
+                <a:spcPts val="300"/>
               </a:spcAft>
               <a:buFont typeface="Arial"/>
               <a:buChar char="•"/>
             </a:pPr>
             <a:r>
-              <a:rPr sz="1550" b="1" i="0">
+              <a:rPr sz="1400" b="1" i="0">
                 <a:solidFill>
                   <a:srgbClr val="000000"/>
                 </a:solidFill>
                 <a:latin typeface="Calibri"/>
               </a:rPr>
-              <a:t>Scalable</a:t>
-            </a:r>
-            <a:r>
-              <a:rPr sz="1550" b="0" i="0">
+              <a:t>Pass if</a:t>
+            </a:r>
+            <a:r>
+              <a:rPr sz="1400" b="0" i="0">
                 <a:solidFill>
                   <a:srgbClr val="000000"/>
                 </a:solidFill>
                 <a:latin typeface="Calibri"/>
               </a:rPr>
-              <a:t> - new kits are added from the admin website, after FSL calibrates their colours with real reagent.</a:t>
+              <a:t> - NOT SURE under 10%, every record passes the QR check.</a:t>
             </a:r>
           </a:p>
           <a:p>
             <a:pPr algn="l" marL="201168" indent="-201168">
               <a:spcAft>
-                <a:spcPts val="400"/>
+                <a:spcPts val="300"/>
               </a:spcAft>
               <a:buFont typeface="Arial"/>
               <a:buChar char="•"/>
             </a:pPr>
             <a:r>
-              <a:rPr sz="1550" b="1" i="0">
+              <a:rPr sz="1400" b="1" i="0">
                 <a:solidFill>
                   <a:srgbClr val="000000"/>
                 </a:solidFill>
                 <a:latin typeface="Calibri"/>
               </a:rPr>
-              <a:t>Sustainable</a:t>
-            </a:r>
-            <a:r>
-              <a:rPr sz="1550" b="0" i="0">
+              <a:t>Cost</a:t>
+            </a:r>
+            <a:r>
+              <a:rPr sz="1400" b="0" i="0">
                 <a:solidFill>
                   <a:srgbClr val="000000"/>
                 </a:solidFill>
                 <a:latin typeface="Calibri"/>
               </a:rPr>
-              <a:t> - state police IT cell runs it, FSL keeps kit colours correct (proposed).</a:t>
-            </a:r>
-          </a:p>
-        </p:txBody>
-      </p:sp>
-      <p:sp>
-        <p:nvSpPr>
-          <p:cNvPr id="59" name="TextBox 58"/>
-          <p:cNvSpPr txBox="1"/>
-          <p:nvPr/>
-        </p:nvSpPr>
-        <p:spPr>
-          <a:xfrm>
-            <a:off x="4023360" y="5669280"/>
-            <a:ext cx="4754880" cy="457200"/>
-          </a:xfrm>
-          <a:prstGeom prst="rect">
-            <a:avLst/>
-          </a:prstGeom>
-          <a:noFill/>
-        </p:spPr>
-        <p:txBody>
-          <a:bodyPr wrap="square" anchor="t" lIns="27432" rIns="27432" tIns="18288" bIns="18288">
-            <a:noAutofit/>
-          </a:bodyPr>
-          <a:lstStyle/>
-          <a:p>
-            <a:pPr algn="l">
-              <a:spcAft>
-                <a:spcPts val="0"/>
-              </a:spcAft>
-            </a:pPr>
-            <a:r>
-              <a:rPr sz="2100" b="1" i="0">
-                <a:solidFill>
-                  <a:srgbClr val="974826"/>
-                </a:solidFill>
-                <a:latin typeface="Calibri"/>
-              </a:rPr>
-              <a:t>Pilot Plan (proposed)</a:t>
-            </a:r>
-          </a:p>
-        </p:txBody>
-      </p:sp>
-      <p:sp>
-        <p:nvSpPr>
-          <p:cNvPr id="60" name="TextBox 59"/>
-          <p:cNvSpPr txBox="1"/>
-          <p:nvPr/>
-        </p:nvSpPr>
-        <p:spPr>
-          <a:xfrm>
-            <a:off x="4023360" y="6080760"/>
-            <a:ext cx="4846320" cy="3383280"/>
-          </a:xfrm>
-          <a:prstGeom prst="rect">
-            <a:avLst/>
-          </a:prstGeom>
-          <a:noFill/>
-        </p:spPr>
-        <p:txBody>
-          <a:bodyPr wrap="square" anchor="t" lIns="27432" rIns="27432" tIns="18288" bIns="18288">
-            <a:noAutofit/>
-          </a:bodyPr>
-          <a:lstStyle/>
-          <a:p>
-            <a:pPr algn="l" marL="201168" indent="-201168">
-              <a:spcAft>
-                <a:spcPts val="400"/>
-              </a:spcAft>
-              <a:buFont typeface="Arial"/>
-              <a:buChar char="•"/>
-            </a:pPr>
-            <a:r>
-              <a:rPr sz="1400" b="1" i="0">
-                <a:solidFill>
-                  <a:srgbClr val="000000"/>
-                </a:solidFill>
-                <a:latin typeface="Calibri"/>
-              </a:rPr>
-              <a:t>Where</a:t>
-            </a:r>
-            <a:r>
-              <a:rPr sz="1400" b="0" i="0">
-                <a:solidFill>
-                  <a:srgbClr val="000000"/>
-                </a:solidFill>
-                <a:latin typeface="Calibri"/>
-              </a:rPr>
-              <a:t> - 1 district in Tamil Nadu, 20 officers, 3 months, with the nearest FSL.</a:t>
-            </a:r>
-          </a:p>
-          <a:p>
-            <a:pPr algn="l" marL="201168" indent="-201168">
-              <a:spcAft>
-                <a:spcPts val="400"/>
-              </a:spcAft>
-              <a:buFont typeface="Arial"/>
-              <a:buChar char="•"/>
-            </a:pPr>
-            <a:r>
-              <a:rPr sz="1400" b="1" i="0">
-                <a:solidFill>
-                  <a:srgbClr val="000000"/>
-                </a:solidFill>
-                <a:latin typeface="Calibri"/>
-              </a:rPr>
-              <a:t>Check 2 things apart</a:t>
-            </a:r>
-            <a:r>
-              <a:rPr sz="1400" b="0" i="0">
-                <a:solidFill>
-                  <a:srgbClr val="000000"/>
-                </a:solidFill>
-                <a:latin typeface="Calibri"/>
-              </a:rPr>
-              <a:t> - app vs an expert reading the same kit (target 95%+ same), and kit vs FSL lab (kit error, not app error).</a:t>
-            </a:r>
-          </a:p>
-          <a:p>
-            <a:pPr algn="l" marL="201168" indent="-201168">
-              <a:spcAft>
-                <a:spcPts val="400"/>
-              </a:spcAft>
-              <a:buFont typeface="Arial"/>
-              <a:buChar char="•"/>
-            </a:pPr>
-            <a:r>
-              <a:rPr sz="1400" b="1" i="0">
-                <a:solidFill>
-                  <a:srgbClr val="000000"/>
-                </a:solidFill>
-                <a:latin typeface="Calibri"/>
-              </a:rPr>
-              <a:t>Size</a:t>
-            </a:r>
-            <a:r>
-              <a:rPr sz="1400" b="0" i="0">
-                <a:solidFill>
-                  <a:srgbClr val="000000"/>
-                </a:solidFill>
-                <a:latin typeface="Calibri"/>
-              </a:rPr>
-              <a:t> - 60+ tests per kit, so 0 wrong would show error under 5%.</a:t>
-            </a:r>
-          </a:p>
-          <a:p>
-            <a:pPr algn="l" marL="201168" indent="-201168">
-              <a:spcAft>
-                <a:spcPts val="400"/>
-              </a:spcAft>
-              <a:buFont typeface="Arial"/>
-              <a:buChar char="•"/>
-            </a:pPr>
-            <a:r>
-              <a:rPr sz="1400" b="1" i="0">
-                <a:solidFill>
-                  <a:srgbClr val="000000"/>
-                </a:solidFill>
-                <a:latin typeface="Calibri"/>
-              </a:rPr>
-              <a:t>Pass if</a:t>
-            </a:r>
-            <a:r>
-              <a:rPr sz="1400" b="0" i="0">
-                <a:solidFill>
-                  <a:srgbClr val="000000"/>
-                </a:solidFill>
-                <a:latin typeface="Calibri"/>
-              </a:rPr>
-              <a:t> - NOT SURE under 10% and every record passes the QR check.</a:t>
-            </a:r>
-          </a:p>
-          <a:p>
-            <a:pPr algn="l" marL="201168" indent="-201168">
-              <a:spcAft>
-                <a:spcPts val="400"/>
-              </a:spcAft>
-              <a:buFont typeface="Arial"/>
-              <a:buChar char="•"/>
-            </a:pPr>
-            <a:r>
-              <a:rPr sz="1400" b="1" i="0">
-                <a:solidFill>
-                  <a:srgbClr val="000000"/>
-                </a:solidFill>
-                <a:latin typeface="Calibri"/>
-              </a:rPr>
-              <a:t>Cost</a:t>
-            </a:r>
-            <a:r>
-              <a:rPr sz="1400" b="0" i="0">
-                <a:solidFill>
-                  <a:srgbClr val="000000"/>
-                </a:solidFill>
-                <a:latin typeface="Calibri"/>
-              </a:rPr>
-              <a:t> - about ₹9,200 for cards and server only (estimate). Kits, phones, FSL time, training and audit are extra.</a:t>
+              <a:t> - about ₹9,200, cards and server only (estimate).</a:t>
             </a:r>
           </a:p>
         </p:txBody>
       </p:sp>
       <p:graphicFrame>
         <p:nvGraphicFramePr>
-          <p:cNvPr id="61" name="Table 60"/>
+          <p:cNvPr id="59" name="Table 58"/>
           <p:cNvGraphicFramePr>
             <a:graphicFrameLocks noGrp="1"/>
           </p:cNvGraphicFramePr>
           <p:nvPr/>
         </p:nvGraphicFramePr>
         <p:xfrm>
-          <a:off x="9235440" y="2240280"/>
-          <a:ext cx="8595360" cy="4014216"/>
+          <a:off x="9144000" y="2148840"/>
+          <a:ext cx="8001000" cy="4297680"/>
         </p:xfrm>
         <a:graphic>
           <a:graphicData uri="http://schemas.openxmlformats.org/drawingml/2006/table">
@@ -14740,11 +13323,11 @@
                 <a:tableStyleId>{5C22544A-7EE6-4342-B048-85BDC9FD1C3A}</a:tableStyleId>
               </a:tblPr>
               <a:tblGrid>
-                <a:gridCol w="2514600"/>
-                <a:gridCol w="4937760"/>
-                <a:gridCol w="1143000"/>
+                <a:gridCol w="2926080"/>
+                <a:gridCol w="4069080"/>
+                <a:gridCol w="1005840"/>
               </a:tblGrid>
-              <a:tr h="411480">
+              <a:tr h="457200">
                 <a:tc>
                   <a:txBody>
                     <a:bodyPr wrap="square"/>
@@ -14756,7 +13339,7 @@
                         </a:spcAft>
                       </a:pPr>
                       <a:r>
-                        <a:rPr sz="1500" b="1" i="0">
+                        <a:rPr sz="1600" b="1" i="0">
                           <a:solidFill>
                             <a:srgbClr val="000000"/>
                           </a:solidFill>
@@ -14807,7 +13390,7 @@
                         </a:spcAft>
                       </a:pPr>
                       <a:r>
-                        <a:rPr sz="1500" b="1" i="0">
+                        <a:rPr sz="1600" b="1" i="0">
                           <a:solidFill>
                             <a:srgbClr val="000000"/>
                           </a:solidFill>
@@ -14858,7 +13441,7 @@
                         </a:spcAft>
                       </a:pPr>
                       <a:r>
-                        <a:rPr sz="1500" b="1" i="0">
+                        <a:rPr sz="1600" b="1" i="0">
                           <a:solidFill>
                             <a:srgbClr val="000000"/>
                           </a:solidFill>
@@ -14899,7 +13482,7 @@
                   </a:tcPr>
                 </a:tc>
               </a:tr>
-              <a:tr h="384048">
+              <a:tr h="548640">
                 <a:tc>
                   <a:txBody>
                     <a:bodyPr wrap="square"/>
@@ -14917,7 +13500,7 @@
                           </a:solidFill>
                           <a:latin typeface="Calibri"/>
                         </a:rPr>
-                        <a:t>Bad light (street lamp, torch)</a:t>
+                        <a:t>Lighting can change the colour seen by the phone.</a:t>
                       </a:r>
                     </a:p>
                   </a:txBody>
@@ -14968,7 +13551,7 @@
                           </a:solidFill>
                           <a:latin typeface="Calibri"/>
                         </a:rPr>
-                        <a:t>24 known colours on the card correct the kit colour</a:t>
+                        <a:t>24 known colours on the card correct the colour before analysis.</a:t>
                       </a:r>
                     </a:p>
                   </a:txBody>
@@ -15054,7 +13637,7 @@
                   </a:tcPr>
                 </a:tc>
               </a:tr>
-              <a:tr h="566928">
+              <a:tr h="548640">
                 <a:tc>
                   <a:txBody>
                     <a:bodyPr wrap="square"/>
@@ -15072,7 +13655,7 @@
                           </a:solidFill>
                           <a:latin typeface="Calibri"/>
                         </a:rPr>
-                        <a:t>Blurry or shiny photo, card missing</a:t>
+                        <a:t>Blurry or shiny photos can make the result unclear.</a:t>
                       </a:r>
                     </a:p>
                   </a:txBody>
@@ -15123,7 +13706,7 @@
                           </a:solidFill>
                           <a:latin typeface="Calibri"/>
                         </a:rPr>
-                        <a:t>NOT SURE with the reason and a retake. Blur check on the phone too</a:t>
+                        <a:t>Detects it, says NOT SURE with the reason and asks for a retake.</a:t>
                       </a:r>
                     </a:p>
                   </a:txBody>
@@ -15209,7 +13792,7 @@
                   </a:tcPr>
                 </a:tc>
               </a:tr>
-              <a:tr h="566928">
+              <a:tr h="548640">
                 <a:tc>
                   <a:txBody>
                     <a:bodyPr wrap="square"/>
@@ -15227,7 +13810,7 @@
                           </a:solidFill>
                           <a:latin typeface="Calibri"/>
                         </a:rPr>
-                        <a:t>Colour in between two results</a:t>
+                        <a:t>Some colours may fall between two results.</a:t>
                       </a:r>
                     </a:p>
                   </a:txBody>
@@ -15278,7 +13861,7 @@
                           </a:solidFill>
                           <a:latin typeface="Calibri"/>
                         </a:rPr>
-                        <a:t>NOT SURE. Supervisor can only order a retest or confirm NOT SURE, sample goes to FSL</a:t>
+                        <a:t>Shows NOT SURE instead of guessing. Supervisor can only order a retest, sample goes to FSL.</a:t>
                       </a:r>
                     </a:p>
                   </a:txBody>
@@ -15364,7 +13947,7 @@
                   </a:tcPr>
                 </a:tc>
               </a:tr>
-              <a:tr h="566928">
+              <a:tr h="548640">
                 <a:tc>
                   <a:txBody>
                     <a:bodyPr wrap="square"/>
@@ -15382,7 +13965,7 @@
                           </a:solidFill>
                           <a:latin typeface="Calibri"/>
                         </a:rPr>
-                        <a:t>Kit colour keeps changing</a:t>
+                        <a:t>Kit colour changes with time.</a:t>
                       </a:r>
                     </a:p>
                   </a:txBody>
@@ -15433,7 +14016,7 @@
                           </a:solidFill>
                           <a:latin typeface="Calibri"/>
                         </a:rPr>
-                        <a:t>Each kit has a read time, the app timer takes the photo on time</a:t>
+                        <a:t>Each kit has a read time, the app timer takes the photo on time.</a:t>
                       </a:r>
                     </a:p>
                   </a:txBody>
@@ -15519,7 +14102,7 @@
                   </a:tcPr>
                 </a:tc>
               </a:tr>
-              <a:tr h="384048">
+              <a:tr h="548640">
                 <a:tc>
                   <a:txBody>
                     <a:bodyPr wrap="square"/>
@@ -15537,7 +14120,7 @@
                           </a:solidFill>
                           <a:latin typeface="Calibri"/>
                         </a:rPr>
-                        <a:t>Fake GPS app</a:t>
+                        <a:t>Photos or records can be edited later.</a:t>
                       </a:r>
                     </a:p>
                   </a:txBody>
@@ -15588,7 +14171,7 @@
                           </a:solidFill>
                           <a:latin typeface="Calibri"/>
                         </a:rPr>
-                        <a:t>Android mock-location flag is sealed in the record</a:t>
+                        <a:t>Photo fingerprint, signature and chain catch any change (4/4 in our test).</a:t>
                       </a:r>
                     </a:p>
                   </a:txBody>
@@ -15635,11 +14218,11 @@
                       <a:r>
                         <a:rPr sz="1300" b="1" i="0">
                           <a:solidFill>
-                            <a:srgbClr val="8A5A00"/>
+                            <a:srgbClr val="2E7D32"/>
                           </a:solidFill>
                           <a:latin typeface="Calibri"/>
                         </a:rPr>
-                        <a:t>Flag only</a:t>
+                        <a:t>Built</a:t>
                       </a:r>
                     </a:p>
                   </a:txBody>
@@ -15674,7 +14257,7 @@
                   </a:tcPr>
                 </a:tc>
               </a:tr>
-              <a:tr h="566928">
+              <a:tr h="548640">
                 <a:tc>
                   <a:txBody>
                     <a:bodyPr wrap="square"/>
@@ -15692,7 +14275,7 @@
                           </a:solidFill>
                           <a:latin typeface="Calibri"/>
                         </a:rPr>
-                        <a:t>Photo of a screen or a staged colour</a:t>
+                        <a:t>Someone photographs a screen or a staged colour.</a:t>
                       </a:r>
                     </a:p>
                   </a:txBody>
@@ -15743,7 +14326,7 @@
                           </a:solidFill>
                           <a:latin typeface="Calibri"/>
                         </a:rPr>
-                        <a:t>Screen-photo check and Play Integrity phone check</a:t>
+                        <a:t>In-app camera only today. Screen-photo check and phone integrity check next.</a:t>
                       </a:r>
                     </a:p>
                   </a:txBody>
@@ -15829,7 +14412,7 @@
                   </a:tcPr>
                 </a:tc>
               </a:tr>
-              <a:tr h="566928">
+              <a:tr h="548640">
                 <a:tc>
                   <a:txBody>
                     <a:bodyPr wrap="square"/>
@@ -15847,7 +14430,7 @@
                           </a:solidFill>
                           <a:latin typeface="Calibri"/>
                         </a:rPr>
-                        <a:t>Someone with the server key rewrites records</a:t>
+                        <a:t>Different kits and phones show colours differently.</a:t>
                       </a:r>
                     </a:p>
                   </a:txBody>
@@ -15898,7 +14481,7 @@
                           </a:solidFill>
                           <a:latin typeface="Calibri"/>
                         </a:rPr>
-                        <a:t>Changes by others are caught. Next: key in a hardware box (HSM), chain copy kept outside</a:t>
+                        <a:t>Kit colour settings and colour fixed in every photo. Real kits need FSL calibration.</a:t>
                       </a:r>
                     </a:p>
                   </a:txBody>
@@ -15945,11 +14528,11 @@
                       <a:r>
                         <a:rPr sz="1300" b="1" i="0">
                           <a:solidFill>
-                            <a:srgbClr val="8A5A00"/>
+                            <a:srgbClr val="2E7D32"/>
                           </a:solidFill>
                           <a:latin typeface="Calibri"/>
                         </a:rPr>
-                        <a:t>Planned</a:t>
+                        <a:t>Built</a:t>
                       </a:r>
                     </a:p>
                   </a:txBody>
@@ -15988,6 +14571,54 @@
           </a:graphicData>
         </a:graphic>
       </p:graphicFrame>
+      <p:sp>
+        <p:nvSpPr>
+          <p:cNvPr id="60" name="TextBox 59"/>
+          <p:cNvSpPr txBox="1"/>
+          <p:nvPr/>
+        </p:nvSpPr>
+        <p:spPr>
+          <a:xfrm>
+            <a:off x="12207240" y="6784848"/>
+            <a:ext cx="5715000" cy="457200"/>
+          </a:xfrm>
+          <a:prstGeom prst="rect">
+            <a:avLst/>
+          </a:prstGeom>
+          <a:noFill/>
+        </p:spPr>
+        <p:txBody>
+          <a:bodyPr wrap="square" anchor="t" lIns="27432" rIns="27432" tIns="18288" bIns="18288">
+            <a:noAutofit/>
+          </a:bodyPr>
+          <a:lstStyle/>
+          <a:p>
+            <a:pPr algn="l">
+              <a:spcAft>
+                <a:spcPts val="0"/>
+              </a:spcAft>
+            </a:pPr>
+            <a:r>
+              <a:rPr sz="1200" b="1" i="0">
+                <a:solidFill>
+                  <a:srgbClr val="555555"/>
+                </a:solidFill>
+                <a:latin typeface="Calibri"/>
+              </a:rPr>
+              <a:t>After the pilot</a:t>
+            </a:r>
+            <a:r>
+              <a:rPr sz="1200" b="0" i="0">
+                <a:solidFill>
+                  <a:srgbClr val="555555"/>
+                </a:solidFill>
+                <a:latin typeface="Calibri"/>
+              </a:rPr>
+              <a:t>, the cost can come from the state police or NCB IT budget. Server about ₹36,000 a year (estimate).</a:t>
+            </a:r>
+          </a:p>
+        </p:txBody>
+      </p:sp>
     </p:spTree>
   </p:cSld>
   <p:clrMapOvr>
@@ -16360,137 +14991,6 @@
           </a:p>
         </p:txBody>
       </p:sp>
-      <p:grpSp>
-        <p:nvGrpSpPr>
-          <p:cNvPr id="11" name="Group 11"/>
-          <p:cNvGrpSpPr/>
-          <p:nvPr/>
-        </p:nvGrpSpPr>
-        <p:grpSpPr>
-          <a:xfrm>
-            <a:off x="10649712" y="7644185"/>
-            <a:ext cx="6735059" cy="1810710"/>
-            <a:chOff x="0" y="0"/>
-            <a:chExt cx="133928377" cy="65512658"/>
-          </a:xfrm>
-        </p:grpSpPr>
-        <p:sp>
-          <p:nvSpPr>
-            <p:cNvPr id="12" name="Freeform 12"/>
-            <p:cNvSpPr/>
-            <p:nvPr/>
-          </p:nvSpPr>
-          <p:spPr>
-            <a:xfrm>
-              <a:off x="0" y="0"/>
-              <a:ext cx="133928383" cy="65512659"/>
-            </a:xfrm>
-            <a:custGeom>
-              <a:avLst/>
-              <a:gdLst/>
-              <a:ahLst/>
-              <a:cxnLst/>
-              <a:rect l="l" t="t" r="r" b="b"/>
-              <a:pathLst>
-                <a:path w="133928383" h="65512659">
-                  <a:moveTo>
-                    <a:pt x="11495" y="0"/>
-                  </a:moveTo>
-                  <a:lnTo>
-                    <a:pt x="133916886" y="0"/>
-                  </a:lnTo>
-                  <a:cubicBezTo>
-                    <a:pt x="133919937" y="0"/>
-                    <a:pt x="133922864" y="1211"/>
-                    <a:pt x="133925022" y="3367"/>
-                  </a:cubicBezTo>
-                  <a:cubicBezTo>
-                    <a:pt x="133927168" y="5523"/>
-                    <a:pt x="133928383" y="8446"/>
-                    <a:pt x="133928383" y="11495"/>
-                  </a:cubicBezTo>
-                  <a:lnTo>
-                    <a:pt x="133928383" y="65501162"/>
-                  </a:lnTo>
-                  <a:cubicBezTo>
-                    <a:pt x="133928383" y="65507512"/>
-                    <a:pt x="133923236" y="65512659"/>
-                    <a:pt x="133916886" y="65512659"/>
-                  </a:cubicBezTo>
-                  <a:lnTo>
-                    <a:pt x="11495" y="65512659"/>
-                  </a:lnTo>
-                  <a:cubicBezTo>
-                    <a:pt x="8446" y="65512659"/>
-                    <a:pt x="5523" y="65511449"/>
-                    <a:pt x="3367" y="65509291"/>
-                  </a:cubicBezTo>
-                  <a:cubicBezTo>
-                    <a:pt x="1211" y="65507133"/>
-                    <a:pt x="0" y="65504213"/>
-                    <a:pt x="0" y="65501162"/>
-                  </a:cubicBezTo>
-                  <a:lnTo>
-                    <a:pt x="0" y="11495"/>
-                  </a:lnTo>
-                  <a:cubicBezTo>
-                    <a:pt x="0" y="8446"/>
-                    <a:pt x="1211" y="5523"/>
-                    <a:pt x="3367" y="3367"/>
-                  </a:cubicBezTo>
-                  <a:cubicBezTo>
-                    <a:pt x="5523" y="1211"/>
-                    <a:pt x="8446" y="0"/>
-                    <a:pt x="11495" y="0"/>
-                  </a:cubicBezTo>
-                  <a:close/>
-                </a:path>
-              </a:pathLst>
-            </a:custGeom>
-            <a:solidFill>
-              <a:srgbClr val="FFFFFF"/>
-            </a:solidFill>
-            <a:ln w="38100" cap="sq">
-              <a:solidFill>
-                <a:srgbClr val="7A2F00"/>
-              </a:solidFill>
-              <a:prstDash val="solid"/>
-              <a:miter/>
-            </a:ln>
-          </p:spPr>
-        </p:sp>
-        <p:sp>
-          <p:nvSpPr>
-            <p:cNvPr id="13" name="TextBox 13"/>
-            <p:cNvSpPr txBox="1"/>
-            <p:nvPr/>
-          </p:nvSpPr>
-          <p:spPr>
-            <a:xfrm>
-              <a:off x="0" y="-76200"/>
-              <a:ext cx="133928377" cy="65588858"/>
-            </a:xfrm>
-            <a:prstGeom prst="rect">
-              <a:avLst/>
-            </a:prstGeom>
-          </p:spPr>
-          <p:txBody>
-            <a:bodyPr lIns="50800" tIns="50800" rIns="50800" bIns="50800" rtlCol="0" anchor="ctr"/>
-            <a:lstStyle/>
-            <a:p>
-              <a:pPr algn="ctr">
-                <a:lnSpc>
-                  <a:spcPts val="5320"/>
-                </a:lnSpc>
-                <a:spcBef>
-                  <a:spcPct val="0"/>
-                </a:spcBef>
-              </a:pPr>
-              <a:endParaRPr/>
-            </a:p>
-          </p:txBody>
-        </p:sp>
-      </p:grpSp>
       <p:sp>
         <p:nvSpPr>
           <p:cNvPr id="14" name="AutoShape 14"/>
@@ -16833,112 +15333,6 @@
       </p:sp>
       <p:sp>
         <p:nvSpPr>
-          <p:cNvPr id="22" name="TextBox 22"/>
-          <p:cNvSpPr txBox="1"/>
-          <p:nvPr/>
-        </p:nvSpPr>
-        <p:spPr>
-          <a:xfrm>
-            <a:off x="10695384" y="8046521"/>
-            <a:ext cx="6537960" cy="2745720"/>
-          </a:xfrm>
-          <a:prstGeom prst="rect">
-            <a:avLst/>
-          </a:prstGeom>
-        </p:spPr>
-        <p:txBody>
-          <a:bodyPr lIns="0" tIns="0" rIns="0" bIns="0" rtlCol="0" anchor="t">
-            <a:spAutoFit/>
-          </a:bodyPr>
-          <a:lstStyle/>
-          <a:p>
-            <a:pPr marL="376968" lvl="1" indent="-188484" algn="l">
-              <a:lnSpc>
-                <a:spcPct val="105000"/>
-              </a:lnSpc>
-              <a:buFont typeface="Arial"/>
-              <a:buChar char="•"/>
-            </a:pPr>
-            <a:r>
-              <a:rPr lang="en-US" sz="1500" spc="-8">
-                <a:solidFill>
-                  <a:srgbClr val="000000"/>
-                </a:solidFill>
-                <a:latin typeface="Calibri"/>
-                <a:ea typeface="Calibri"/>
-                <a:cs typeface="Calibri"/>
-                <a:sym typeface="Calibri"/>
-              </a:rPr>
-              <a:t>Month 1-2 - offline mode and phone security chip signing, built together.</a:t>
-            </a:r>
-          </a:p>
-          <a:p>
-            <a:pPr marL="376968" lvl="1" indent="-188484" algn="l">
-              <a:lnSpc>
-                <a:spcPct val="105000"/>
-              </a:lnSpc>
-              <a:buFont typeface="Arial"/>
-              <a:buChar char="•"/>
-            </a:pPr>
-            <a:r>
-              <a:rPr lang="en-US" sz="1500" spc="-8">
-                <a:solidFill>
-                  <a:srgbClr val="000000"/>
-                </a:solidFill>
-                <a:latin typeface="Calibri"/>
-                <a:ea typeface="Calibri"/>
-                <a:cs typeface="Calibri"/>
-                <a:sym typeface="Calibri"/>
-              </a:rPr>
-              <a:t>Next - FSL trial with real kits, paper card on 3+ phones, officer testing.</a:t>
-            </a:r>
-          </a:p>
-          <a:p>
-            <a:pPr marL="376968" lvl="1" indent="-188484" algn="l">
-              <a:lnSpc>
-                <a:spcPct val="105000"/>
-              </a:lnSpc>
-              <a:buFont typeface="Arial"/>
-              <a:buChar char="•"/>
-            </a:pPr>
-            <a:r>
-              <a:rPr lang="en-US" sz="1500" spc="-8">
-                <a:solidFill>
-                  <a:srgbClr val="000000"/>
-                </a:solidFill>
-                <a:latin typeface="Calibri"/>
-                <a:ea typeface="Calibri"/>
-                <a:cs typeface="Calibri"/>
-                <a:sym typeface="Calibri"/>
-              </a:rPr>
-              <a:t>Month 3 - screen-photo check, Play Integrity, Hindi and voice (Tamil done).</a:t>
-            </a:r>
-          </a:p>
-          <a:p>
-            <a:pPr marL="376968" lvl="1" indent="-188484" algn="l">
-              <a:lnSpc>
-                <a:spcPct val="105000"/>
-              </a:lnSpc>
-              <a:buFont typeface="Arial"/>
-              <a:buChar char="•"/>
-            </a:pPr>
-            <a:r>
-              <a:rPr lang="en-US" sz="1500" spc="-8">
-                <a:solidFill>
-                  <a:srgbClr val="000000"/>
-                </a:solidFill>
-                <a:latin typeface="Calibri"/>
-                <a:ea typeface="Calibri"/>
-                <a:cs typeface="Calibri"/>
-                <a:sym typeface="Calibri"/>
-              </a:rPr>
-              <a:t>After pilot - apply to NIC or MHA for e-Sakshya and CCTNS (not contacted yet).</a:t>
-            </a:r>
-          </a:p>
-        </p:txBody>
-      </p:sp>
-      <p:sp>
-        <p:nvSpPr>
           <p:cNvPr id="23" name="TextBox 23" descr="$PPTXTitle"/>
           <p:cNvSpPr txBox="1"/>
           <p:nvPr/>
@@ -17037,7 +15431,7 @@
                 <a:cs typeface="Calibri"/>
                 <a:sym typeface="Calibri"/>
               </a:rPr>
-              <a:t>NOT SURE instead of a guess</a:t>
+              <a:t>Less manual colour checking</a:t>
             </a:r>
           </a:p>
           <a:p>
@@ -17058,7 +15452,7 @@
                 <a:cs typeface="Calibri"/>
                 <a:sym typeface="Calibri"/>
               </a:rPr>
-              <a:t>Result in about 16 s</a:t>
+              <a:t>NOT SURE when unclear</a:t>
             </a:r>
           </a:p>
           <a:p>
@@ -17079,7 +15473,7 @@
                 <a:cs typeface="Calibri"/>
                 <a:sym typeface="Calibri"/>
               </a:rPr>
-              <a:t>Record made automatically</a:t>
+              <a:t>Easy digital test records</a:t>
             </a:r>
           </a:p>
           <a:p>
@@ -17100,7 +15494,7 @@
                 <a:cs typeface="Calibri"/>
                 <a:sym typeface="Calibri"/>
               </a:rPr>
-              <a:t>Works in Tamil</a:t>
+              <a:t>Quick access to past test records</a:t>
             </a:r>
           </a:p>
         </p:txBody>
@@ -17143,7 +15537,7 @@
                 <a:cs typeface="Calibri"/>
                 <a:sym typeface="Calibri"/>
               </a:rPr>
-              <a:t>Time, place, officer and photo for every test</a:t>
+              <a:t>Proof of every test: time, place, officer &amp; photo</a:t>
             </a:r>
           </a:p>
           <a:p>
@@ -17206,7 +15600,7 @@
                 <a:cs typeface="Calibri"/>
                 <a:sym typeface="Calibri"/>
               </a:rPr>
-              <a:t>Search, map and CSV export</a:t>
+              <a:t>Easy search, map and CSV export</a:t>
             </a:r>
           </a:p>
           <a:p>
@@ -17227,7 +15621,7 @@
                 <a:cs typeface="Calibri"/>
                 <a:sym typeface="Calibri"/>
               </a:rPr>
-              <a:t>NOT SURE tests go to supervisor review</a:t>
+              <a:t>All test data in one system</a:t>
             </a:r>
           </a:p>
         </p:txBody>
@@ -17240,8 +15634,8 @@
         </p:nvSpPr>
         <p:spPr>
           <a:xfrm>
-            <a:off x="1774430" y="2079685"/>
-            <a:ext cx="1919520" cy="342900"/>
+            <a:off x="1188720" y="2079685"/>
+            <a:ext cx="2926080" cy="342900"/>
           </a:xfrm>
           <a:prstGeom prst="rect">
             <a:avLst/>
@@ -17271,7 +15665,7 @@
                 <a:cs typeface="Calibri"/>
                 <a:sym typeface="Calibri"/>
               </a:rPr>
-              <a:t>Officer Benefits</a:t>
+              <a:t>Inspector Benefits</a:t>
             </a:r>
           </a:p>
         </p:txBody>
@@ -17322,50 +15716,6 @@
       </p:sp>
       <p:sp>
         <p:nvSpPr>
-          <p:cNvPr id="28" name="TextBox 28"/>
-          <p:cNvSpPr txBox="1"/>
-          <p:nvPr/>
-        </p:nvSpPr>
-        <p:spPr>
-          <a:xfrm>
-            <a:off x="10830810" y="7680761"/>
-            <a:ext cx="5029200" cy="371475"/>
-          </a:xfrm>
-          <a:prstGeom prst="rect">
-            <a:avLst/>
-          </a:prstGeom>
-        </p:spPr>
-        <p:txBody>
-          <a:bodyPr lIns="0" tIns="0" rIns="0" bIns="0" rtlCol="0" anchor="t" wrap="none">
-            <a:noAutofit/>
-          </a:bodyPr>
-          <a:lstStyle/>
-          <a:p>
-            <a:pPr algn="l">
-              <a:lnSpc>
-                <a:spcPts val="2608"/>
-              </a:lnSpc>
-              <a:spcBef>
-                <a:spcPct val="0"/>
-              </a:spcBef>
-            </a:pPr>
-            <a:r>
-              <a:rPr lang="en-US" sz="2173" b="1" spc="-24">
-                <a:solidFill>
-                  <a:srgbClr val="974826"/>
-                </a:solidFill>
-                <a:latin typeface="Calibri"/>
-                <a:ea typeface="Calibri"/>
-                <a:cs typeface="Calibri"/>
-                <a:sym typeface="Calibri"/>
-              </a:rPr>
-              <a:t>Future Scope (our plan after SIH)</a:t>
-            </a:r>
-          </a:p>
-        </p:txBody>
-      </p:sp>
-      <p:sp>
-        <p:nvSpPr>
           <p:cNvPr id="29" name="TextBox 29"/>
           <p:cNvSpPr txBox="1"/>
           <p:nvPr/>
@@ -17454,170 +15804,14 @@
       </p:sp>
       <p:sp>
         <p:nvSpPr>
-          <p:cNvPr id="31" name="TextBox 31"/>
+          <p:cNvPr id="31" name="TextBox 30"/>
           <p:cNvSpPr txBox="1"/>
           <p:nvPr/>
         </p:nvSpPr>
         <p:spPr>
           <a:xfrm>
-            <a:off x="11372088" y="1975104"/>
-            <a:ext cx="2004464" cy="295275"/>
-          </a:xfrm>
-          <a:prstGeom prst="rect">
-            <a:avLst/>
-          </a:prstGeom>
-        </p:spPr>
-        <p:txBody>
-          <a:bodyPr lIns="0" tIns="0" rIns="0" bIns="0" rtlCol="0" anchor="t">
-            <a:spAutoFit/>
-          </a:bodyPr>
-          <a:lstStyle/>
-          <a:p>
-            <a:pPr algn="l">
-              <a:lnSpc>
-                <a:spcPts val="2040"/>
-              </a:lnSpc>
-              <a:spcBef>
-                <a:spcPct val="0"/>
-              </a:spcBef>
-            </a:pPr>
-            <a:r>
-              <a:rPr lang="en-US" sz="1700" spc="-18">
-                <a:solidFill>
-                  <a:srgbClr val="000000"/>
-                </a:solidFill>
-                <a:latin typeface="Calibri"/>
-                <a:ea typeface="Calibri"/>
-                <a:cs typeface="Calibri"/>
-                <a:sym typeface="Calibri"/>
-              </a:rPr>
-              <a:t>Geo-Tagged test result</a:t>
-            </a:r>
-          </a:p>
-        </p:txBody>
-      </p:sp>
-      <p:sp>
-        <p:nvSpPr>
-          <p:cNvPr id="32" name="TextBox 29"/>
-          <p:cNvSpPr txBox="1"/>
-          <p:nvPr/>
-        </p:nvSpPr>
-        <p:spPr>
-          <a:xfrm>
-            <a:off x="10649712" y="4750199"/>
-            <a:ext cx="1828800" cy="365760"/>
-          </a:xfrm>
-          <a:prstGeom prst="rect">
-            <a:avLst/>
-          </a:prstGeom>
-        </p:spPr>
-        <p:txBody>
-          <a:bodyPr wrap="none" lIns="0" tIns="0" rIns="0" bIns="0" rtlCol="0" anchor="t">
-            <a:noAutofit/>
-          </a:bodyPr>
-          <a:lstStyle/>
-          <a:p>
-            <a:pPr algn="ctr">
-              <a:lnSpc>
-                <a:spcPts val="2471"/>
-              </a:lnSpc>
-              <a:spcBef>
-                <a:spcPct val="0"/>
-              </a:spcBef>
-            </a:pPr>
-            <a:r>
-              <a:rPr lang="en-US" sz="2059" b="1" spc="-22">
-                <a:solidFill>
-                  <a:srgbClr val="974826"/>
-                </a:solidFill>
-                <a:latin typeface="Calibri"/>
-                <a:ea typeface="Calibri"/>
-                <a:cs typeface="Calibri"/>
-                <a:sym typeface="Calibri"/>
-              </a:rPr>
-              <a:t>Tamper Test -</a:t>
-            </a:r>
-          </a:p>
-        </p:txBody>
-      </p:sp>
-      <p:sp>
-        <p:nvSpPr>
-          <p:cNvPr id="33" name="TextBox 31"/>
-          <p:cNvSpPr txBox="1"/>
-          <p:nvPr/>
-        </p:nvSpPr>
-        <p:spPr>
-          <a:xfrm>
-            <a:off x="12368784" y="4786775"/>
-            <a:ext cx="4937760" cy="310896"/>
-          </a:xfrm>
-          <a:prstGeom prst="rect">
-            <a:avLst/>
-          </a:prstGeom>
-        </p:spPr>
-        <p:txBody>
-          <a:bodyPr wrap="none" lIns="0" tIns="0" rIns="0" bIns="0" rtlCol="0" anchor="t">
-            <a:noAutofit/>
-          </a:bodyPr>
-          <a:lstStyle/>
-          <a:p>
-            <a:pPr algn="l">
-              <a:lnSpc>
-                <a:spcPts val="2040"/>
-              </a:lnSpc>
-              <a:spcBef>
-                <a:spcPct val="0"/>
-              </a:spcBef>
-            </a:pPr>
-            <a:r>
-              <a:rPr lang="en-US" sz="1700" spc="-18">
-                <a:solidFill>
-                  <a:srgbClr val="000000"/>
-                </a:solidFill>
-                <a:latin typeface="Calibri"/>
-                <a:ea typeface="Calibri"/>
-                <a:cs typeface="Calibri"/>
-                <a:sym typeface="Calibri"/>
-              </a:rPr>
-              <a:t>we tried it on our saved records</a:t>
-            </a:r>
-          </a:p>
-        </p:txBody>
-      </p:sp>
-      <p:pic>
-        <p:nvPicPr>
-          <p:cNvPr id="34" name="Tamper proof" descr="tamper_proof_tall.png"/>
-          <p:cNvPicPr>
-            <a:picLocks noChangeAspect="1"/>
-          </p:cNvPicPr>
-          <p:nvPr/>
-        </p:nvPicPr>
-        <p:blipFill>
-          <a:blip r:embed="rId10"/>
-          <a:stretch>
-            <a:fillRect/>
-          </a:stretch>
-        </p:blipFill>
-        <p:spPr>
-          <a:xfrm>
-            <a:off x="10649712" y="5115959"/>
-            <a:ext cx="6735059" cy="2418498"/>
-          </a:xfrm>
-          <a:prstGeom prst="rect">
-            <a:avLst/>
-          </a:prstGeom>
-        </p:spPr>
-      </p:pic>
-      <p:sp>
-        <p:nvSpPr>
-          <p:cNvPr id="35" name="TextBox 34"/>
-          <p:cNvSpPr txBox="1"/>
-          <p:nvPr/>
-        </p:nvSpPr>
-        <p:spPr>
-          <a:xfrm>
-            <a:off x="10649712" y="4331265"/>
-            <a:ext cx="6735059" cy="402336"/>
+            <a:off x="4434840" y="4480560"/>
+            <a:ext cx="5577840" cy="384048"/>
           </a:xfrm>
           <a:prstGeom prst="rect">
             <a:avLst/>
@@ -17625,31 +15819,144 @@
           <a:noFill/>
         </p:spPr>
         <p:txBody>
-          <a:bodyPr wrap="square" lIns="27432" rIns="27432" tIns="0" bIns="0">
+          <a:bodyPr wrap="square" anchor="t" lIns="27432" rIns="27432" tIns="18288" bIns="18288">
             <a:noAutofit/>
           </a:bodyPr>
           <a:lstStyle/>
           <a:p>
-            <a:r>
-              <a:rPr sz="1300" b="1">
-                <a:solidFill>
-                  <a:srgbClr val="792E00"/>
+            <a:pPr algn="l">
+              <a:spcAft>
+                <a:spcPts val="0"/>
+              </a:spcAft>
+            </a:pPr>
+            <a:r>
+              <a:rPr sz="1200" b="0" i="0">
+                <a:solidFill>
+                  <a:srgbClr val="555555"/>
                 </a:solidFill>
                 <a:latin typeface="Calibri"/>
               </a:rPr>
-              <a:t>Court Certificate: </a:t>
-            </a:r>
-            <a:r>
-              <a:rPr sz="1300" b="0">
+              <a:t>Judges can scan it on their own phone. For the demo the QR opens a public HTTPS check page (verify only, nothing else is open).</a:t>
+            </a:r>
+          </a:p>
+        </p:txBody>
+      </p:sp>
+      <p:sp>
+        <p:nvSpPr>
+          <p:cNvPr id="32" name="TextBox 31"/>
+          <p:cNvSpPr txBox="1"/>
+          <p:nvPr/>
+        </p:nvSpPr>
+        <p:spPr>
+          <a:xfrm>
+            <a:off x="11375136" y="1956816"/>
+            <a:ext cx="6035040" cy="310896"/>
+          </a:xfrm>
+          <a:prstGeom prst="rect">
+            <a:avLst/>
+          </a:prstGeom>
+          <a:noFill/>
+        </p:spPr>
+        <p:txBody>
+          <a:bodyPr wrap="square" anchor="t" lIns="27432" rIns="27432" tIns="18288" bIns="18288">
+            <a:noAutofit/>
+          </a:bodyPr>
+          <a:lstStyle/>
+          <a:p>
+            <a:pPr algn="l">
+              <a:spcAft>
+                <a:spcPts val="0"/>
+              </a:spcAft>
+            </a:pPr>
+            <a:r>
+              <a:rPr sz="1700" b="0" i="0">
                 <a:solidFill>
                   <a:srgbClr val="000000"/>
                 </a:solidFill>
                 <a:latin typeface="Calibri"/>
               </a:rPr>
-              <a:t>every PDF report now has a filled BSA section 63 page (photo hash, phone, time, GPS) for the officer and expert to sign. </a:t>
-            </a:r>
-            <a:r>
-              <a:rPr sz="1300" b="0" u="sng">
+              <a:t>Admin can monitor area-wise test results on the map.</a:t>
+            </a:r>
+          </a:p>
+        </p:txBody>
+      </p:sp>
+      <p:sp>
+        <p:nvSpPr>
+          <p:cNvPr id="33" name="TextBox 32"/>
+          <p:cNvSpPr txBox="1"/>
+          <p:nvPr/>
+        </p:nvSpPr>
+        <p:spPr>
+          <a:xfrm>
+            <a:off x="10625328" y="4334256"/>
+            <a:ext cx="6766560" cy="457200"/>
+          </a:xfrm>
+          <a:prstGeom prst="rect">
+            <a:avLst/>
+          </a:prstGeom>
+          <a:noFill/>
+        </p:spPr>
+        <p:txBody>
+          <a:bodyPr wrap="square" anchor="t" lIns="27432" rIns="27432" tIns="18288" bIns="18288">
+            <a:noAutofit/>
+          </a:bodyPr>
+          <a:lstStyle/>
+          <a:p>
+            <a:pPr algn="l">
+              <a:spcAft>
+                <a:spcPts val="0"/>
+              </a:spcAft>
+            </a:pPr>
+            <a:r>
+              <a:rPr sz="1800" b="1" i="0">
+                <a:solidFill>
+                  <a:srgbClr val="974826"/>
+                </a:solidFill>
+                <a:latin typeface="Calibri"/>
+              </a:rPr>
+              <a:t>Evidence Report</a:t>
+            </a:r>
+          </a:p>
+        </p:txBody>
+      </p:sp>
+      <p:sp>
+        <p:nvSpPr>
+          <p:cNvPr id="34" name="TextBox 33"/>
+          <p:cNvSpPr txBox="1"/>
+          <p:nvPr/>
+        </p:nvSpPr>
+        <p:spPr>
+          <a:xfrm>
+            <a:off x="10625328" y="4681728"/>
+            <a:ext cx="6812280" cy="603504"/>
+          </a:xfrm>
+          <a:prstGeom prst="rect">
+            <a:avLst/>
+          </a:prstGeom>
+          <a:noFill/>
+        </p:spPr>
+        <p:txBody>
+          <a:bodyPr wrap="square" anchor="t" lIns="27432" rIns="27432" tIns="18288" bIns="18288">
+            <a:noAutofit/>
+          </a:bodyPr>
+          <a:lstStyle/>
+          <a:p>
+            <a:pPr algn="l">
+              <a:spcAft>
+                <a:spcPts val="0"/>
+              </a:spcAft>
+            </a:pPr>
+            <a:r>
+              <a:rPr sz="1400" b="0" i="0">
+                <a:solidFill>
+                  <a:srgbClr val="000000"/>
+                </a:solidFill>
+                <a:latin typeface="Calibri"/>
+              </a:rPr>
+              <a:t>Every PDF report has a filled BSA section 63 page (photo hash, phone, time, GPS) for the officer and expert to sign. </a:t>
+            </a:r>
+            <a:r>
+              <a:rPr sz="1400" u="sng">
                 <a:solidFill>
                   <a:srgbClr val="0563C1"/>
                 </a:solidFill>
@@ -17663,7 +15970,7 @@
       </p:sp>
       <p:sp>
         <p:nvSpPr>
-          <p:cNvPr id="36" name="Sample report link area">
+          <p:cNvPr id="35" name="Sample report link area">
             <a:hlinkClick r:id="rId11"/>
           </p:cNvPr>
           <p:cNvSpPr/>
@@ -17671,8 +15978,8 @@
         </p:nvSpPr>
         <p:spPr>
           <a:xfrm>
-            <a:off x="10649712" y="4331265"/>
-            <a:ext cx="6735059" cy="402336"/>
+            <a:off x="10625328" y="4681728"/>
+            <a:ext cx="6812280" cy="603504"/>
           </a:xfrm>
           <a:prstGeom prst="rect">
             <a:avLst/>
@@ -17685,6 +15992,7 @@
           <a:ln>
             <a:noFill/>
           </a:ln>
+          <a:effectLst/>
         </p:spPr>
         <p:style>
           <a:lnRef idx="1">
@@ -17710,14 +16018,60 @@
       </p:sp>
       <p:sp>
         <p:nvSpPr>
+          <p:cNvPr id="36" name="Rounded Rectangle 35"/>
+          <p:cNvSpPr/>
+          <p:nvPr/>
+        </p:nvSpPr>
+        <p:spPr>
+          <a:xfrm>
+            <a:off x="10561320" y="5486400"/>
+            <a:ext cx="6812280" cy="2788920"/>
+          </a:xfrm>
+          <a:prstGeom prst="roundRect">
+            <a:avLst>
+              <a:gd name="adj" fmla="val 4000"/>
+            </a:avLst>
+          </a:prstGeom>
+          <a:noFill/>
+          <a:ln w="28575">
+            <a:solidFill>
+              <a:srgbClr val="7A2F00"/>
+            </a:solidFill>
+          </a:ln>
+          <a:effectLst/>
+        </p:spPr>
+        <p:style>
+          <a:lnRef idx="1">
+            <a:schemeClr val="accent1"/>
+          </a:lnRef>
+          <a:fillRef idx="3">
+            <a:schemeClr val="accent1"/>
+          </a:fillRef>
+          <a:effectRef idx="2">
+            <a:schemeClr val="accent1"/>
+          </a:effectRef>
+          <a:fontRef idx="minor">
+            <a:schemeClr val="lt1"/>
+          </a:fontRef>
+        </p:style>
+        <p:txBody>
+          <a:bodyPr rtlCol="0" anchor="ctr"/>
+          <a:lstStyle/>
+          <a:p>
+            <a:pPr algn="ctr"/>
+          </a:p>
+        </p:txBody>
+      </p:sp>
+      <p:sp>
+        <p:nvSpPr>
           <p:cNvPr id="37" name="TextBox 36"/>
           <p:cNvSpPr txBox="1"/>
           <p:nvPr/>
         </p:nvSpPr>
         <p:spPr>
           <a:xfrm>
-            <a:off x="4434840" y="4480560"/>
-            <a:ext cx="5577840" cy="384048"/>
+            <a:off x="10744200" y="5559552"/>
+            <a:ext cx="6400800" cy="457200"/>
           </a:xfrm>
           <a:prstGeom prst="rect">
             <a:avLst/>
@@ -17736,13 +16090,265 @@
               </a:spcAft>
             </a:pPr>
             <a:r>
-              <a:rPr sz="1200" b="0" i="0">
-                <a:solidFill>
-                  <a:srgbClr val="555555"/>
+              <a:rPr sz="2150" b="1" i="0">
+                <a:solidFill>
+                  <a:srgbClr val="974826"/>
                 </a:solidFill>
                 <a:latin typeface="Calibri"/>
               </a:rPr>
-              <a:t>Judges can scan it on their own phone. For the demo the QR opens a public HTTPS check page (verify only, nothing else is open).</a:t>
+              <a:t>Future Scope</a:t>
+            </a:r>
+          </a:p>
+        </p:txBody>
+      </p:sp>
+      <p:sp>
+        <p:nvSpPr>
+          <p:cNvPr id="38" name="TextBox 37"/>
+          <p:cNvSpPr txBox="1"/>
+          <p:nvPr/>
+        </p:nvSpPr>
+        <p:spPr>
+          <a:xfrm>
+            <a:off x="10744200" y="6016752"/>
+            <a:ext cx="6492240" cy="2468880"/>
+          </a:xfrm>
+          <a:prstGeom prst="rect">
+            <a:avLst/>
+          </a:prstGeom>
+          <a:noFill/>
+        </p:spPr>
+        <p:txBody>
+          <a:bodyPr wrap="square" anchor="t" lIns="27432" rIns="27432" tIns="18288" bIns="18288">
+            <a:noAutofit/>
+          </a:bodyPr>
+          <a:lstStyle/>
+          <a:p>
+            <a:pPr algn="l" marL="201168" indent="-201168">
+              <a:spcAft>
+                <a:spcPts val="900"/>
+              </a:spcAft>
+              <a:buFont typeface="Arial"/>
+              <a:buChar char="•"/>
+            </a:pPr>
+            <a:r>
+              <a:rPr sz="1650" b="1" i="0">
+                <a:solidFill>
+                  <a:srgbClr val="000000"/>
+                </a:solidFill>
+                <a:latin typeface="Calibri"/>
+              </a:rPr>
+              <a:t>Phone Security</a:t>
+            </a:r>
+            <a:r>
+              <a:rPr sz="1650" b="0" i="0">
+                <a:solidFill>
+                  <a:srgbClr val="000000"/>
+                </a:solidFill>
+                <a:latin typeface="Calibri"/>
+              </a:rPr>
+              <a:t> - sign each test with the phone’s security chip.</a:t>
+            </a:r>
+          </a:p>
+          <a:p>
+            <a:pPr algn="l" marL="201168" indent="-201168">
+              <a:spcAft>
+                <a:spcPts val="900"/>
+              </a:spcAft>
+              <a:buFont typeface="Arial"/>
+              <a:buChar char="•"/>
+            </a:pPr>
+            <a:r>
+              <a:rPr sz="1650" b="1" i="0">
+                <a:solidFill>
+                  <a:srgbClr val="000000"/>
+                </a:solidFill>
+                <a:latin typeface="Calibri"/>
+              </a:rPr>
+              <a:t>Lab Comparison</a:t>
+            </a:r>
+            <a:r>
+              <a:rPr sz="1650" b="0" i="0">
+                <a:solidFill>
+                  <a:srgbClr val="000000"/>
+                </a:solidFill>
+                <a:latin typeface="Calibri"/>
+              </a:rPr>
+              <a:t> - FSL trial with real kits, compare with lab results.</a:t>
+            </a:r>
+          </a:p>
+          <a:p>
+            <a:pPr algn="l" marL="201168" indent="-201168">
+              <a:spcAft>
+                <a:spcPts val="900"/>
+              </a:spcAft>
+              <a:buFont typeface="Arial"/>
+              <a:buChar char="•"/>
+            </a:pPr>
+            <a:r>
+              <a:rPr sz="1650" b="1" i="0">
+                <a:solidFill>
+                  <a:srgbClr val="000000"/>
+                </a:solidFill>
+                <a:latin typeface="Calibri"/>
+              </a:rPr>
+              <a:t>Screen-photo Check</a:t>
+            </a:r>
+            <a:r>
+              <a:rPr sz="1650" b="0" i="0">
+                <a:solidFill>
+                  <a:srgbClr val="000000"/>
+                </a:solidFill>
+                <a:latin typeface="Calibri"/>
+              </a:rPr>
+              <a:t> - catch photos of a screen, phone integrity check.</a:t>
+            </a:r>
+          </a:p>
+          <a:p>
+            <a:pPr algn="l" marL="201168" indent="-201168">
+              <a:spcAft>
+                <a:spcPts val="900"/>
+              </a:spcAft>
+              <a:buFont typeface="Arial"/>
+              <a:buChar char="•"/>
+            </a:pPr>
+            <a:r>
+              <a:rPr sz="1650" b="1" i="0">
+                <a:solidFill>
+                  <a:srgbClr val="000000"/>
+                </a:solidFill>
+                <a:latin typeface="Calibri"/>
+              </a:rPr>
+              <a:t>Police Systems</a:t>
+            </a:r>
+            <a:r>
+              <a:rPr sz="1650" b="0" i="0">
+                <a:solidFill>
+                  <a:srgbClr val="000000"/>
+                </a:solidFill>
+                <a:latin typeface="Calibri"/>
+              </a:rPr>
+              <a:t> - apply to NIC or MHA for the e-Sakshya and CCTNS link.</a:t>
+            </a:r>
+          </a:p>
+          <a:p>
+            <a:pPr algn="l" marL="201168" indent="-201168">
+              <a:spcAft>
+                <a:spcPts val="900"/>
+              </a:spcAft>
+              <a:buFont typeface="Arial"/>
+              <a:buChar char="•"/>
+            </a:pPr>
+            <a:r>
+              <a:rPr sz="1650" b="1" i="0">
+                <a:solidFill>
+                  <a:srgbClr val="000000"/>
+                </a:solidFill>
+                <a:latin typeface="Calibri"/>
+              </a:rPr>
+              <a:t>Regional Languages</a:t>
+            </a:r>
+            <a:r>
+              <a:rPr sz="1650" b="0" i="0">
+                <a:solidFill>
+                  <a:srgbClr val="000000"/>
+                </a:solidFill>
+                <a:latin typeface="Calibri"/>
+              </a:rPr>
+              <a:t> - Tamil is done, Hindi and voice help next.</a:t>
+            </a:r>
+          </a:p>
+        </p:txBody>
+      </p:sp>
+      <p:sp>
+        <p:nvSpPr>
+          <p:cNvPr id="39" name="Rounded Rectangle 38"/>
+          <p:cNvSpPr/>
+          <p:nvPr/>
+        </p:nvSpPr>
+        <p:spPr>
+          <a:xfrm>
+            <a:off x="10561320" y="8430768"/>
+            <a:ext cx="6812280" cy="987552"/>
+          </a:xfrm>
+          <a:prstGeom prst="roundRect">
+            <a:avLst>
+              <a:gd name="adj" fmla="val 8000"/>
+            </a:avLst>
+          </a:prstGeom>
+          <a:noFill/>
+          <a:ln w="28575">
+            <a:solidFill>
+              <a:srgbClr val="7A2F00"/>
+            </a:solidFill>
+          </a:ln>
+          <a:effectLst/>
+        </p:spPr>
+        <p:style>
+          <a:lnRef idx="1">
+            <a:schemeClr val="accent1"/>
+          </a:lnRef>
+          <a:fillRef idx="3">
+            <a:schemeClr val="accent1"/>
+          </a:fillRef>
+          <a:effectRef idx="2">
+            <a:schemeClr val="accent1"/>
+          </a:effectRef>
+          <a:fontRef idx="minor">
+            <a:schemeClr val="lt1"/>
+          </a:fontRef>
+        </p:style>
+        <p:txBody>
+          <a:bodyPr rtlCol="0" anchor="ctr"/>
+          <a:lstStyle/>
+          <a:p>
+            <a:pPr algn="ctr"/>
+          </a:p>
+        </p:txBody>
+      </p:sp>
+      <p:sp>
+        <p:nvSpPr>
+          <p:cNvPr id="40" name="TextBox 39"/>
+          <p:cNvSpPr txBox="1"/>
+          <p:nvPr/>
+        </p:nvSpPr>
+        <p:spPr>
+          <a:xfrm>
+            <a:off x="10698480" y="8476488"/>
+            <a:ext cx="6583680" cy="896112"/>
+          </a:xfrm>
+          <a:prstGeom prst="rect">
+            <a:avLst/>
+          </a:prstGeom>
+          <a:noFill/>
+        </p:spPr>
+        <p:txBody>
+          <a:bodyPr wrap="square" anchor="ctr" lIns="27432" rIns="27432" tIns="18288" bIns="18288">
+            <a:noAutofit/>
+          </a:bodyPr>
+          <a:lstStyle/>
+          <a:p>
+            <a:pPr algn="l">
+              <a:spcAft>
+                <a:spcPts val="0"/>
+              </a:spcAft>
+            </a:pPr>
+            <a:r>
+              <a:rPr sz="1600" b="1" i="0">
+                <a:solidFill>
+                  <a:srgbClr val="000000"/>
+                </a:solidFill>
+                <a:latin typeface="Calibri"/>
+              </a:rPr>
+              <a:t>Offline Mode (Planned, month 1-2)</a:t>
+            </a:r>
+            <a:r>
+              <a:rPr sz="1600" b="0" i="0">
+                <a:solidFill>
+                  <a:srgbClr val="000000"/>
+                </a:solidFill>
+                <a:latin typeface="Calibri"/>
+              </a:rPr>
+              <a:t> - Test and photo hash saved and signed on the phone, synced when the network returns. Duplicates saved once.</a:t>
             </a:r>
           </a:p>
         </p:txBody>
@@ -19803,7 +18409,7 @@
                 </a:solidFill>
                 <a:latin typeface="Calibri"/>
               </a:rPr>
-              <a:t>Corrected colour. Honest NOT SURE. A record anyone can check.</a:t>
+              <a:t>Scan Smart. Verify Clearly. Protect Evidence.</a:t>
             </a:r>
           </a:p>
         </p:txBody>
@@ -23260,7 +21866,7 @@
         </p:nvSpPr>
         <p:spPr>
           <a:xfrm>
-            <a:off x="9966960" y="5715000"/>
+            <a:off x="9966960" y="5532120"/>
             <a:ext cx="7680960" cy="457200"/>
           </a:xfrm>
           <a:prstGeom prst="rect">
@@ -23280,20 +21886,136 @@
               </a:spcAft>
             </a:pPr>
             <a:r>
-              <a:rPr sz="2100" b="1" i="0">
+              <a:rPr sz="2000" b="1" i="0">
                 <a:solidFill>
                   <a:srgbClr val="974826"/>
                 </a:solidFill>
                 <a:latin typeface="Calibri"/>
               </a:rPr>
               <a:t>Why the 29 Sep Scans Said NOT SURE</a:t>
+            </a:r>
+          </a:p>
+        </p:txBody>
+      </p:sp>
+      <p:sp>
+        <p:nvSpPr>
+          <p:cNvPr id="60" name="TextBox 59"/>
+          <p:cNvSpPr txBox="1"/>
+          <p:nvPr/>
+        </p:nvSpPr>
+        <p:spPr>
+          <a:xfrm>
+            <a:off x="9966960" y="5916168"/>
+            <a:ext cx="7726679" cy="960120"/>
+          </a:xfrm>
+          <a:prstGeom prst="rect">
+            <a:avLst/>
+          </a:prstGeom>
+          <a:noFill/>
+        </p:spPr>
+        <p:txBody>
+          <a:bodyPr wrap="square" anchor="t" lIns="27432" rIns="27432" tIns="18288" bIns="18288">
+            <a:noAutofit/>
+          </a:bodyPr>
+          <a:lstStyle/>
+          <a:p>
+            <a:pPr algn="l" marL="201168" indent="-201168">
+              <a:spcAft>
+                <a:spcPts val="200"/>
+              </a:spcAft>
+              <a:buFont typeface="Arial"/>
+              <a:buChar char="•"/>
+            </a:pPr>
+            <a:r>
+              <a:rPr sz="1250" b="1" i="0">
+                <a:solidFill>
+                  <a:srgbClr val="000000"/>
+                </a:solidFill>
+                <a:latin typeface="Calibri"/>
+              </a:rPr>
+              <a:t>3 positive cards</a:t>
+            </a:r>
+            <a:r>
+              <a:rPr sz="1250" b="0" i="0">
+                <a:solidFill>
+                  <a:srgbClr val="000000"/>
+                </a:solidFill>
+                <a:latin typeface="Calibri"/>
+              </a:rPr>
+              <a:t> - photo was blurry (records 13, 14, 20), the app asked for a retake.</a:t>
+            </a:r>
+          </a:p>
+          <a:p>
+            <a:pPr algn="l" marL="201168" indent="-201168">
+              <a:spcAft>
+                <a:spcPts val="200"/>
+              </a:spcAft>
+              <a:buFont typeface="Arial"/>
+              <a:buChar char="•"/>
+            </a:pPr>
+            <a:r>
+              <a:rPr sz="1250" b="1" i="0">
+                <a:solidFill>
+                  <a:srgbClr val="000000"/>
+                </a:solidFill>
+                <a:latin typeface="Calibri"/>
+              </a:rPr>
+              <a:t>7 trick cards</a:t>
+            </a:r>
+            <a:r>
+              <a:rPr sz="1250" b="0" i="0">
+                <a:solidFill>
+                  <a:srgbClr val="000000"/>
+                </a:solidFill>
+                <a:latin typeface="Calibri"/>
+              </a:rPr>
+              <a:t> - 3 matched no kit colour, 4 were stopped earlier by photo checks (1 blurry, 2 card not found, 1 card fit).</a:t>
+            </a:r>
+          </a:p>
+        </p:txBody>
+      </p:sp>
+      <p:sp>
+        <p:nvSpPr>
+          <p:cNvPr id="61" name="TextBox 60"/>
+          <p:cNvSpPr txBox="1"/>
+          <p:nvPr/>
+        </p:nvSpPr>
+        <p:spPr>
+          <a:xfrm>
+            <a:off x="9966960" y="6510528"/>
+            <a:ext cx="7680960" cy="457200"/>
+          </a:xfrm>
+          <a:prstGeom prst="rect">
+            <a:avLst/>
+          </a:prstGeom>
+          <a:noFill/>
+        </p:spPr>
+        <p:txBody>
+          <a:bodyPr wrap="square" anchor="t" lIns="27432" rIns="27432" tIns="18288" bIns="18288">
+            <a:noAutofit/>
+          </a:bodyPr>
+          <a:lstStyle/>
+          <a:p>
+            <a:pPr algn="l">
+              <a:spcAft>
+                <a:spcPts val="0"/>
+              </a:spcAft>
+            </a:pPr>
+            <a:r>
+              <a:rPr sz="2000" b="1" i="0">
+                <a:solidFill>
+                  <a:srgbClr val="974826"/>
+                </a:solidFill>
+                <a:latin typeface="Calibri"/>
+              </a:rPr>
+              <a:t>Tamper Test on Our Saved Records (29 Sep)</a:t>
             </a:r>
           </a:p>
         </p:txBody>
       </p:sp>
       <p:pic>
         <p:nvPicPr>
-          <p:cNvPr id="60" name="Picture 59" descr="real_scans_tiles.png"/>
+          <p:cNvPr id="62" name="Picture 61" descr="tamper_proof_tall.png"/>
           <p:cNvPicPr>
             <a:picLocks noChangeAspect="1"/>
           </p:cNvPicPr>
@@ -23301,115 +22023,21 @@
         </p:nvPicPr>
         <p:blipFill>
           <a:blip r:embed="rId10"/>
+          <a:srcRect/>
           <a:stretch>
             <a:fillRect/>
           </a:stretch>
         </p:blipFill>
         <p:spPr>
           <a:xfrm>
-            <a:off x="9966960" y="6144768"/>
-            <a:ext cx="5120640" cy="3173046"/>
+            <a:off x="9966960" y="6912864"/>
+            <a:ext cx="6824433" cy="2450592"/>
           </a:xfrm>
           <a:prstGeom prst="rect">
             <a:avLst/>
           </a:prstGeom>
         </p:spPr>
       </p:pic>
-      <p:sp>
-        <p:nvSpPr>
-          <p:cNvPr id="61" name="TextBox 60"/>
-          <p:cNvSpPr txBox="1"/>
-          <p:nvPr/>
-        </p:nvSpPr>
-        <p:spPr>
-          <a:xfrm>
-            <a:off x="15224759" y="6144768"/>
-            <a:ext cx="2514600" cy="3291840"/>
-          </a:xfrm>
-          <a:prstGeom prst="rect">
-            <a:avLst/>
-          </a:prstGeom>
-          <a:noFill/>
-        </p:spPr>
-        <p:txBody>
-          <a:bodyPr wrap="square" anchor="t" lIns="27432" rIns="27432" tIns="18288" bIns="18288">
-            <a:noAutofit/>
-          </a:bodyPr>
-          <a:lstStyle/>
-          <a:p>
-            <a:pPr algn="l" marL="201168" indent="-201168">
-              <a:spcAft>
-                <a:spcPts val="500"/>
-              </a:spcAft>
-              <a:buFont typeface="Arial"/>
-              <a:buChar char="•"/>
-            </a:pPr>
-            <a:r>
-              <a:rPr sz="1250" b="1" i="0">
-                <a:solidFill>
-                  <a:srgbClr val="000000"/>
-                </a:solidFill>
-                <a:latin typeface="Calibri"/>
-              </a:rPr>
-              <a:t>3 positive cards</a:t>
-            </a:r>
-            <a:r>
-              <a:rPr sz="1250" b="0" i="0">
-                <a:solidFill>
-                  <a:srgbClr val="000000"/>
-                </a:solidFill>
-                <a:latin typeface="Calibri"/>
-              </a:rPr>
-              <a:t> - photo was blurry (records 13, 14, 20). The app asked for a retake.</a:t>
-            </a:r>
-          </a:p>
-          <a:p>
-            <a:pPr algn="l" marL="201168" indent="-201168">
-              <a:spcAft>
-                <a:spcPts val="500"/>
-              </a:spcAft>
-              <a:buFont typeface="Arial"/>
-              <a:buChar char="•"/>
-            </a:pPr>
-            <a:r>
-              <a:rPr sz="1250" b="1" i="0">
-                <a:solidFill>
-                  <a:srgbClr val="000000"/>
-                </a:solidFill>
-                <a:latin typeface="Calibri"/>
-              </a:rPr>
-              <a:t>7 trick cards</a:t>
-            </a:r>
-            <a:r>
-              <a:rPr sz="1250" b="0" i="0">
-                <a:solidFill>
-                  <a:srgbClr val="000000"/>
-                </a:solidFill>
-                <a:latin typeface="Calibri"/>
-              </a:rPr>
-              <a:t> - 3 matched no kit colour, 4 were stopped earlier by photo checks (1 blurry, 2 card not found, 1 card fit).</a:t>
-            </a:r>
-          </a:p>
-          <a:p>
-            <a:pPr algn="l" marL="201168" indent="-201168">
-              <a:spcAft>
-                <a:spcPts val="500"/>
-              </a:spcAft>
-              <a:buFont typeface="Arial"/>
-              <a:buChar char="•"/>
-            </a:pPr>
-            <a:r>
-              <a:rPr sz="1250" b="0" i="0">
-                <a:solidFill>
-                  <a:srgbClr val="000000"/>
-                </a:solidFill>
-                <a:latin typeface="Calibri"/>
-              </a:rPr>
-              <a:t>Stress test: all 38 NOT SURE on real cards came from blurry photos.</a:t>
-            </a:r>
-          </a:p>
-        </p:txBody>
-      </p:sp>
     </p:spTree>
   </p:cSld>
   <p:clrMapOvr>
